--- a/output/wordlabs-act-3day.pptx
+++ b/output/wordlabs-act-3day.pptx
@@ -4279,7 +4279,7 @@
                 <a:ea typeface="Calibri" pitchFamily="34" charset="-122"/>
                 <a:cs typeface="Calibri" pitchFamily="34" charset="-120"/>
               </a:rPr>
-              <a:t>Origin: Latin: agere</a:t>
+              <a:t>Origin: Latin: agere/actum</a:t>
             </a:r>
             <a:endParaRPr lang="en-US" sz="1300" dirty="0"/>
           </a:p>
@@ -6040,7 +6040,7 @@
                 <a:ea typeface="Calibri" pitchFamily="34" charset="-122"/>
                 <a:cs typeface="Calibri" pitchFamily="34" charset="-120"/>
               </a:rPr>
-              <a:t>The main </a:t>
+              <a:t>The brave </a:t>
             </a:r>
             <a:pPr algn="l" indent="0" marL="0">
               <a:buNone/>
@@ -6057,7 +6057,7 @@
                 <a:ea typeface="Calibri" pitchFamily="34" charset="-122"/>
                 <a:cs typeface="Calibri" pitchFamily="34" charset="-120"/>
               </a:rPr>
-              <a:t>actor</a:t>
+              <a:t>action</a:t>
             </a:r>
             <a:pPr algn="l" indent="0" marL="0">
               <a:buNone/>
@@ -6071,7 +6071,7 @@
                 <a:ea typeface="Calibri" pitchFamily="34" charset="-122"/>
                 <a:cs typeface="Calibri" pitchFamily="34" charset="-120"/>
               </a:rPr>
-              <a:t> had to </a:t>
+              <a:t> of the firefighter was </a:t>
             </a:r>
             <a:pPr algn="l" indent="0" marL="0">
               <a:buNone/>
@@ -6088,7 +6088,7 @@
                 <a:ea typeface="Calibri" pitchFamily="34" charset="-122"/>
                 <a:cs typeface="Calibri" pitchFamily="34" charset="-120"/>
               </a:rPr>
-              <a:t>react</a:t>
+              <a:t>actual</a:t>
             </a:r>
             <a:pPr algn="l" indent="0" marL="0">
               <a:buNone/>
@@ -6102,7 +6102,7 @@
                 <a:ea typeface="Calibri" pitchFamily="34" charset="-122"/>
                 <a:cs typeface="Calibri" pitchFamily="34" charset="-120"/>
               </a:rPr>
-              <a:t> calmly when the lights went out on stage.</a:t>
+              <a:t> proof that heroes are real.</a:t>
             </a:r>
             <a:endParaRPr lang="en-US" sz="1800" dirty="0"/>
           </a:p>
@@ -6257,7 +6257,7 @@
                 <a:ea typeface="Trebuchet MS" pitchFamily="34" charset="-122"/>
                 <a:cs typeface="Trebuchet MS" pitchFamily="34" charset="-120"/>
               </a:rPr>
-              <a:t>actor</a:t>
+              <a:t>action</a:t>
             </a:r>
             <a:endParaRPr lang="en-US" sz="1400" dirty="0"/>
           </a:p>
@@ -6385,7 +6385,7 @@
                 <a:ea typeface="Trebuchet MS" pitchFamily="34" charset="-122"/>
                 <a:cs typeface="Trebuchet MS" pitchFamily="34" charset="-120"/>
               </a:rPr>
-              <a:t>react</a:t>
+              <a:t>actual</a:t>
             </a:r>
             <a:endParaRPr lang="en-US" sz="1400" dirty="0"/>
           </a:p>
@@ -6855,7 +6855,7 @@
                 <a:ea typeface="Trebuchet MS" pitchFamily="34" charset="-122"/>
                 <a:cs typeface="Trebuchet MS" pitchFamily="34" charset="-120"/>
               </a:rPr>
-              <a:t>actor</a:t>
+              <a:t>action</a:t>
             </a:r>
             <a:endParaRPr lang="en-US" sz="2800" dirty="0"/>
           </a:p>
@@ -7682,7 +7682,7 @@
                 <a:ea typeface="Trebuchet MS" pitchFamily="34" charset="-122"/>
                 <a:cs typeface="Trebuchet MS" pitchFamily="34" charset="-120"/>
               </a:rPr>
-              <a:t>actor</a:t>
+              <a:t>action</a:t>
             </a:r>
             <a:endParaRPr lang="en-US" sz="2800" dirty="0"/>
           </a:p>
@@ -7933,7 +7933,7 @@
                 <a:ea typeface="Trebuchet MS" pitchFamily="34" charset="-122"/>
                 <a:cs typeface="Trebuchet MS" pitchFamily="34" charset="-120"/>
               </a:rPr>
-              <a:t>or</a:t>
+              <a:t>ion</a:t>
             </a:r>
             <a:endParaRPr lang="en-US" sz="1300" dirty="0"/>
           </a:p>
@@ -7972,7 +7972,7 @@
                 <a:ea typeface="Calibri" pitchFamily="34" charset="-122"/>
                 <a:cs typeface="Calibri" pitchFamily="34" charset="-120"/>
               </a:rPr>
-              <a:t>person who does</a:t>
+              <a:t>state or process of</a:t>
             </a:r>
             <a:endParaRPr lang="en-US" sz="850" dirty="0"/>
           </a:p>
@@ -8667,7 +8667,7 @@
                 <a:ea typeface="Trebuchet MS" pitchFamily="34" charset="-122"/>
                 <a:cs typeface="Trebuchet MS" pitchFamily="34" charset="-120"/>
               </a:rPr>
-              <a:t>actor</a:t>
+              <a:t>action</a:t>
             </a:r>
             <a:endParaRPr lang="en-US" sz="2800" dirty="0"/>
           </a:p>
@@ -8918,7 +8918,7 @@
                 <a:ea typeface="Trebuchet MS" pitchFamily="34" charset="-122"/>
                 <a:cs typeface="Trebuchet MS" pitchFamily="34" charset="-120"/>
               </a:rPr>
-              <a:t>or</a:t>
+              <a:t>ion</a:t>
             </a:r>
             <a:endParaRPr lang="en-US" sz="1300" dirty="0"/>
           </a:p>
@@ -8957,7 +8957,7 @@
                 <a:ea typeface="Calibri" pitchFamily="34" charset="-122"/>
                 <a:cs typeface="Calibri" pitchFamily="34" charset="-120"/>
               </a:rPr>
-              <a:t>person who does</a:t>
+              <a:t>state or process of</a:t>
             </a:r>
             <a:endParaRPr lang="en-US" sz="850" dirty="0"/>
           </a:p>
@@ -9221,7 +9221,7 @@
                 <a:ea typeface="Trebuchet MS" pitchFamily="34" charset="-122"/>
                 <a:cs typeface="Trebuchet MS" pitchFamily="34" charset="-120"/>
               </a:rPr>
-              <a:t>tor</a:t>
+              <a:t>tion</a:t>
             </a:r>
             <a:endParaRPr lang="en-US" sz="1400" dirty="0"/>
           </a:p>
@@ -9784,7 +9784,7 @@
                 <a:ea typeface="Trebuchet MS" pitchFamily="34" charset="-122"/>
                 <a:cs typeface="Trebuchet MS" pitchFamily="34" charset="-120"/>
               </a:rPr>
-              <a:t>actor</a:t>
+              <a:t>action</a:t>
             </a:r>
             <a:endParaRPr lang="en-US" sz="2800" dirty="0"/>
           </a:p>
@@ -10035,7 +10035,7 @@
                 <a:ea typeface="Trebuchet MS" pitchFamily="34" charset="-122"/>
                 <a:cs typeface="Trebuchet MS" pitchFamily="34" charset="-120"/>
               </a:rPr>
-              <a:t>or</a:t>
+              <a:t>ion</a:t>
             </a:r>
             <a:endParaRPr lang="en-US" sz="1300" dirty="0"/>
           </a:p>
@@ -10074,7 +10074,7 @@
                 <a:ea typeface="Calibri" pitchFamily="34" charset="-122"/>
                 <a:cs typeface="Calibri" pitchFamily="34" charset="-120"/>
               </a:rPr>
-              <a:t>person who does</a:t>
+              <a:t>state or process of</a:t>
             </a:r>
             <a:endParaRPr lang="en-US" sz="850" dirty="0"/>
           </a:p>
@@ -10338,7 +10338,7 @@
                 <a:ea typeface="Trebuchet MS" pitchFamily="34" charset="-122"/>
                 <a:cs typeface="Trebuchet MS" pitchFamily="34" charset="-120"/>
               </a:rPr>
-              <a:t>tor</a:t>
+              <a:t>tion</a:t>
             </a:r>
             <a:endParaRPr lang="en-US" sz="1400" dirty="0"/>
           </a:p>
@@ -10419,11 +10419,11 @@
         <p:spPr>
           <a:xfrm>
             <a:off x="1874520" y="4096512"/>
-            <a:ext cx="6903720" cy="658368"/>
+            <a:ext cx="6903720" cy="804672"/>
           </a:xfrm>
           <a:prstGeom prst="rect">
             <a:avLst>
-              <a:gd name="adj" fmla="val 8333"/>
+              <a:gd name="adj" fmla="val 6818"/>
             </a:avLst>
           </a:prstGeom>
           <a:solidFill>
@@ -10445,12 +10445,12 @@
         </p:nvSpPr>
         <p:spPr>
           <a:xfrm>
-            <a:off x="2670048" y="4169664"/>
-            <a:ext cx="685800" cy="475488"/>
+            <a:off x="2427732" y="4169664"/>
+            <a:ext cx="685800" cy="384048"/>
           </a:xfrm>
           <a:prstGeom prst="rect">
             <a:avLst>
-              <a:gd name="adj" fmla="val 7692"/>
+              <a:gd name="adj" fmla="val 9524"/>
             </a:avLst>
           </a:prstGeom>
           <a:solidFill>
@@ -10472,8 +10472,8 @@
         </p:nvSpPr>
         <p:spPr>
           <a:xfrm>
-            <a:off x="2670048" y="4169664"/>
-            <a:ext cx="685800" cy="475488"/>
+            <a:off x="2427732" y="4169664"/>
+            <a:ext cx="685800" cy="384048"/>
           </a:xfrm>
           <a:prstGeom prst="rect">
             <a:avLst/>
@@ -10511,12 +10511,12 @@
         </p:nvSpPr>
         <p:spPr>
           <a:xfrm>
-            <a:off x="4123944" y="4169664"/>
-            <a:ext cx="685800" cy="475488"/>
+            <a:off x="3639312" y="4169664"/>
+            <a:ext cx="685800" cy="384048"/>
           </a:xfrm>
           <a:prstGeom prst="rect">
             <a:avLst>
-              <a:gd name="adj" fmla="val 7692"/>
+              <a:gd name="adj" fmla="val 9524"/>
             </a:avLst>
           </a:prstGeom>
           <a:solidFill>
@@ -10538,8 +10538,8 @@
         </p:nvSpPr>
         <p:spPr>
           <a:xfrm>
-            <a:off x="4123944" y="4169664"/>
-            <a:ext cx="685800" cy="475488"/>
+            <a:off x="3639312" y="4169664"/>
+            <a:ext cx="685800" cy="384048"/>
           </a:xfrm>
           <a:prstGeom prst="rect">
             <a:avLst/>
@@ -10577,12 +10577,12 @@
         </p:nvSpPr>
         <p:spPr>
           <a:xfrm>
-            <a:off x="5577840" y="4169664"/>
-            <a:ext cx="685800" cy="475488"/>
+            <a:off x="4850892" y="4169664"/>
+            <a:ext cx="685800" cy="384048"/>
           </a:xfrm>
           <a:prstGeom prst="rect">
             <a:avLst>
-              <a:gd name="adj" fmla="val 7692"/>
+              <a:gd name="adj" fmla="val 9524"/>
             </a:avLst>
           </a:prstGeom>
           <a:solidFill>
@@ -10604,8 +10604,8 @@
         </p:nvSpPr>
         <p:spPr>
           <a:xfrm>
-            <a:off x="5577840" y="4169664"/>
-            <a:ext cx="685800" cy="475488"/>
+            <a:off x="4850892" y="4169664"/>
+            <a:ext cx="685800" cy="384048"/>
           </a:xfrm>
           <a:prstGeom prst="rect">
             <a:avLst/>
@@ -10643,12 +10643,12 @@
         </p:nvSpPr>
         <p:spPr>
           <a:xfrm>
-            <a:off x="7031736" y="4169664"/>
-            <a:ext cx="685800" cy="475488"/>
+            <a:off x="6062472" y="4169664"/>
+            <a:ext cx="685800" cy="384048"/>
           </a:xfrm>
           <a:prstGeom prst="rect">
             <a:avLst>
-              <a:gd name="adj" fmla="val 7692"/>
+              <a:gd name="adj" fmla="val 9524"/>
             </a:avLst>
           </a:prstGeom>
           <a:solidFill>
@@ -10670,8 +10670,8 @@
         </p:nvSpPr>
         <p:spPr>
           <a:xfrm>
-            <a:off x="7031736" y="4169664"/>
-            <a:ext cx="685800" cy="475488"/>
+            <a:off x="6062472" y="4169664"/>
+            <a:ext cx="685800" cy="384048"/>
           </a:xfrm>
           <a:prstGeom prst="rect">
             <a:avLst/>
@@ -10695,7 +10695,112 @@
                 <a:ea typeface="Trebuchet MS" pitchFamily="34" charset="-122"/>
                 <a:cs typeface="Trebuchet MS" pitchFamily="34" charset="-120"/>
               </a:rPr>
-              <a:t>or</a:t>
+              <a:t>io</a:t>
+            </a:r>
+            <a:endParaRPr lang="en-US" sz="900" dirty="0"/>
+          </a:p>
+        </p:txBody>
+      </p:sp>
+      <p:sp>
+        <p:nvSpPr>
+          <p:cNvPr id="41" name="Text 39"/>
+          <p:cNvSpPr/>
+          <p:nvPr/>
+        </p:nvSpPr>
+        <p:spPr>
+          <a:xfrm>
+            <a:off x="6062472" y="4572000"/>
+            <a:ext cx="685800" cy="219456"/>
+          </a:xfrm>
+          <a:prstGeom prst="rect">
+            <a:avLst/>
+          </a:prstGeom>
+          <a:noFill/>
+          <a:ln/>
+        </p:spPr>
+        <p:txBody>
+          <a:bodyPr wrap="square" lIns="0" tIns="0" rIns="0" bIns="0" rtlCol="0" anchor="t"/>
+          <a:lstStyle/>
+          <a:p>
+            <a:pPr algn="ctr" indent="0" marL="0">
+              <a:buNone/>
+            </a:pPr>
+            <a:r>
+              <a:rPr lang="en-US" sz="750" i="1" dirty="0">
+                <a:solidFill>
+                  <a:srgbClr val="94A3B8"/>
+                </a:solidFill>
+                <a:latin typeface="Calibri" pitchFamily="34" charset="0"/>
+                <a:ea typeface="Calibri" pitchFamily="34" charset="-122"/>
+                <a:cs typeface="Calibri" pitchFamily="34" charset="-120"/>
+              </a:rPr>
+              <a:t>/sh/</a:t>
+            </a:r>
+            <a:endParaRPr lang="en-US" sz="750" dirty="0"/>
+          </a:p>
+        </p:txBody>
+      </p:sp>
+      <p:sp>
+        <p:nvSpPr>
+          <p:cNvPr id="42" name="Shape 40"/>
+          <p:cNvSpPr/>
+          <p:nvPr/>
+        </p:nvSpPr>
+        <p:spPr>
+          <a:xfrm>
+            <a:off x="7274052" y="4169664"/>
+            <a:ext cx="685800" cy="384048"/>
+          </a:xfrm>
+          <a:prstGeom prst="rect">
+            <a:avLst>
+              <a:gd name="adj" fmla="val 9524"/>
+            </a:avLst>
+          </a:prstGeom>
+          <a:solidFill>
+            <a:srgbClr val="FFFFFF"/>
+          </a:solidFill>
+          <a:ln w="12700">
+            <a:solidFill>
+              <a:srgbClr val="DB2777"/>
+            </a:solidFill>
+            <a:prstDash val="solid"/>
+          </a:ln>
+        </p:spPr>
+      </p:sp>
+      <p:sp>
+        <p:nvSpPr>
+          <p:cNvPr id="43" name="Text 41"/>
+          <p:cNvSpPr/>
+          <p:nvPr/>
+        </p:nvSpPr>
+        <p:spPr>
+          <a:xfrm>
+            <a:off x="7274052" y="4169664"/>
+            <a:ext cx="685800" cy="384048"/>
+          </a:xfrm>
+          <a:prstGeom prst="rect">
+            <a:avLst/>
+          </a:prstGeom>
+          <a:noFill/>
+          <a:ln/>
+        </p:spPr>
+        <p:txBody>
+          <a:bodyPr wrap="square" lIns="0" tIns="0" rIns="0" bIns="0" rtlCol="0" anchor="ctr"/>
+          <a:lstStyle/>
+          <a:p>
+            <a:pPr algn="ctr" indent="0" marL="0">
+              <a:buNone/>
+            </a:pPr>
+            <a:r>
+              <a:rPr lang="en-US" sz="900" b="1" dirty="0">
+                <a:solidFill>
+                  <a:srgbClr val="9D174D"/>
+                </a:solidFill>
+                <a:latin typeface="Trebuchet MS" pitchFamily="34" charset="0"/>
+                <a:ea typeface="Trebuchet MS" pitchFamily="34" charset="-122"/>
+                <a:cs typeface="Trebuchet MS" pitchFamily="34" charset="-120"/>
+              </a:rPr>
+              <a:t>n</a:t>
             </a:r>
             <a:endParaRPr lang="en-US" sz="900" dirty="0"/>
           </a:p>
@@ -11126,7 +11231,7 @@
                 <a:ea typeface="Trebuchet MS" pitchFamily="34" charset="-122"/>
                 <a:cs typeface="Trebuchet MS" pitchFamily="34" charset="-120"/>
               </a:rPr>
-              <a:t>react</a:t>
+              <a:t>actual</a:t>
             </a:r>
             <a:endParaRPr lang="en-US" sz="2800" dirty="0"/>
           </a:p>
@@ -11953,7 +12058,7 @@
                 <a:ea typeface="Trebuchet MS" pitchFamily="34" charset="-122"/>
                 <a:cs typeface="Trebuchet MS" pitchFamily="34" charset="-120"/>
               </a:rPr>
-              <a:t>react</a:t>
+              <a:t>actual</a:t>
             </a:r>
             <a:endParaRPr lang="en-US" sz="2800" dirty="0"/>
           </a:p>
@@ -12042,11 +12147,11 @@
             </a:avLst>
           </a:prstGeom>
           <a:solidFill>
-            <a:srgbClr val="DDD6FE"/>
+            <a:srgbClr val="CCFBF1"/>
           </a:solidFill>
           <a:ln w="19050">
             <a:solidFill>
-              <a:srgbClr val="7C3AED"/>
+              <a:srgbClr val="0D9488"/>
             </a:solidFill>
             <a:prstDash val="solid"/>
           </a:ln>
@@ -12086,13 +12191,13 @@
             <a:r>
               <a:rPr lang="en-US" sz="1300" b="1" dirty="0">
                 <a:solidFill>
-                  <a:srgbClr val="4C1D95"/>
+                  <a:srgbClr val="0F766E"/>
                 </a:solidFill>
                 <a:latin typeface="Trebuchet MS" pitchFamily="34" charset="0"/>
                 <a:ea typeface="Trebuchet MS" pitchFamily="34" charset="-122"/>
                 <a:cs typeface="Trebuchet MS" pitchFamily="34" charset="-120"/>
               </a:rPr>
-              <a:t>re</a:t>
+              <a:t>act</a:t>
             </a:r>
             <a:endParaRPr lang="en-US" sz="1300" dirty="0"/>
           </a:p>
@@ -12131,7 +12236,7 @@
                 <a:ea typeface="Calibri" pitchFamily="34" charset="-122"/>
                 <a:cs typeface="Calibri" pitchFamily="34" charset="-120"/>
               </a:rPr>
-              <a:t>again, back</a:t>
+              <a:t>to do or perform</a:t>
             </a:r>
             <a:endParaRPr lang="en-US" sz="850" dirty="0"/>
           </a:p>
@@ -12154,11 +12259,11 @@
             </a:avLst>
           </a:prstGeom>
           <a:solidFill>
-            <a:srgbClr val="CCFBF1"/>
+            <a:srgbClr val="FCE7F3"/>
           </a:solidFill>
           <a:ln w="19050">
             <a:solidFill>
-              <a:srgbClr val="0D9488"/>
+              <a:srgbClr val="DB2777"/>
             </a:solidFill>
             <a:prstDash val="solid"/>
           </a:ln>
@@ -12198,13 +12303,13 @@
             <a:r>
               <a:rPr lang="en-US" sz="1300" b="1" dirty="0">
                 <a:solidFill>
-                  <a:srgbClr val="0F766E"/>
+                  <a:srgbClr val="9D174D"/>
                 </a:solidFill>
                 <a:latin typeface="Trebuchet MS" pitchFamily="34" charset="0"/>
                 <a:ea typeface="Trebuchet MS" pitchFamily="34" charset="-122"/>
                 <a:cs typeface="Trebuchet MS" pitchFamily="34" charset="-120"/>
               </a:rPr>
-              <a:t>act</a:t>
+              <a:t>ual</a:t>
             </a:r>
             <a:endParaRPr lang="en-US" sz="1300" dirty="0"/>
           </a:p>
@@ -12243,7 +12348,7 @@
                 <a:ea typeface="Calibri" pitchFamily="34" charset="-122"/>
                 <a:cs typeface="Calibri" pitchFamily="34" charset="-120"/>
               </a:rPr>
-              <a:t>to do or perform</a:t>
+              <a:t>relating to</a:t>
             </a:r>
             <a:endParaRPr lang="en-US" sz="850" dirty="0"/>
           </a:p>
@@ -12938,7 +13043,7 @@
                 <a:ea typeface="Trebuchet MS" pitchFamily="34" charset="-122"/>
                 <a:cs typeface="Trebuchet MS" pitchFamily="34" charset="-120"/>
               </a:rPr>
-              <a:t>react</a:t>
+              <a:t>actual</a:t>
             </a:r>
             <a:endParaRPr lang="en-US" sz="2800" dirty="0"/>
           </a:p>
@@ -13027,11 +13132,11 @@
             </a:avLst>
           </a:prstGeom>
           <a:solidFill>
-            <a:srgbClr val="DDD6FE"/>
+            <a:srgbClr val="CCFBF1"/>
           </a:solidFill>
           <a:ln w="19050">
             <a:solidFill>
-              <a:srgbClr val="7C3AED"/>
+              <a:srgbClr val="0D9488"/>
             </a:solidFill>
             <a:prstDash val="solid"/>
           </a:ln>
@@ -13071,13 +13176,13 @@
             <a:r>
               <a:rPr lang="en-US" sz="1300" b="1" dirty="0">
                 <a:solidFill>
-                  <a:srgbClr val="4C1D95"/>
+                  <a:srgbClr val="0F766E"/>
                 </a:solidFill>
                 <a:latin typeface="Trebuchet MS" pitchFamily="34" charset="0"/>
                 <a:ea typeface="Trebuchet MS" pitchFamily="34" charset="-122"/>
                 <a:cs typeface="Trebuchet MS" pitchFamily="34" charset="-120"/>
               </a:rPr>
-              <a:t>re</a:t>
+              <a:t>act</a:t>
             </a:r>
             <a:endParaRPr lang="en-US" sz="1300" dirty="0"/>
           </a:p>
@@ -13116,7 +13221,7 @@
                 <a:ea typeface="Calibri" pitchFamily="34" charset="-122"/>
                 <a:cs typeface="Calibri" pitchFamily="34" charset="-120"/>
               </a:rPr>
-              <a:t>again, back</a:t>
+              <a:t>to do or perform</a:t>
             </a:r>
             <a:endParaRPr lang="en-US" sz="850" dirty="0"/>
           </a:p>
@@ -13139,11 +13244,11 @@
             </a:avLst>
           </a:prstGeom>
           <a:solidFill>
-            <a:srgbClr val="CCFBF1"/>
+            <a:srgbClr val="FCE7F3"/>
           </a:solidFill>
           <a:ln w="19050">
             <a:solidFill>
-              <a:srgbClr val="0D9488"/>
+              <a:srgbClr val="DB2777"/>
             </a:solidFill>
             <a:prstDash val="solid"/>
           </a:ln>
@@ -13183,13 +13288,13 @@
             <a:r>
               <a:rPr lang="en-US" sz="1300" b="1" dirty="0">
                 <a:solidFill>
-                  <a:srgbClr val="0F766E"/>
+                  <a:srgbClr val="9D174D"/>
                 </a:solidFill>
                 <a:latin typeface="Trebuchet MS" pitchFamily="34" charset="0"/>
                 <a:ea typeface="Trebuchet MS" pitchFamily="34" charset="-122"/>
                 <a:cs typeface="Trebuchet MS" pitchFamily="34" charset="-120"/>
               </a:rPr>
-              <a:t>act</a:t>
+              <a:t>ual</a:t>
             </a:r>
             <a:endParaRPr lang="en-US" sz="1300" dirty="0"/>
           </a:p>
@@ -13228,7 +13333,7 @@
                 <a:ea typeface="Calibri" pitchFamily="34" charset="-122"/>
                 <a:cs typeface="Calibri" pitchFamily="34" charset="-120"/>
               </a:rPr>
-              <a:t>to do or perform</a:t>
+              <a:t>relating to</a:t>
             </a:r>
             <a:endParaRPr lang="en-US" sz="850" dirty="0"/>
           </a:p>
@@ -13335,7 +13440,7 @@
         </p:nvSpPr>
         <p:spPr>
           <a:xfrm>
-            <a:off x="2999232" y="3364992"/>
+            <a:off x="2313432" y="3364992"/>
             <a:ext cx="1645920" cy="475488"/>
           </a:xfrm>
           <a:prstGeom prst="rect">
@@ -13362,7 +13467,7 @@
         </p:nvSpPr>
         <p:spPr>
           <a:xfrm>
-            <a:off x="2999232" y="3364992"/>
+            <a:off x="2313432" y="3364992"/>
             <a:ext cx="1645920" cy="475488"/>
           </a:xfrm>
           <a:prstGeom prst="rect">
@@ -13387,7 +13492,7 @@
                 <a:ea typeface="Trebuchet MS" pitchFamily="34" charset="-122"/>
                 <a:cs typeface="Trebuchet MS" pitchFamily="34" charset="-120"/>
               </a:rPr>
-              <a:t>re</a:t>
+              <a:t>ac</a:t>
             </a:r>
             <a:endParaRPr lang="en-US" sz="1400" dirty="0"/>
           </a:p>
@@ -13401,8 +13506,8 @@
         </p:nvSpPr>
         <p:spPr>
           <a:xfrm>
-            <a:off x="4645152" y="3364992"/>
-            <a:ext cx="1097280" cy="475488"/>
+            <a:off x="3959352" y="3364992"/>
+            <a:ext cx="411480" cy="475488"/>
           </a:xfrm>
           <a:prstGeom prst="rect">
             <a:avLst/>
@@ -13440,7 +13545,7 @@
         </p:nvSpPr>
         <p:spPr>
           <a:xfrm>
-            <a:off x="5742432" y="3364992"/>
+            <a:off x="4370832" y="3364992"/>
             <a:ext cx="1645920" cy="475488"/>
           </a:xfrm>
           <a:prstGeom prst="rect">
@@ -13467,7 +13572,7 @@
         </p:nvSpPr>
         <p:spPr>
           <a:xfrm>
-            <a:off x="5742432" y="3364992"/>
+            <a:off x="4370832" y="3364992"/>
             <a:ext cx="1645920" cy="475488"/>
           </a:xfrm>
           <a:prstGeom prst="rect">
@@ -13492,7 +13597,7 @@
                 <a:ea typeface="Trebuchet MS" pitchFamily="34" charset="-122"/>
                 <a:cs typeface="Trebuchet MS" pitchFamily="34" charset="-120"/>
               </a:rPr>
-              <a:t>act</a:t>
+              <a:t>tu</a:t>
             </a:r>
             <a:endParaRPr lang="en-US" sz="1400" dirty="0"/>
           </a:p>
@@ -13500,7 +13605,112 @@
       </p:sp>
       <p:sp>
         <p:nvSpPr>
-          <p:cNvPr id="30" name="Shape 28"/>
+          <p:cNvPr id="30" name="Text 28"/>
+          <p:cNvSpPr/>
+          <p:nvPr/>
+        </p:nvSpPr>
+        <p:spPr>
+          <a:xfrm>
+            <a:off x="6016752" y="3364992"/>
+            <a:ext cx="411480" cy="475488"/>
+          </a:xfrm>
+          <a:prstGeom prst="rect">
+            <a:avLst/>
+          </a:prstGeom>
+          <a:noFill/>
+          <a:ln/>
+        </p:spPr>
+        <p:txBody>
+          <a:bodyPr wrap="square" lIns="0" tIns="0" rIns="0" bIns="0" rtlCol="0" anchor="ctr"/>
+          <a:lstStyle/>
+          <a:p>
+            <a:pPr algn="ctr" indent="0" marL="0">
+              <a:buNone/>
+            </a:pPr>
+            <a:r>
+              <a:rPr lang="en-US" sz="1600" b="1" dirty="0">
+                <a:solidFill>
+                  <a:srgbClr val="0D9488"/>
+                </a:solidFill>
+                <a:latin typeface="Trebuchet MS" pitchFamily="34" charset="0"/>
+                <a:ea typeface="Trebuchet MS" pitchFamily="34" charset="-122"/>
+                <a:cs typeface="Trebuchet MS" pitchFamily="34" charset="-120"/>
+              </a:rPr>
+              <a:t>·</a:t>
+            </a:r>
+            <a:endParaRPr lang="en-US" sz="1600" dirty="0"/>
+          </a:p>
+        </p:txBody>
+      </p:sp>
+      <p:sp>
+        <p:nvSpPr>
+          <p:cNvPr id="31" name="Shape 29"/>
+          <p:cNvSpPr/>
+          <p:nvPr/>
+        </p:nvSpPr>
+        <p:spPr>
+          <a:xfrm>
+            <a:off x="6428232" y="3364992"/>
+            <a:ext cx="1645920" cy="475488"/>
+          </a:xfrm>
+          <a:prstGeom prst="rect">
+            <a:avLst>
+              <a:gd name="adj" fmla="val 9615"/>
+            </a:avLst>
+          </a:prstGeom>
+          <a:solidFill>
+            <a:srgbClr val="FFFFFF"/>
+          </a:solidFill>
+          <a:ln w="12700">
+            <a:solidFill>
+              <a:srgbClr val="0D9488"/>
+            </a:solidFill>
+            <a:prstDash val="solid"/>
+          </a:ln>
+        </p:spPr>
+      </p:sp>
+      <p:sp>
+        <p:nvSpPr>
+          <p:cNvPr id="32" name="Text 30"/>
+          <p:cNvSpPr/>
+          <p:nvPr/>
+        </p:nvSpPr>
+        <p:spPr>
+          <a:xfrm>
+            <a:off x="6428232" y="3364992"/>
+            <a:ext cx="1645920" cy="475488"/>
+          </a:xfrm>
+          <a:prstGeom prst="rect">
+            <a:avLst/>
+          </a:prstGeom>
+          <a:noFill/>
+          <a:ln/>
+        </p:spPr>
+        <p:txBody>
+          <a:bodyPr wrap="square" lIns="0" tIns="0" rIns="0" bIns="0" rtlCol="0" anchor="ctr"/>
+          <a:lstStyle/>
+          <a:p>
+            <a:pPr algn="ctr" indent="0" marL="0">
+              <a:buNone/>
+            </a:pPr>
+            <a:r>
+              <a:rPr lang="en-US" sz="1400" b="1" dirty="0">
+                <a:solidFill>
+                  <a:srgbClr val="0D9488"/>
+                </a:solidFill>
+                <a:latin typeface="Trebuchet MS" pitchFamily="34" charset="0"/>
+                <a:ea typeface="Trebuchet MS" pitchFamily="34" charset="-122"/>
+                <a:cs typeface="Trebuchet MS" pitchFamily="34" charset="-120"/>
+              </a:rPr>
+              <a:t>al</a:t>
+            </a:r>
+            <a:endParaRPr lang="en-US" sz="1400" dirty="0"/>
+          </a:p>
+        </p:txBody>
+      </p:sp>
+      <p:sp>
+        <p:nvSpPr>
+          <p:cNvPr id="33" name="Shape 31"/>
           <p:cNvSpPr/>
           <p:nvPr/>
         </p:nvSpPr>
@@ -13527,7 +13737,7 @@
       </p:sp>
       <p:sp>
         <p:nvSpPr>
-          <p:cNvPr id="31" name="Text 29"/>
+          <p:cNvPr id="34" name="Text 32"/>
           <p:cNvSpPr/>
           <p:nvPr/>
         </p:nvSpPr>
@@ -13566,7 +13776,7 @@
       </p:sp>
       <p:sp>
         <p:nvSpPr>
-          <p:cNvPr id="32" name="Shape 30"/>
+          <p:cNvPr id="35" name="Shape 33"/>
           <p:cNvSpPr/>
           <p:nvPr/>
         </p:nvSpPr>
@@ -13593,7 +13803,7 @@
       </p:sp>
       <p:sp>
         <p:nvSpPr>
-          <p:cNvPr id="33" name="Text 31"/>
+          <p:cNvPr id="36" name="Text 34"/>
           <p:cNvSpPr/>
           <p:nvPr/>
         </p:nvSpPr>
@@ -14320,7 +14530,7 @@
                 <a:ea typeface="Trebuchet MS" pitchFamily="34" charset="-122"/>
                 <a:cs typeface="Trebuchet MS" pitchFamily="34" charset="-120"/>
               </a:rPr>
-              <a:t>react</a:t>
+              <a:t>actual</a:t>
             </a:r>
             <a:endParaRPr lang="en-US" sz="2800" dirty="0"/>
           </a:p>
@@ -14409,11 +14619,11 @@
             </a:avLst>
           </a:prstGeom>
           <a:solidFill>
-            <a:srgbClr val="DDD6FE"/>
+            <a:srgbClr val="CCFBF1"/>
           </a:solidFill>
           <a:ln w="19050">
             <a:solidFill>
-              <a:srgbClr val="7C3AED"/>
+              <a:srgbClr val="0D9488"/>
             </a:solidFill>
             <a:prstDash val="solid"/>
           </a:ln>
@@ -14453,13 +14663,13 @@
             <a:r>
               <a:rPr lang="en-US" sz="1300" b="1" dirty="0">
                 <a:solidFill>
-                  <a:srgbClr val="4C1D95"/>
+                  <a:srgbClr val="0F766E"/>
                 </a:solidFill>
                 <a:latin typeface="Trebuchet MS" pitchFamily="34" charset="0"/>
                 <a:ea typeface="Trebuchet MS" pitchFamily="34" charset="-122"/>
                 <a:cs typeface="Trebuchet MS" pitchFamily="34" charset="-120"/>
               </a:rPr>
-              <a:t>re</a:t>
+              <a:t>act</a:t>
             </a:r>
             <a:endParaRPr lang="en-US" sz="1300" dirty="0"/>
           </a:p>
@@ -14498,7 +14708,7 @@
                 <a:ea typeface="Calibri" pitchFamily="34" charset="-122"/>
                 <a:cs typeface="Calibri" pitchFamily="34" charset="-120"/>
               </a:rPr>
-              <a:t>again, back</a:t>
+              <a:t>to do or perform</a:t>
             </a:r>
             <a:endParaRPr lang="en-US" sz="850" dirty="0"/>
           </a:p>
@@ -14521,11 +14731,11 @@
             </a:avLst>
           </a:prstGeom>
           <a:solidFill>
-            <a:srgbClr val="CCFBF1"/>
+            <a:srgbClr val="FCE7F3"/>
           </a:solidFill>
           <a:ln w="19050">
             <a:solidFill>
-              <a:srgbClr val="0D9488"/>
+              <a:srgbClr val="DB2777"/>
             </a:solidFill>
             <a:prstDash val="solid"/>
           </a:ln>
@@ -14565,13 +14775,13 @@
             <a:r>
               <a:rPr lang="en-US" sz="1300" b="1" dirty="0">
                 <a:solidFill>
-                  <a:srgbClr val="0F766E"/>
+                  <a:srgbClr val="9D174D"/>
                 </a:solidFill>
                 <a:latin typeface="Trebuchet MS" pitchFamily="34" charset="0"/>
                 <a:ea typeface="Trebuchet MS" pitchFamily="34" charset="-122"/>
                 <a:cs typeface="Trebuchet MS" pitchFamily="34" charset="-120"/>
               </a:rPr>
-              <a:t>act</a:t>
+              <a:t>ual</a:t>
             </a:r>
             <a:endParaRPr lang="en-US" sz="1300" dirty="0"/>
           </a:p>
@@ -14610,7 +14820,7 @@
                 <a:ea typeface="Calibri" pitchFamily="34" charset="-122"/>
                 <a:cs typeface="Calibri" pitchFamily="34" charset="-120"/>
               </a:rPr>
-              <a:t>to do or perform</a:t>
+              <a:t>relating to</a:t>
             </a:r>
             <a:endParaRPr lang="en-US" sz="850" dirty="0"/>
           </a:p>
@@ -14717,7 +14927,7 @@
         </p:nvSpPr>
         <p:spPr>
           <a:xfrm>
-            <a:off x="2999232" y="3364992"/>
+            <a:off x="2313432" y="3364992"/>
             <a:ext cx="1645920" cy="475488"/>
           </a:xfrm>
           <a:prstGeom prst="rect">
@@ -14744,7 +14954,7 @@
         </p:nvSpPr>
         <p:spPr>
           <a:xfrm>
-            <a:off x="2999232" y="3364992"/>
+            <a:off x="2313432" y="3364992"/>
             <a:ext cx="1645920" cy="475488"/>
           </a:xfrm>
           <a:prstGeom prst="rect">
@@ -14769,7 +14979,7 @@
                 <a:ea typeface="Trebuchet MS" pitchFamily="34" charset="-122"/>
                 <a:cs typeface="Trebuchet MS" pitchFamily="34" charset="-120"/>
               </a:rPr>
-              <a:t>re</a:t>
+              <a:t>ac</a:t>
             </a:r>
             <a:endParaRPr lang="en-US" sz="1400" dirty="0"/>
           </a:p>
@@ -14783,8 +14993,8 @@
         </p:nvSpPr>
         <p:spPr>
           <a:xfrm>
-            <a:off x="4645152" y="3364992"/>
-            <a:ext cx="1097280" cy="475488"/>
+            <a:off x="3959352" y="3364992"/>
+            <a:ext cx="411480" cy="475488"/>
           </a:xfrm>
           <a:prstGeom prst="rect">
             <a:avLst/>
@@ -14822,7 +15032,7 @@
         </p:nvSpPr>
         <p:spPr>
           <a:xfrm>
-            <a:off x="5742432" y="3364992"/>
+            <a:off x="4370832" y="3364992"/>
             <a:ext cx="1645920" cy="475488"/>
           </a:xfrm>
           <a:prstGeom prst="rect">
@@ -14849,7 +15059,7 @@
         </p:nvSpPr>
         <p:spPr>
           <a:xfrm>
-            <a:off x="5742432" y="3364992"/>
+            <a:off x="4370832" y="3364992"/>
             <a:ext cx="1645920" cy="475488"/>
           </a:xfrm>
           <a:prstGeom prst="rect">
@@ -14874,7 +15084,7 @@
                 <a:ea typeface="Trebuchet MS" pitchFamily="34" charset="-122"/>
                 <a:cs typeface="Trebuchet MS" pitchFamily="34" charset="-120"/>
               </a:rPr>
-              <a:t>act</a:t>
+              <a:t>tu</a:t>
             </a:r>
             <a:endParaRPr lang="en-US" sz="1400" dirty="0"/>
           </a:p>
@@ -14882,7 +15092,112 @@
       </p:sp>
       <p:sp>
         <p:nvSpPr>
-          <p:cNvPr id="30" name="Shape 28"/>
+          <p:cNvPr id="30" name="Text 28"/>
+          <p:cNvSpPr/>
+          <p:nvPr/>
+        </p:nvSpPr>
+        <p:spPr>
+          <a:xfrm>
+            <a:off x="6016752" y="3364992"/>
+            <a:ext cx="411480" cy="475488"/>
+          </a:xfrm>
+          <a:prstGeom prst="rect">
+            <a:avLst/>
+          </a:prstGeom>
+          <a:noFill/>
+          <a:ln/>
+        </p:spPr>
+        <p:txBody>
+          <a:bodyPr wrap="square" lIns="0" tIns="0" rIns="0" bIns="0" rtlCol="0" anchor="ctr"/>
+          <a:lstStyle/>
+          <a:p>
+            <a:pPr algn="ctr" indent="0" marL="0">
+              <a:buNone/>
+            </a:pPr>
+            <a:r>
+              <a:rPr lang="en-US" sz="1600" b="1" dirty="0">
+                <a:solidFill>
+                  <a:srgbClr val="0D9488"/>
+                </a:solidFill>
+                <a:latin typeface="Trebuchet MS" pitchFamily="34" charset="0"/>
+                <a:ea typeface="Trebuchet MS" pitchFamily="34" charset="-122"/>
+                <a:cs typeface="Trebuchet MS" pitchFamily="34" charset="-120"/>
+              </a:rPr>
+              <a:t>·</a:t>
+            </a:r>
+            <a:endParaRPr lang="en-US" sz="1600" dirty="0"/>
+          </a:p>
+        </p:txBody>
+      </p:sp>
+      <p:sp>
+        <p:nvSpPr>
+          <p:cNvPr id="31" name="Shape 29"/>
+          <p:cNvSpPr/>
+          <p:nvPr/>
+        </p:nvSpPr>
+        <p:spPr>
+          <a:xfrm>
+            <a:off x="6428232" y="3364992"/>
+            <a:ext cx="1645920" cy="475488"/>
+          </a:xfrm>
+          <a:prstGeom prst="rect">
+            <a:avLst>
+              <a:gd name="adj" fmla="val 9615"/>
+            </a:avLst>
+          </a:prstGeom>
+          <a:solidFill>
+            <a:srgbClr val="FFFFFF"/>
+          </a:solidFill>
+          <a:ln w="12700">
+            <a:solidFill>
+              <a:srgbClr val="0D9488"/>
+            </a:solidFill>
+            <a:prstDash val="solid"/>
+          </a:ln>
+        </p:spPr>
+      </p:sp>
+      <p:sp>
+        <p:nvSpPr>
+          <p:cNvPr id="32" name="Text 30"/>
+          <p:cNvSpPr/>
+          <p:nvPr/>
+        </p:nvSpPr>
+        <p:spPr>
+          <a:xfrm>
+            <a:off x="6428232" y="3364992"/>
+            <a:ext cx="1645920" cy="475488"/>
+          </a:xfrm>
+          <a:prstGeom prst="rect">
+            <a:avLst/>
+          </a:prstGeom>
+          <a:noFill/>
+          <a:ln/>
+        </p:spPr>
+        <p:txBody>
+          <a:bodyPr wrap="square" lIns="0" tIns="0" rIns="0" bIns="0" rtlCol="0" anchor="ctr"/>
+          <a:lstStyle/>
+          <a:p>
+            <a:pPr algn="ctr" indent="0" marL="0">
+              <a:buNone/>
+            </a:pPr>
+            <a:r>
+              <a:rPr lang="en-US" sz="1400" b="1" dirty="0">
+                <a:solidFill>
+                  <a:srgbClr val="0D9488"/>
+                </a:solidFill>
+                <a:latin typeface="Trebuchet MS" pitchFamily="34" charset="0"/>
+                <a:ea typeface="Trebuchet MS" pitchFamily="34" charset="-122"/>
+                <a:cs typeface="Trebuchet MS" pitchFamily="34" charset="-120"/>
+              </a:rPr>
+              <a:t>al</a:t>
+            </a:r>
+            <a:endParaRPr lang="en-US" sz="1400" dirty="0"/>
+          </a:p>
+        </p:txBody>
+      </p:sp>
+      <p:sp>
+        <p:nvSpPr>
+          <p:cNvPr id="33" name="Shape 31"/>
           <p:cNvSpPr/>
           <p:nvPr/>
         </p:nvSpPr>
@@ -14909,7 +15224,7 @@
       </p:sp>
       <p:sp>
         <p:nvSpPr>
-          <p:cNvPr id="31" name="Text 29"/>
+          <p:cNvPr id="34" name="Text 32"/>
           <p:cNvSpPr/>
           <p:nvPr/>
         </p:nvSpPr>
@@ -14948,7 +15263,7 @@
       </p:sp>
       <p:sp>
         <p:nvSpPr>
-          <p:cNvPr id="32" name="Shape 30"/>
+          <p:cNvPr id="35" name="Shape 33"/>
           <p:cNvSpPr/>
           <p:nvPr/>
         </p:nvSpPr>
@@ -14975,13 +15290,13 @@
       </p:sp>
       <p:sp>
         <p:nvSpPr>
-          <p:cNvPr id="33" name="Shape 31"/>
-          <p:cNvSpPr/>
-          <p:nvPr/>
-        </p:nvSpPr>
-        <p:spPr>
-          <a:xfrm>
-            <a:off x="2427732" y="4169664"/>
+          <p:cNvPr id="36" name="Shape 34"/>
+          <p:cNvSpPr/>
+          <p:nvPr/>
+        </p:nvSpPr>
+        <p:spPr>
+          <a:xfrm>
+            <a:off x="2254649" y="4169664"/>
             <a:ext cx="685800" cy="475488"/>
           </a:xfrm>
           <a:prstGeom prst="rect">
@@ -15002,13 +15317,13 @@
       </p:sp>
       <p:sp>
         <p:nvSpPr>
-          <p:cNvPr id="34" name="Text 32"/>
-          <p:cNvSpPr/>
-          <p:nvPr/>
-        </p:nvSpPr>
-        <p:spPr>
-          <a:xfrm>
-            <a:off x="2427732" y="4169664"/>
+          <p:cNvPr id="37" name="Text 35"/>
+          <p:cNvSpPr/>
+          <p:nvPr/>
+        </p:nvSpPr>
+        <p:spPr>
+          <a:xfrm>
+            <a:off x="2254649" y="4169664"/>
             <a:ext cx="685800" cy="475488"/>
           </a:xfrm>
           <a:prstGeom prst="rect">
@@ -15033,7 +15348,7 @@
                 <a:ea typeface="Trebuchet MS" pitchFamily="34" charset="-122"/>
                 <a:cs typeface="Trebuchet MS" pitchFamily="34" charset="-120"/>
               </a:rPr>
-              <a:t>r</a:t>
+              <a:t>a</a:t>
             </a:r>
             <a:endParaRPr lang="en-US" sz="900" dirty="0"/>
           </a:p>
@@ -15041,13 +15356,13 @@
       </p:sp>
       <p:sp>
         <p:nvSpPr>
-          <p:cNvPr id="35" name="Shape 33"/>
-          <p:cNvSpPr/>
-          <p:nvPr/>
-        </p:nvSpPr>
-        <p:spPr>
-          <a:xfrm>
-            <a:off x="3639312" y="4169664"/>
+          <p:cNvPr id="38" name="Shape 36"/>
+          <p:cNvSpPr/>
+          <p:nvPr/>
+        </p:nvSpPr>
+        <p:spPr>
+          <a:xfrm>
+            <a:off x="3293146" y="4169664"/>
             <a:ext cx="685800" cy="475488"/>
           </a:xfrm>
           <a:prstGeom prst="rect">
@@ -15068,13 +15383,13 @@
       </p:sp>
       <p:sp>
         <p:nvSpPr>
-          <p:cNvPr id="36" name="Text 34"/>
-          <p:cNvSpPr/>
-          <p:nvPr/>
-        </p:nvSpPr>
-        <p:spPr>
-          <a:xfrm>
-            <a:off x="3639312" y="4169664"/>
+          <p:cNvPr id="39" name="Text 37"/>
+          <p:cNvSpPr/>
+          <p:nvPr/>
+        </p:nvSpPr>
+        <p:spPr>
+          <a:xfrm>
+            <a:off x="3293146" y="4169664"/>
             <a:ext cx="685800" cy="475488"/>
           </a:xfrm>
           <a:prstGeom prst="rect">
@@ -15099,7 +15414,7 @@
                 <a:ea typeface="Trebuchet MS" pitchFamily="34" charset="-122"/>
                 <a:cs typeface="Trebuchet MS" pitchFamily="34" charset="-120"/>
               </a:rPr>
-              <a:t>e</a:t>
+              <a:t>c</a:t>
             </a:r>
             <a:endParaRPr lang="en-US" sz="900" dirty="0"/>
           </a:p>
@@ -15107,13 +15422,13 @@
       </p:sp>
       <p:sp>
         <p:nvSpPr>
-          <p:cNvPr id="37" name="Shape 35"/>
-          <p:cNvSpPr/>
-          <p:nvPr/>
-        </p:nvSpPr>
-        <p:spPr>
-          <a:xfrm>
-            <a:off x="4850892" y="4169664"/>
+          <p:cNvPr id="40" name="Shape 38"/>
+          <p:cNvSpPr/>
+          <p:nvPr/>
+        </p:nvSpPr>
+        <p:spPr>
+          <a:xfrm>
+            <a:off x="4331643" y="4169664"/>
             <a:ext cx="685800" cy="475488"/>
           </a:xfrm>
           <a:prstGeom prst="rect">
@@ -15134,13 +15449,13 @@
       </p:sp>
       <p:sp>
         <p:nvSpPr>
-          <p:cNvPr id="38" name="Text 36"/>
-          <p:cNvSpPr/>
-          <p:nvPr/>
-        </p:nvSpPr>
-        <p:spPr>
-          <a:xfrm>
-            <a:off x="4850892" y="4169664"/>
+          <p:cNvPr id="41" name="Text 39"/>
+          <p:cNvSpPr/>
+          <p:nvPr/>
+        </p:nvSpPr>
+        <p:spPr>
+          <a:xfrm>
+            <a:off x="4331643" y="4169664"/>
             <a:ext cx="685800" cy="475488"/>
           </a:xfrm>
           <a:prstGeom prst="rect">
@@ -15165,7 +15480,7 @@
                 <a:ea typeface="Trebuchet MS" pitchFamily="34" charset="-122"/>
                 <a:cs typeface="Trebuchet MS" pitchFamily="34" charset="-120"/>
               </a:rPr>
-              <a:t>a</a:t>
+              <a:t>t</a:t>
             </a:r>
             <a:endParaRPr lang="en-US" sz="900" dirty="0"/>
           </a:p>
@@ -15173,13 +15488,13 @@
       </p:sp>
       <p:sp>
         <p:nvSpPr>
-          <p:cNvPr id="39" name="Shape 37"/>
-          <p:cNvSpPr/>
-          <p:nvPr/>
-        </p:nvSpPr>
-        <p:spPr>
-          <a:xfrm>
-            <a:off x="6062472" y="4169664"/>
+          <p:cNvPr id="42" name="Shape 40"/>
+          <p:cNvSpPr/>
+          <p:nvPr/>
+        </p:nvSpPr>
+        <p:spPr>
+          <a:xfrm>
+            <a:off x="5370141" y="4169664"/>
             <a:ext cx="685800" cy="475488"/>
           </a:xfrm>
           <a:prstGeom prst="rect">
@@ -15200,13 +15515,13 @@
       </p:sp>
       <p:sp>
         <p:nvSpPr>
-          <p:cNvPr id="40" name="Text 38"/>
-          <p:cNvSpPr/>
-          <p:nvPr/>
-        </p:nvSpPr>
-        <p:spPr>
-          <a:xfrm>
-            <a:off x="6062472" y="4169664"/>
+          <p:cNvPr id="43" name="Text 41"/>
+          <p:cNvSpPr/>
+          <p:nvPr/>
+        </p:nvSpPr>
+        <p:spPr>
+          <a:xfrm>
+            <a:off x="5370141" y="4169664"/>
             <a:ext cx="685800" cy="475488"/>
           </a:xfrm>
           <a:prstGeom prst="rect">
@@ -15231,7 +15546,7 @@
                 <a:ea typeface="Trebuchet MS" pitchFamily="34" charset="-122"/>
                 <a:cs typeface="Trebuchet MS" pitchFamily="34" charset="-120"/>
               </a:rPr>
-              <a:t>c</a:t>
+              <a:t>u</a:t>
             </a:r>
             <a:endParaRPr lang="en-US" sz="900" dirty="0"/>
           </a:p>
@@ -15239,13 +15554,13 @@
       </p:sp>
       <p:sp>
         <p:nvSpPr>
-          <p:cNvPr id="41" name="Shape 39"/>
-          <p:cNvSpPr/>
-          <p:nvPr/>
-        </p:nvSpPr>
-        <p:spPr>
-          <a:xfrm>
-            <a:off x="7274052" y="4169664"/>
+          <p:cNvPr id="44" name="Shape 42"/>
+          <p:cNvSpPr/>
+          <p:nvPr/>
+        </p:nvSpPr>
+        <p:spPr>
+          <a:xfrm>
+            <a:off x="6408638" y="4169664"/>
             <a:ext cx="685800" cy="475488"/>
           </a:xfrm>
           <a:prstGeom prst="rect">
@@ -15266,13 +15581,13 @@
       </p:sp>
       <p:sp>
         <p:nvSpPr>
-          <p:cNvPr id="42" name="Text 40"/>
-          <p:cNvSpPr/>
-          <p:nvPr/>
-        </p:nvSpPr>
-        <p:spPr>
-          <a:xfrm>
-            <a:off x="7274052" y="4169664"/>
+          <p:cNvPr id="45" name="Text 43"/>
+          <p:cNvSpPr/>
+          <p:nvPr/>
+        </p:nvSpPr>
+        <p:spPr>
+          <a:xfrm>
+            <a:off x="6408638" y="4169664"/>
             <a:ext cx="685800" cy="475488"/>
           </a:xfrm>
           <a:prstGeom prst="rect">
@@ -15297,7 +15612,73 @@
                 <a:ea typeface="Trebuchet MS" pitchFamily="34" charset="-122"/>
                 <a:cs typeface="Trebuchet MS" pitchFamily="34" charset="-120"/>
               </a:rPr>
-              <a:t>t</a:t>
+              <a:t>a</a:t>
+            </a:r>
+            <a:endParaRPr lang="en-US" sz="900" dirty="0"/>
+          </a:p>
+        </p:txBody>
+      </p:sp>
+      <p:sp>
+        <p:nvSpPr>
+          <p:cNvPr id="46" name="Shape 44"/>
+          <p:cNvSpPr/>
+          <p:nvPr/>
+        </p:nvSpPr>
+        <p:spPr>
+          <a:xfrm>
+            <a:off x="7447135" y="4169664"/>
+            <a:ext cx="685800" cy="475488"/>
+          </a:xfrm>
+          <a:prstGeom prst="rect">
+            <a:avLst>
+              <a:gd name="adj" fmla="val 7692"/>
+            </a:avLst>
+          </a:prstGeom>
+          <a:solidFill>
+            <a:srgbClr val="FFFFFF"/>
+          </a:solidFill>
+          <a:ln w="12700">
+            <a:solidFill>
+              <a:srgbClr val="DB2777"/>
+            </a:solidFill>
+            <a:prstDash val="solid"/>
+          </a:ln>
+        </p:spPr>
+      </p:sp>
+      <p:sp>
+        <p:nvSpPr>
+          <p:cNvPr id="47" name="Text 45"/>
+          <p:cNvSpPr/>
+          <p:nvPr/>
+        </p:nvSpPr>
+        <p:spPr>
+          <a:xfrm>
+            <a:off x="7447135" y="4169664"/>
+            <a:ext cx="685800" cy="475488"/>
+          </a:xfrm>
+          <a:prstGeom prst="rect">
+            <a:avLst/>
+          </a:prstGeom>
+          <a:noFill/>
+          <a:ln/>
+        </p:spPr>
+        <p:txBody>
+          <a:bodyPr wrap="square" lIns="0" tIns="0" rIns="0" bIns="0" rtlCol="0" anchor="ctr"/>
+          <a:lstStyle/>
+          <a:p>
+            <a:pPr algn="ctr" indent="0" marL="0">
+              <a:buNone/>
+            </a:pPr>
+            <a:r>
+              <a:rPr lang="en-US" sz="900" b="1" dirty="0">
+                <a:solidFill>
+                  <a:srgbClr val="9D174D"/>
+                </a:solidFill>
+                <a:latin typeface="Trebuchet MS" pitchFamily="34" charset="0"/>
+                <a:ea typeface="Trebuchet MS" pitchFamily="34" charset="-122"/>
+                <a:cs typeface="Trebuchet MS" pitchFamily="34" charset="-120"/>
+              </a:rPr>
+              <a:t>l</a:t>
             </a:r>
             <a:endParaRPr lang="en-US" sz="900" dirty="0"/>
           </a:p>
@@ -16205,7 +16586,7 @@
                 <a:ea typeface="Trebuchet MS" pitchFamily="34" charset="-122"/>
                 <a:cs typeface="Trebuchet MS" pitchFamily="34" charset="-120"/>
               </a:rPr>
-              <a:t>1</a:t>
+              <a:t>2</a:t>
             </a:r>
             <a:pPr algn="ctr" indent="0" marL="0">
               <a:buNone/>
@@ -16219,7 +16600,7 @@
                 <a:ea typeface="Trebuchet MS" pitchFamily="34" charset="-122"/>
                 <a:cs typeface="Trebuchet MS" pitchFamily="34" charset="-120"/>
               </a:rPr>
-              <a:t>  punctuation mark</a:t>
+              <a:t>  punctuation marks</a:t>
             </a:r>
             <a:endParaRPr lang="en-US" sz="2800" dirty="0"/>
           </a:p>
@@ -16623,7 +17004,7 @@
                 <a:ea typeface="Calibri" pitchFamily="34" charset="-122"/>
                 <a:cs typeface="Calibri" pitchFamily="34" charset="-120"/>
               </a:rPr>
-              <a:t>During the </a:t>
+              <a:t>The </a:t>
             </a:r>
             <a:pPr algn="l" indent="0" marL="0">
               <a:buNone/>
@@ -16640,7 +17021,7 @@
                 <a:ea typeface="Calibri" pitchFamily="34" charset="-122"/>
                 <a:cs typeface="Calibri" pitchFamily="34" charset="-120"/>
               </a:rPr>
-              <a:t>interaction</a:t>
+              <a:t>active</a:t>
             </a:r>
             <a:pPr algn="l" indent="0" marL="0">
               <a:buNone/>
@@ -16654,7 +17035,7 @@
                 <a:ea typeface="Calibri" pitchFamily="34" charset="-122"/>
                 <a:cs typeface="Calibri" pitchFamily="34" charset="-120"/>
               </a:rPr>
-              <a:t>, the </a:t>
+              <a:t> students had to </a:t>
             </a:r>
             <a:pPr algn="l" indent="0" marL="0">
               <a:buNone/>
@@ -16671,7 +17052,7 @@
                 <a:ea typeface="Calibri" pitchFamily="34" charset="-122"/>
                 <a:cs typeface="Calibri" pitchFamily="34" charset="-120"/>
               </a:rPr>
-              <a:t>active</a:t>
+              <a:t>interact</a:t>
             </a:r>
             <a:pPr algn="l" indent="0" marL="0">
               <a:buNone/>
@@ -16685,7 +17066,7 @@
                 <a:ea typeface="Calibri" pitchFamily="34" charset="-122"/>
                 <a:cs typeface="Calibri" pitchFamily="34" charset="-120"/>
               </a:rPr>
-              <a:t> student asked </a:t>
+              <a:t> carefully during the task, and each </a:t>
             </a:r>
             <a:pPr algn="l" indent="0" marL="0">
               <a:buNone/>
@@ -16702,7 +17083,7 @@
                 <a:ea typeface="Calibri" pitchFamily="34" charset="-122"/>
                 <a:cs typeface="Calibri" pitchFamily="34" charset="-120"/>
               </a:rPr>
-              <a:t>exactly</a:t>
+              <a:t>transaction</a:t>
             </a:r>
             <a:pPr algn="l" indent="0" marL="0">
               <a:buNone/>
@@ -16716,7 +17097,7 @@
                 <a:ea typeface="Calibri" pitchFamily="34" charset="-122"/>
                 <a:cs typeface="Calibri" pitchFamily="34" charset="-120"/>
               </a:rPr>
-              <a:t> what the experiment involved.</a:t>
+              <a:t> was recorded.</a:t>
             </a:r>
             <a:endParaRPr lang="en-US" sz="1800" dirty="0"/>
           </a:p>
@@ -16871,7 +17252,7 @@
                 <a:ea typeface="Trebuchet MS" pitchFamily="34" charset="-122"/>
                 <a:cs typeface="Trebuchet MS" pitchFamily="34" charset="-120"/>
               </a:rPr>
-              <a:t>interaction</a:t>
+              <a:t>active</a:t>
             </a:r>
             <a:endParaRPr lang="en-US" sz="1400" dirty="0"/>
           </a:p>
@@ -16999,7 +17380,7 @@
                 <a:ea typeface="Trebuchet MS" pitchFamily="34" charset="-122"/>
                 <a:cs typeface="Trebuchet MS" pitchFamily="34" charset="-120"/>
               </a:rPr>
-              <a:t>active</a:t>
+              <a:t>interact</a:t>
             </a:r>
             <a:endParaRPr lang="en-US" sz="1400" dirty="0"/>
           </a:p>
@@ -17127,7 +17508,7 @@
                 <a:ea typeface="Trebuchet MS" pitchFamily="34" charset="-122"/>
                 <a:cs typeface="Trebuchet MS" pitchFamily="34" charset="-120"/>
               </a:rPr>
-              <a:t>exactly</a:t>
+              <a:t>transaction</a:t>
             </a:r>
             <a:endParaRPr lang="en-US" sz="1400" dirty="0"/>
           </a:p>
@@ -17597,7 +17978,7 @@
                 <a:ea typeface="Trebuchet MS" pitchFamily="34" charset="-122"/>
                 <a:cs typeface="Trebuchet MS" pitchFamily="34" charset="-120"/>
               </a:rPr>
-              <a:t>interaction</a:t>
+              <a:t>active</a:t>
             </a:r>
             <a:endParaRPr lang="en-US" sz="2800" dirty="0"/>
           </a:p>
@@ -18424,7 +18805,7 @@
                 <a:ea typeface="Trebuchet MS" pitchFamily="34" charset="-122"/>
                 <a:cs typeface="Trebuchet MS" pitchFamily="34" charset="-120"/>
               </a:rPr>
-              <a:t>interaction</a:t>
+              <a:t>active</a:t>
             </a:r>
             <a:endParaRPr lang="en-US" sz="2800" dirty="0"/>
           </a:p>
@@ -18504,7 +18885,7 @@
         </p:nvSpPr>
         <p:spPr>
           <a:xfrm>
-            <a:off x="2221992" y="2258568"/>
+            <a:off x="2938272" y="2258568"/>
             <a:ext cx="1828800" cy="292608"/>
           </a:xfrm>
           <a:prstGeom prst="rect">
@@ -18513,11 +18894,11 @@
             </a:avLst>
           </a:prstGeom>
           <a:solidFill>
-            <a:srgbClr val="DDD6FE"/>
+            <a:srgbClr val="CCFBF1"/>
           </a:solidFill>
           <a:ln w="19050">
             <a:solidFill>
-              <a:srgbClr val="7C3AED"/>
+              <a:srgbClr val="0D9488"/>
             </a:solidFill>
             <a:prstDash val="solid"/>
           </a:ln>
@@ -18538,7 +18919,7 @@
         </p:nvSpPr>
         <p:spPr>
           <a:xfrm>
-            <a:off x="2221992" y="2258568"/>
+            <a:off x="2938272" y="2258568"/>
             <a:ext cx="1828800" cy="292608"/>
           </a:xfrm>
           <a:prstGeom prst="rect">
@@ -18557,13 +18938,13 @@
             <a:r>
               <a:rPr lang="en-US" sz="1300" b="1" dirty="0">
                 <a:solidFill>
-                  <a:srgbClr val="4C1D95"/>
+                  <a:srgbClr val="0F766E"/>
                 </a:solidFill>
                 <a:latin typeface="Trebuchet MS" pitchFamily="34" charset="0"/>
                 <a:ea typeface="Trebuchet MS" pitchFamily="34" charset="-122"/>
                 <a:cs typeface="Trebuchet MS" pitchFamily="34" charset="-120"/>
               </a:rPr>
-              <a:t>inter</a:t>
+              <a:t>act</a:t>
             </a:r>
             <a:endParaRPr lang="en-US" sz="1300" dirty="0"/>
           </a:p>
@@ -18577,7 +18958,7 @@
         </p:nvSpPr>
         <p:spPr>
           <a:xfrm>
-            <a:off x="2221992" y="2569464"/>
+            <a:off x="2938272" y="2569464"/>
             <a:ext cx="1828800" cy="201168"/>
           </a:xfrm>
           <a:prstGeom prst="rect">
@@ -18602,7 +18983,7 @@
                 <a:ea typeface="Calibri" pitchFamily="34" charset="-122"/>
                 <a:cs typeface="Calibri" pitchFamily="34" charset="-120"/>
               </a:rPr>
-              <a:t>between, among</a:t>
+              <a:t>to do or perform</a:t>
             </a:r>
             <a:endParaRPr lang="en-US" sz="850" dirty="0"/>
           </a:p>
@@ -18616,7 +18997,7 @@
         </p:nvSpPr>
         <p:spPr>
           <a:xfrm>
-            <a:off x="4370832" y="2258568"/>
+            <a:off x="5803392" y="2258568"/>
             <a:ext cx="1828800" cy="292608"/>
           </a:xfrm>
           <a:prstGeom prst="rect">
@@ -18625,11 +19006,11 @@
             </a:avLst>
           </a:prstGeom>
           <a:solidFill>
-            <a:srgbClr val="CCFBF1"/>
+            <a:srgbClr val="FCE7F3"/>
           </a:solidFill>
           <a:ln w="19050">
             <a:solidFill>
-              <a:srgbClr val="0D9488"/>
+              <a:srgbClr val="DB2777"/>
             </a:solidFill>
             <a:prstDash val="solid"/>
           </a:ln>
@@ -18650,7 +19031,7 @@
         </p:nvSpPr>
         <p:spPr>
           <a:xfrm>
-            <a:off x="4370832" y="2258568"/>
+            <a:off x="5803392" y="2258568"/>
             <a:ext cx="1828800" cy="292608"/>
           </a:xfrm>
           <a:prstGeom prst="rect">
@@ -18669,13 +19050,13 @@
             <a:r>
               <a:rPr lang="en-US" sz="1300" b="1" dirty="0">
                 <a:solidFill>
-                  <a:srgbClr val="0F766E"/>
+                  <a:srgbClr val="9D174D"/>
                 </a:solidFill>
                 <a:latin typeface="Trebuchet MS" pitchFamily="34" charset="0"/>
                 <a:ea typeface="Trebuchet MS" pitchFamily="34" charset="-122"/>
                 <a:cs typeface="Trebuchet MS" pitchFamily="34" charset="-120"/>
               </a:rPr>
-              <a:t>act</a:t>
+              <a:t>ive</a:t>
             </a:r>
             <a:endParaRPr lang="en-US" sz="1300" dirty="0"/>
           </a:p>
@@ -18689,7 +19070,7 @@
         </p:nvSpPr>
         <p:spPr>
           <a:xfrm>
-            <a:off x="4370832" y="2569464"/>
+            <a:off x="5803392" y="2569464"/>
             <a:ext cx="1828800" cy="201168"/>
           </a:xfrm>
           <a:prstGeom prst="rect">
@@ -18714,7 +19095,7 @@
                 <a:ea typeface="Calibri" pitchFamily="34" charset="-122"/>
                 <a:cs typeface="Calibri" pitchFamily="34" charset="-120"/>
               </a:rPr>
-              <a:t>to do or perform</a:t>
+              <a:t>having the quality of</a:t>
             </a:r>
             <a:endParaRPr lang="en-US" sz="850" dirty="0"/>
           </a:p>
@@ -18728,30 +19109,23 @@
         </p:nvSpPr>
         <p:spPr>
           <a:xfrm>
-            <a:off x="6519672" y="2258568"/>
-            <a:ext cx="1828800" cy="292608"/>
+            <a:off x="365760" y="3273552"/>
+            <a:ext cx="1371600" cy="658368"/>
           </a:xfrm>
           <a:prstGeom prst="rect">
             <a:avLst>
-              <a:gd name="adj" fmla="val 25000"/>
+              <a:gd name="adj" fmla="val 8333"/>
             </a:avLst>
           </a:prstGeom>
           <a:solidFill>
-            <a:srgbClr val="FCE7F3"/>
-          </a:solidFill>
-          <a:ln w="19050">
-            <a:solidFill>
-              <a:srgbClr val="DB2777"/>
-            </a:solidFill>
-            <a:prstDash val="solid"/>
-          </a:ln>
-          <a:effectLst>
-            <a:outerShdw sx="100000" sy="100000" kx="0" ky="0" algn="bl" rotWithShape="0" blurRad="101600" dist="38100" dir="8100000">
-              <a:srgbClr val="000000">
-                <a:alpha val="12000"/>
-              </a:srgbClr>
-            </a:outerShdw>
-          </a:effectLst>
+            <a:srgbClr val="E2E8F0"/>
+          </a:solidFill>
+          <a:ln w="12700">
+            <a:solidFill>
+              <a:srgbClr val="E2E8F0"/>
+            </a:solidFill>
+            <a:prstDash val="solid"/>
+          </a:ln>
         </p:spPr>
       </p:sp>
       <p:sp>
@@ -18762,90 +19136,117 @@
         </p:nvSpPr>
         <p:spPr>
           <a:xfrm>
-            <a:off x="6519672" y="2258568"/>
-            <a:ext cx="1828800" cy="292608"/>
-          </a:xfrm>
-          <a:prstGeom prst="rect">
-            <a:avLst/>
-          </a:prstGeom>
-          <a:noFill/>
-          <a:ln/>
-        </p:spPr>
-        <p:txBody>
-          <a:bodyPr wrap="square" lIns="0" tIns="0" rIns="0" bIns="0" rtlCol="0" anchor="ctr"/>
-          <a:lstStyle/>
-          <a:p>
-            <a:pPr algn="ctr" indent="0" marL="0">
-              <a:buNone/>
-            </a:pPr>
-            <a:r>
-              <a:rPr lang="en-US" sz="1300" b="1" dirty="0">
-                <a:solidFill>
-                  <a:srgbClr val="9D174D"/>
+            <a:off x="365760" y="3273552"/>
+            <a:ext cx="1371600" cy="658368"/>
+          </a:xfrm>
+          <a:prstGeom prst="rect">
+            <a:avLst/>
+          </a:prstGeom>
+          <a:noFill/>
+          <a:ln/>
+        </p:spPr>
+        <p:txBody>
+          <a:bodyPr wrap="square" lIns="0" tIns="0" rIns="0" bIns="0" rtlCol="0" anchor="ctr"/>
+          <a:lstStyle/>
+          <a:p>
+            <a:pPr algn="ctr" indent="0" marL="0">
+              <a:buNone/>
+            </a:pPr>
+            <a:r>
+              <a:rPr lang="en-US" sz="1100" b="1" dirty="0">
+                <a:solidFill>
+                  <a:srgbClr val="475569"/>
                 </a:solidFill>
                 <a:latin typeface="Trebuchet MS" pitchFamily="34" charset="0"/>
                 <a:ea typeface="Trebuchet MS" pitchFamily="34" charset="-122"/>
                 <a:cs typeface="Trebuchet MS" pitchFamily="34" charset="-120"/>
               </a:rPr>
-              <a:t>ion</a:t>
-            </a:r>
-            <a:endParaRPr lang="en-US" sz="1300" dirty="0"/>
-          </a:p>
-        </p:txBody>
-      </p:sp>
-      <p:sp>
-        <p:nvSpPr>
-          <p:cNvPr id="24" name="Text 22"/>
-          <p:cNvSpPr/>
-          <p:nvPr/>
-        </p:nvSpPr>
-        <p:spPr>
-          <a:xfrm>
-            <a:off x="6519672" y="2569464"/>
-            <a:ext cx="1828800" cy="201168"/>
-          </a:xfrm>
-          <a:prstGeom prst="rect">
-            <a:avLst/>
-          </a:prstGeom>
-          <a:noFill/>
-          <a:ln/>
-        </p:spPr>
-        <p:txBody>
-          <a:bodyPr wrap="square" lIns="0" tIns="0" rIns="0" bIns="0" rtlCol="0" anchor="t"/>
-          <a:lstStyle/>
-          <a:p>
-            <a:pPr algn="ctr" indent="0" marL="0">
-              <a:buNone/>
-            </a:pPr>
-            <a:r>
-              <a:rPr lang="en-US" sz="850" dirty="0">
-                <a:solidFill>
-                  <a:srgbClr val="475569"/>
+              <a:t>Syllables</a:t>
+            </a:r>
+            <a:endParaRPr lang="en-US" sz="1100" dirty="0"/>
+          </a:p>
+        </p:txBody>
+      </p:sp>
+      <p:sp>
+        <p:nvSpPr>
+          <p:cNvPr id="24" name="Shape 22"/>
+          <p:cNvSpPr/>
+          <p:nvPr/>
+        </p:nvSpPr>
+        <p:spPr>
+          <a:xfrm>
+            <a:off x="1874520" y="3273552"/>
+            <a:ext cx="6903720" cy="658368"/>
+          </a:xfrm>
+          <a:prstGeom prst="rect">
+            <a:avLst>
+              <a:gd name="adj" fmla="val 8333"/>
+            </a:avLst>
+          </a:prstGeom>
+          <a:solidFill>
+            <a:srgbClr val="F8FAFC"/>
+          </a:solidFill>
+          <a:ln w="12700">
+            <a:solidFill>
+              <a:srgbClr val="E2E8F0"/>
+            </a:solidFill>
+            <a:prstDash val="dash"/>
+          </a:ln>
+        </p:spPr>
+      </p:sp>
+      <p:sp>
+        <p:nvSpPr>
+          <p:cNvPr id="25" name="Text 23"/>
+          <p:cNvSpPr/>
+          <p:nvPr/>
+        </p:nvSpPr>
+        <p:spPr>
+          <a:xfrm>
+            <a:off x="1874520" y="3273552"/>
+            <a:ext cx="6903720" cy="658368"/>
+          </a:xfrm>
+          <a:prstGeom prst="rect">
+            <a:avLst/>
+          </a:prstGeom>
+          <a:noFill/>
+          <a:ln/>
+        </p:spPr>
+        <p:txBody>
+          <a:bodyPr wrap="square" rtlCol="0" anchor="ctr"/>
+          <a:lstStyle/>
+          <a:p>
+            <a:pPr algn="ctr" indent="0" marL="0">
+              <a:buNone/>
+            </a:pPr>
+            <a:r>
+              <a:rPr lang="en-US" sz="1100" i="1" dirty="0">
+                <a:solidFill>
+                  <a:srgbClr val="CBD5E1"/>
                 </a:solidFill>
                 <a:latin typeface="Calibri" pitchFamily="34" charset="0"/>
                 <a:ea typeface="Calibri" pitchFamily="34" charset="-122"/>
                 <a:cs typeface="Calibri" pitchFamily="34" charset="-120"/>
               </a:rPr>
-              <a:t>act or process of</a:t>
-            </a:r>
-            <a:endParaRPr lang="en-US" sz="850" dirty="0"/>
-          </a:p>
-        </p:txBody>
-      </p:sp>
-      <p:sp>
-        <p:nvSpPr>
-          <p:cNvPr id="25" name="Shape 23"/>
-          <p:cNvSpPr/>
-          <p:nvPr/>
-        </p:nvSpPr>
-        <p:spPr>
-          <a:xfrm>
-            <a:off x="365760" y="3273552"/>
-            <a:ext cx="1371600" cy="658368"/>
+              <a:t>Write here...</a:t>
+            </a:r>
+            <a:endParaRPr lang="en-US" sz="1100" dirty="0"/>
+          </a:p>
+        </p:txBody>
+      </p:sp>
+      <p:sp>
+        <p:nvSpPr>
+          <p:cNvPr id="26" name="Shape 24"/>
+          <p:cNvSpPr/>
+          <p:nvPr/>
+        </p:nvSpPr>
+        <p:spPr>
+          <a:xfrm>
+            <a:off x="365760" y="4096512"/>
+            <a:ext cx="1371600" cy="804672"/>
           </a:xfrm>
           <a:prstGeom prst="rect">
             <a:avLst>
-              <a:gd name="adj" fmla="val 8333"/>
+              <a:gd name="adj" fmla="val 6818"/>
             </a:avLst>
           </a:prstGeom>
           <a:solidFill>
@@ -18861,14 +19262,14 @@
       </p:sp>
       <p:sp>
         <p:nvSpPr>
-          <p:cNvPr id="26" name="Text 24"/>
-          <p:cNvSpPr/>
-          <p:nvPr/>
-        </p:nvSpPr>
-        <p:spPr>
-          <a:xfrm>
-            <a:off x="365760" y="3273552"/>
-            <a:ext cx="1371600" cy="658368"/>
+          <p:cNvPr id="27" name="Text 25"/>
+          <p:cNvSpPr/>
+          <p:nvPr/>
+        </p:nvSpPr>
+        <p:spPr>
+          <a:xfrm>
+            <a:off x="365760" y="4096512"/>
+            <a:ext cx="1371600" cy="804672"/>
           </a:xfrm>
           <a:prstGeom prst="rect">
             <a:avLst/>
@@ -18892,7 +19293,7 @@
                 <a:ea typeface="Trebuchet MS" pitchFamily="34" charset="-122"/>
                 <a:cs typeface="Trebuchet MS" pitchFamily="34" charset="-120"/>
               </a:rPr>
-              <a:t>Syllables</a:t>
+              <a:t>Phonemes</a:t>
             </a:r>
             <a:endParaRPr lang="en-US" sz="1100" dirty="0"/>
           </a:p>
@@ -18900,80 +19301,14 @@
       </p:sp>
       <p:sp>
         <p:nvSpPr>
-          <p:cNvPr id="27" name="Shape 25"/>
-          <p:cNvSpPr/>
-          <p:nvPr/>
-        </p:nvSpPr>
-        <p:spPr>
-          <a:xfrm>
-            <a:off x="1874520" y="3273552"/>
-            <a:ext cx="6903720" cy="658368"/>
-          </a:xfrm>
-          <a:prstGeom prst="rect">
-            <a:avLst>
-              <a:gd name="adj" fmla="val 8333"/>
-            </a:avLst>
-          </a:prstGeom>
-          <a:solidFill>
-            <a:srgbClr val="F8FAFC"/>
-          </a:solidFill>
-          <a:ln w="12700">
-            <a:solidFill>
-              <a:srgbClr val="E2E8F0"/>
-            </a:solidFill>
-            <a:prstDash val="dash"/>
-          </a:ln>
-        </p:spPr>
-      </p:sp>
-      <p:sp>
-        <p:nvSpPr>
-          <p:cNvPr id="28" name="Text 26"/>
-          <p:cNvSpPr/>
-          <p:nvPr/>
-        </p:nvSpPr>
-        <p:spPr>
-          <a:xfrm>
-            <a:off x="1874520" y="3273552"/>
-            <a:ext cx="6903720" cy="658368"/>
-          </a:xfrm>
-          <a:prstGeom prst="rect">
-            <a:avLst/>
-          </a:prstGeom>
-          <a:noFill/>
-          <a:ln/>
-        </p:spPr>
-        <p:txBody>
-          <a:bodyPr wrap="square" rtlCol="0" anchor="ctr"/>
-          <a:lstStyle/>
-          <a:p>
-            <a:pPr algn="ctr" indent="0" marL="0">
-              <a:buNone/>
-            </a:pPr>
-            <a:r>
-              <a:rPr lang="en-US" sz="1100" i="1" dirty="0">
-                <a:solidFill>
-                  <a:srgbClr val="CBD5E1"/>
-                </a:solidFill>
-                <a:latin typeface="Calibri" pitchFamily="34" charset="0"/>
-                <a:ea typeface="Calibri" pitchFamily="34" charset="-122"/>
-                <a:cs typeface="Calibri" pitchFamily="34" charset="-120"/>
-              </a:rPr>
-              <a:t>Write here...</a:t>
-            </a:r>
-            <a:endParaRPr lang="en-US" sz="1100" dirty="0"/>
-          </a:p>
-        </p:txBody>
-      </p:sp>
-      <p:sp>
-        <p:nvSpPr>
-          <p:cNvPr id="29" name="Shape 27"/>
-          <p:cNvSpPr/>
-          <p:nvPr/>
-        </p:nvSpPr>
-        <p:spPr>
-          <a:xfrm>
-            <a:off x="365760" y="4096512"/>
-            <a:ext cx="1371600" cy="804672"/>
+          <p:cNvPr id="28" name="Shape 26"/>
+          <p:cNvSpPr/>
+          <p:nvPr/>
+        </p:nvSpPr>
+        <p:spPr>
+          <a:xfrm>
+            <a:off x="1874520" y="4096512"/>
+            <a:ext cx="6903720" cy="804672"/>
           </a:xfrm>
           <a:prstGeom prst="rect">
             <a:avLst>
@@ -18981,85 +19316,19 @@
             </a:avLst>
           </a:prstGeom>
           <a:solidFill>
-            <a:srgbClr val="E2E8F0"/>
+            <a:srgbClr val="F8FAFC"/>
           </a:solidFill>
           <a:ln w="12700">
             <a:solidFill>
               <a:srgbClr val="E2E8F0"/>
             </a:solidFill>
-            <a:prstDash val="solid"/>
-          </a:ln>
-        </p:spPr>
-      </p:sp>
-      <p:sp>
-        <p:nvSpPr>
-          <p:cNvPr id="30" name="Text 28"/>
-          <p:cNvSpPr/>
-          <p:nvPr/>
-        </p:nvSpPr>
-        <p:spPr>
-          <a:xfrm>
-            <a:off x="365760" y="4096512"/>
-            <a:ext cx="1371600" cy="804672"/>
-          </a:xfrm>
-          <a:prstGeom prst="rect">
-            <a:avLst/>
-          </a:prstGeom>
-          <a:noFill/>
-          <a:ln/>
-        </p:spPr>
-        <p:txBody>
-          <a:bodyPr wrap="square" lIns="0" tIns="0" rIns="0" bIns="0" rtlCol="0" anchor="ctr"/>
-          <a:lstStyle/>
-          <a:p>
-            <a:pPr algn="ctr" indent="0" marL="0">
-              <a:buNone/>
-            </a:pPr>
-            <a:r>
-              <a:rPr lang="en-US" sz="1100" b="1" dirty="0">
-                <a:solidFill>
-                  <a:srgbClr val="475569"/>
-                </a:solidFill>
-                <a:latin typeface="Trebuchet MS" pitchFamily="34" charset="0"/>
-                <a:ea typeface="Trebuchet MS" pitchFamily="34" charset="-122"/>
-                <a:cs typeface="Trebuchet MS" pitchFamily="34" charset="-120"/>
-              </a:rPr>
-              <a:t>Phonemes</a:t>
-            </a:r>
-            <a:endParaRPr lang="en-US" sz="1100" dirty="0"/>
-          </a:p>
-        </p:txBody>
-      </p:sp>
-      <p:sp>
-        <p:nvSpPr>
-          <p:cNvPr id="31" name="Shape 29"/>
-          <p:cNvSpPr/>
-          <p:nvPr/>
-        </p:nvSpPr>
-        <p:spPr>
-          <a:xfrm>
-            <a:off x="1874520" y="4096512"/>
-            <a:ext cx="6903720" cy="804672"/>
-          </a:xfrm>
-          <a:prstGeom prst="rect">
-            <a:avLst>
-              <a:gd name="adj" fmla="val 6818"/>
-            </a:avLst>
-          </a:prstGeom>
-          <a:solidFill>
-            <a:srgbClr val="F8FAFC"/>
-          </a:solidFill>
-          <a:ln w="12700">
-            <a:solidFill>
-              <a:srgbClr val="E2E8F0"/>
-            </a:solidFill>
             <a:prstDash val="dash"/>
           </a:ln>
         </p:spPr>
       </p:sp>
       <p:sp>
         <p:nvSpPr>
-          <p:cNvPr id="32" name="Text 30"/>
+          <p:cNvPr id="29" name="Text 27"/>
           <p:cNvSpPr/>
           <p:nvPr/>
         </p:nvSpPr>
@@ -19521,7 +19790,7 @@
                 <a:ea typeface="Trebuchet MS" pitchFamily="34" charset="-122"/>
                 <a:cs typeface="Trebuchet MS" pitchFamily="34" charset="-120"/>
               </a:rPr>
-              <a:t>interaction</a:t>
+              <a:t>active</a:t>
             </a:r>
             <a:endParaRPr lang="en-US" sz="2800" dirty="0"/>
           </a:p>
@@ -19601,7 +19870,7 @@
         </p:nvSpPr>
         <p:spPr>
           <a:xfrm>
-            <a:off x="2221992" y="2258568"/>
+            <a:off x="2938272" y="2258568"/>
             <a:ext cx="1828800" cy="292608"/>
           </a:xfrm>
           <a:prstGeom prst="rect">
@@ -19610,11 +19879,11 @@
             </a:avLst>
           </a:prstGeom>
           <a:solidFill>
-            <a:srgbClr val="DDD6FE"/>
+            <a:srgbClr val="CCFBF1"/>
           </a:solidFill>
           <a:ln w="19050">
             <a:solidFill>
-              <a:srgbClr val="7C3AED"/>
+              <a:srgbClr val="0D9488"/>
             </a:solidFill>
             <a:prstDash val="solid"/>
           </a:ln>
@@ -19635,7 +19904,7 @@
         </p:nvSpPr>
         <p:spPr>
           <a:xfrm>
-            <a:off x="2221992" y="2258568"/>
+            <a:off x="2938272" y="2258568"/>
             <a:ext cx="1828800" cy="292608"/>
           </a:xfrm>
           <a:prstGeom prst="rect">
@@ -19654,13 +19923,13 @@
             <a:r>
               <a:rPr lang="en-US" sz="1300" b="1" dirty="0">
                 <a:solidFill>
-                  <a:srgbClr val="4C1D95"/>
+                  <a:srgbClr val="0F766E"/>
                 </a:solidFill>
                 <a:latin typeface="Trebuchet MS" pitchFamily="34" charset="0"/>
                 <a:ea typeface="Trebuchet MS" pitchFamily="34" charset="-122"/>
                 <a:cs typeface="Trebuchet MS" pitchFamily="34" charset="-120"/>
               </a:rPr>
-              <a:t>inter</a:t>
+              <a:t>act</a:t>
             </a:r>
             <a:endParaRPr lang="en-US" sz="1300" dirty="0"/>
           </a:p>
@@ -19674,7 +19943,7 @@
         </p:nvSpPr>
         <p:spPr>
           <a:xfrm>
-            <a:off x="2221992" y="2569464"/>
+            <a:off x="2938272" y="2569464"/>
             <a:ext cx="1828800" cy="201168"/>
           </a:xfrm>
           <a:prstGeom prst="rect">
@@ -19699,7 +19968,7 @@
                 <a:ea typeface="Calibri" pitchFamily="34" charset="-122"/>
                 <a:cs typeface="Calibri" pitchFamily="34" charset="-120"/>
               </a:rPr>
-              <a:t>between, among</a:t>
+              <a:t>to do or perform</a:t>
             </a:r>
             <a:endParaRPr lang="en-US" sz="850" dirty="0"/>
           </a:p>
@@ -19713,7 +19982,7 @@
         </p:nvSpPr>
         <p:spPr>
           <a:xfrm>
-            <a:off x="4370832" y="2258568"/>
+            <a:off x="5803392" y="2258568"/>
             <a:ext cx="1828800" cy="292608"/>
           </a:xfrm>
           <a:prstGeom prst="rect">
@@ -19722,11 +19991,11 @@
             </a:avLst>
           </a:prstGeom>
           <a:solidFill>
-            <a:srgbClr val="CCFBF1"/>
+            <a:srgbClr val="FCE7F3"/>
           </a:solidFill>
           <a:ln w="19050">
             <a:solidFill>
-              <a:srgbClr val="0D9488"/>
+              <a:srgbClr val="DB2777"/>
             </a:solidFill>
             <a:prstDash val="solid"/>
           </a:ln>
@@ -19747,7 +20016,7 @@
         </p:nvSpPr>
         <p:spPr>
           <a:xfrm>
-            <a:off x="4370832" y="2258568"/>
+            <a:off x="5803392" y="2258568"/>
             <a:ext cx="1828800" cy="292608"/>
           </a:xfrm>
           <a:prstGeom prst="rect">
@@ -19766,13 +20035,13 @@
             <a:r>
               <a:rPr lang="en-US" sz="1300" b="1" dirty="0">
                 <a:solidFill>
-                  <a:srgbClr val="0F766E"/>
+                  <a:srgbClr val="9D174D"/>
                 </a:solidFill>
                 <a:latin typeface="Trebuchet MS" pitchFamily="34" charset="0"/>
                 <a:ea typeface="Trebuchet MS" pitchFamily="34" charset="-122"/>
                 <a:cs typeface="Trebuchet MS" pitchFamily="34" charset="-120"/>
               </a:rPr>
-              <a:t>act</a:t>
+              <a:t>ive</a:t>
             </a:r>
             <a:endParaRPr lang="en-US" sz="1300" dirty="0"/>
           </a:p>
@@ -19786,7 +20055,7 @@
         </p:nvSpPr>
         <p:spPr>
           <a:xfrm>
-            <a:off x="4370832" y="2569464"/>
+            <a:off x="5803392" y="2569464"/>
             <a:ext cx="1828800" cy="201168"/>
           </a:xfrm>
           <a:prstGeom prst="rect">
@@ -19811,7 +20080,7 @@
                 <a:ea typeface="Calibri" pitchFamily="34" charset="-122"/>
                 <a:cs typeface="Calibri" pitchFamily="34" charset="-120"/>
               </a:rPr>
-              <a:t>to do or perform</a:t>
+              <a:t>having the quality of</a:t>
             </a:r>
             <a:endParaRPr lang="en-US" sz="850" dirty="0"/>
           </a:p>
@@ -19825,30 +20094,23 @@
         </p:nvSpPr>
         <p:spPr>
           <a:xfrm>
-            <a:off x="6519672" y="2258568"/>
-            <a:ext cx="1828800" cy="292608"/>
+            <a:off x="365760" y="3273552"/>
+            <a:ext cx="1371600" cy="658368"/>
           </a:xfrm>
           <a:prstGeom prst="rect">
             <a:avLst>
-              <a:gd name="adj" fmla="val 25000"/>
+              <a:gd name="adj" fmla="val 8333"/>
             </a:avLst>
           </a:prstGeom>
           <a:solidFill>
-            <a:srgbClr val="FCE7F3"/>
-          </a:solidFill>
-          <a:ln w="19050">
-            <a:solidFill>
-              <a:srgbClr val="DB2777"/>
-            </a:solidFill>
-            <a:prstDash val="solid"/>
-          </a:ln>
-          <a:effectLst>
-            <a:outerShdw sx="100000" sy="100000" kx="0" ky="0" algn="bl" rotWithShape="0" blurRad="101600" dist="38100" dir="8100000">
-              <a:srgbClr val="000000">
-                <a:alpha val="12000"/>
-              </a:srgbClr>
-            </a:outerShdw>
-          </a:effectLst>
+            <a:srgbClr val="E2E8F0"/>
+          </a:solidFill>
+          <a:ln w="12700">
+            <a:solidFill>
+              <a:srgbClr val="E2E8F0"/>
+            </a:solidFill>
+            <a:prstDash val="solid"/>
+          </a:ln>
         </p:spPr>
       </p:sp>
       <p:sp>
@@ -19859,86 +20121,47 @@
         </p:nvSpPr>
         <p:spPr>
           <a:xfrm>
-            <a:off x="6519672" y="2258568"/>
-            <a:ext cx="1828800" cy="292608"/>
-          </a:xfrm>
-          <a:prstGeom prst="rect">
-            <a:avLst/>
-          </a:prstGeom>
-          <a:noFill/>
-          <a:ln/>
-        </p:spPr>
-        <p:txBody>
-          <a:bodyPr wrap="square" lIns="0" tIns="0" rIns="0" bIns="0" rtlCol="0" anchor="ctr"/>
-          <a:lstStyle/>
-          <a:p>
-            <a:pPr algn="ctr" indent="0" marL="0">
-              <a:buNone/>
-            </a:pPr>
-            <a:r>
-              <a:rPr lang="en-US" sz="1300" b="1" dirty="0">
-                <a:solidFill>
-                  <a:srgbClr val="9D174D"/>
+            <a:off x="365760" y="3273552"/>
+            <a:ext cx="1371600" cy="658368"/>
+          </a:xfrm>
+          <a:prstGeom prst="rect">
+            <a:avLst/>
+          </a:prstGeom>
+          <a:noFill/>
+          <a:ln/>
+        </p:spPr>
+        <p:txBody>
+          <a:bodyPr wrap="square" lIns="0" tIns="0" rIns="0" bIns="0" rtlCol="0" anchor="ctr"/>
+          <a:lstStyle/>
+          <a:p>
+            <a:pPr algn="ctr" indent="0" marL="0">
+              <a:buNone/>
+            </a:pPr>
+            <a:r>
+              <a:rPr lang="en-US" sz="1100" b="1" dirty="0">
+                <a:solidFill>
+                  <a:srgbClr val="475569"/>
                 </a:solidFill>
                 <a:latin typeface="Trebuchet MS" pitchFamily="34" charset="0"/>
                 <a:ea typeface="Trebuchet MS" pitchFamily="34" charset="-122"/>
                 <a:cs typeface="Trebuchet MS" pitchFamily="34" charset="-120"/>
               </a:rPr>
-              <a:t>ion</a:t>
-            </a:r>
-            <a:endParaRPr lang="en-US" sz="1300" dirty="0"/>
-          </a:p>
-        </p:txBody>
-      </p:sp>
-      <p:sp>
-        <p:nvSpPr>
-          <p:cNvPr id="24" name="Text 22"/>
-          <p:cNvSpPr/>
-          <p:nvPr/>
-        </p:nvSpPr>
-        <p:spPr>
-          <a:xfrm>
-            <a:off x="6519672" y="2569464"/>
-            <a:ext cx="1828800" cy="201168"/>
-          </a:xfrm>
-          <a:prstGeom prst="rect">
-            <a:avLst/>
-          </a:prstGeom>
-          <a:noFill/>
-          <a:ln/>
-        </p:spPr>
-        <p:txBody>
-          <a:bodyPr wrap="square" lIns="0" tIns="0" rIns="0" bIns="0" rtlCol="0" anchor="t"/>
-          <a:lstStyle/>
-          <a:p>
-            <a:pPr algn="ctr" indent="0" marL="0">
-              <a:buNone/>
-            </a:pPr>
-            <a:r>
-              <a:rPr lang="en-US" sz="850" dirty="0">
-                <a:solidFill>
-                  <a:srgbClr val="475569"/>
-                </a:solidFill>
-                <a:latin typeface="Calibri" pitchFamily="34" charset="0"/>
-                <a:ea typeface="Calibri" pitchFamily="34" charset="-122"/>
-                <a:cs typeface="Calibri" pitchFamily="34" charset="-120"/>
-              </a:rPr>
-              <a:t>act or process of</a:t>
-            </a:r>
-            <a:endParaRPr lang="en-US" sz="850" dirty="0"/>
-          </a:p>
-        </p:txBody>
-      </p:sp>
-      <p:sp>
-        <p:nvSpPr>
-          <p:cNvPr id="25" name="Shape 23"/>
-          <p:cNvSpPr/>
-          <p:nvPr/>
-        </p:nvSpPr>
-        <p:spPr>
-          <a:xfrm>
-            <a:off x="365760" y="3273552"/>
-            <a:ext cx="1371600" cy="658368"/>
+              <a:t>Syllables</a:t>
+            </a:r>
+            <a:endParaRPr lang="en-US" sz="1100" dirty="0"/>
+          </a:p>
+        </p:txBody>
+      </p:sp>
+      <p:sp>
+        <p:nvSpPr>
+          <p:cNvPr id="24" name="Shape 22"/>
+          <p:cNvSpPr/>
+          <p:nvPr/>
+        </p:nvSpPr>
+        <p:spPr>
+          <a:xfrm>
+            <a:off x="1874520" y="3273552"/>
+            <a:ext cx="6903720" cy="658368"/>
           </a:xfrm>
           <a:prstGeom prst="rect">
             <a:avLst>
@@ -19946,11 +20169,38 @@
             </a:avLst>
           </a:prstGeom>
           <a:solidFill>
-            <a:srgbClr val="E2E8F0"/>
-          </a:solidFill>
-          <a:ln w="12700">
-            <a:solidFill>
-              <a:srgbClr val="E2E8F0"/>
+            <a:srgbClr val="CCFBF1"/>
+          </a:solidFill>
+          <a:ln w="12700">
+            <a:solidFill>
+              <a:srgbClr val="0D9488"/>
+            </a:solidFill>
+            <a:prstDash val="solid"/>
+          </a:ln>
+        </p:spPr>
+      </p:sp>
+      <p:sp>
+        <p:nvSpPr>
+          <p:cNvPr id="25" name="Shape 23"/>
+          <p:cNvSpPr/>
+          <p:nvPr/>
+        </p:nvSpPr>
+        <p:spPr>
+          <a:xfrm>
+            <a:off x="2999232" y="3364992"/>
+            <a:ext cx="1645920" cy="475488"/>
+          </a:xfrm>
+          <a:prstGeom prst="rect">
+            <a:avLst>
+              <a:gd name="adj" fmla="val 9615"/>
+            </a:avLst>
+          </a:prstGeom>
+          <a:solidFill>
+            <a:srgbClr val="FFFFFF"/>
+          </a:solidFill>
+          <a:ln w="12700">
+            <a:solidFill>
+              <a:srgbClr val="0D9488"/>
             </a:solidFill>
             <a:prstDash val="solid"/>
           </a:ln>
@@ -19964,63 +20214,75 @@
         </p:nvSpPr>
         <p:spPr>
           <a:xfrm>
-            <a:off x="365760" y="3273552"/>
-            <a:ext cx="1371600" cy="658368"/>
-          </a:xfrm>
-          <a:prstGeom prst="rect">
-            <a:avLst/>
-          </a:prstGeom>
-          <a:noFill/>
-          <a:ln/>
-        </p:spPr>
-        <p:txBody>
-          <a:bodyPr wrap="square" lIns="0" tIns="0" rIns="0" bIns="0" rtlCol="0" anchor="ctr"/>
-          <a:lstStyle/>
-          <a:p>
-            <a:pPr algn="ctr" indent="0" marL="0">
-              <a:buNone/>
-            </a:pPr>
-            <a:r>
-              <a:rPr lang="en-US" sz="1100" b="1" dirty="0">
-                <a:solidFill>
-                  <a:srgbClr val="475569"/>
+            <a:off x="2999232" y="3364992"/>
+            <a:ext cx="1645920" cy="475488"/>
+          </a:xfrm>
+          <a:prstGeom prst="rect">
+            <a:avLst/>
+          </a:prstGeom>
+          <a:noFill/>
+          <a:ln/>
+        </p:spPr>
+        <p:txBody>
+          <a:bodyPr wrap="square" lIns="0" tIns="0" rIns="0" bIns="0" rtlCol="0" anchor="ctr"/>
+          <a:lstStyle/>
+          <a:p>
+            <a:pPr algn="ctr" indent="0" marL="0">
+              <a:buNone/>
+            </a:pPr>
+            <a:r>
+              <a:rPr lang="en-US" sz="1400" b="1" dirty="0">
+                <a:solidFill>
+                  <a:srgbClr val="0D9488"/>
                 </a:solidFill>
                 <a:latin typeface="Trebuchet MS" pitchFamily="34" charset="0"/>
                 <a:ea typeface="Trebuchet MS" pitchFamily="34" charset="-122"/>
                 <a:cs typeface="Trebuchet MS" pitchFamily="34" charset="-120"/>
               </a:rPr>
-              <a:t>Syllables</a:t>
-            </a:r>
-            <a:endParaRPr lang="en-US" sz="1100" dirty="0"/>
-          </a:p>
-        </p:txBody>
-      </p:sp>
-      <p:sp>
-        <p:nvSpPr>
-          <p:cNvPr id="27" name="Shape 25"/>
-          <p:cNvSpPr/>
-          <p:nvPr/>
-        </p:nvSpPr>
-        <p:spPr>
-          <a:xfrm>
-            <a:off x="1874520" y="3273552"/>
-            <a:ext cx="6903720" cy="658368"/>
-          </a:xfrm>
-          <a:prstGeom prst="rect">
-            <a:avLst>
-              <a:gd name="adj" fmla="val 8333"/>
-            </a:avLst>
-          </a:prstGeom>
-          <a:solidFill>
-            <a:srgbClr val="CCFBF1"/>
-          </a:solidFill>
-          <a:ln w="12700">
-            <a:solidFill>
-              <a:srgbClr val="0D9488"/>
-            </a:solidFill>
-            <a:prstDash val="solid"/>
-          </a:ln>
-        </p:spPr>
+              <a:t>ac</a:t>
+            </a:r>
+            <a:endParaRPr lang="en-US" sz="1400" dirty="0"/>
+          </a:p>
+        </p:txBody>
+      </p:sp>
+      <p:sp>
+        <p:nvSpPr>
+          <p:cNvPr id="27" name="Text 25"/>
+          <p:cNvSpPr/>
+          <p:nvPr/>
+        </p:nvSpPr>
+        <p:spPr>
+          <a:xfrm>
+            <a:off x="4645152" y="3364992"/>
+            <a:ext cx="1097280" cy="475488"/>
+          </a:xfrm>
+          <a:prstGeom prst="rect">
+            <a:avLst/>
+          </a:prstGeom>
+          <a:noFill/>
+          <a:ln/>
+        </p:spPr>
+        <p:txBody>
+          <a:bodyPr wrap="square" lIns="0" tIns="0" rIns="0" bIns="0" rtlCol="0" anchor="ctr"/>
+          <a:lstStyle/>
+          <a:p>
+            <a:pPr algn="ctr" indent="0" marL="0">
+              <a:buNone/>
+            </a:pPr>
+            <a:r>
+              <a:rPr lang="en-US" sz="1600" b="1" dirty="0">
+                <a:solidFill>
+                  <a:srgbClr val="0D9488"/>
+                </a:solidFill>
+                <a:latin typeface="Trebuchet MS" pitchFamily="34" charset="0"/>
+                <a:ea typeface="Trebuchet MS" pitchFamily="34" charset="-122"/>
+                <a:cs typeface="Trebuchet MS" pitchFamily="34" charset="-120"/>
+              </a:rPr>
+              <a:t>·</a:t>
+            </a:r>
+            <a:endParaRPr lang="en-US" sz="1600" dirty="0"/>
+          </a:p>
+        </p:txBody>
       </p:sp>
       <p:sp>
         <p:nvSpPr>
@@ -20030,8 +20292,8 @@
         </p:nvSpPr>
         <p:spPr>
           <a:xfrm>
-            <a:off x="1975104" y="3364992"/>
-            <a:ext cx="1554480" cy="475488"/>
+            <a:off x="5742432" y="3364992"/>
+            <a:ext cx="1645920" cy="475488"/>
           </a:xfrm>
           <a:prstGeom prst="rect">
             <a:avLst>
@@ -20057,8 +20319,8 @@
         </p:nvSpPr>
         <p:spPr>
           <a:xfrm>
-            <a:off x="1975104" y="3364992"/>
-            <a:ext cx="1554480" cy="475488"/>
+            <a:off x="5742432" y="3364992"/>
+            <a:ext cx="1645920" cy="475488"/>
           </a:xfrm>
           <a:prstGeom prst="rect">
             <a:avLst/>
@@ -20082,7 +20344,7 @@
                 <a:ea typeface="Trebuchet MS" pitchFamily="34" charset="-122"/>
                 <a:cs typeface="Trebuchet MS" pitchFamily="34" charset="-120"/>
               </a:rPr>
-              <a:t>in</a:t>
+              <a:t>tive</a:t>
             </a:r>
             <a:endParaRPr lang="en-US" sz="1400" dirty="0"/>
           </a:p>
@@ -20090,329 +20352,80 @@
       </p:sp>
       <p:sp>
         <p:nvSpPr>
-          <p:cNvPr id="30" name="Text 28"/>
-          <p:cNvSpPr/>
-          <p:nvPr/>
-        </p:nvSpPr>
-        <p:spPr>
-          <a:xfrm>
-            <a:off x="3529584" y="3364992"/>
-            <a:ext cx="73152" cy="475488"/>
-          </a:xfrm>
-          <a:prstGeom prst="rect">
-            <a:avLst/>
-          </a:prstGeom>
-          <a:noFill/>
-          <a:ln/>
-        </p:spPr>
-        <p:txBody>
-          <a:bodyPr wrap="square" lIns="0" tIns="0" rIns="0" bIns="0" rtlCol="0" anchor="ctr"/>
-          <a:lstStyle/>
-          <a:p>
-            <a:pPr algn="ctr" indent="0" marL="0">
-              <a:buNone/>
-            </a:pPr>
-            <a:r>
-              <a:rPr lang="en-US" sz="1600" b="1" dirty="0">
-                <a:solidFill>
-                  <a:srgbClr val="0D9488"/>
+          <p:cNvPr id="30" name="Shape 28"/>
+          <p:cNvSpPr/>
+          <p:nvPr/>
+        </p:nvSpPr>
+        <p:spPr>
+          <a:xfrm>
+            <a:off x="365760" y="4096512"/>
+            <a:ext cx="1371600" cy="804672"/>
+          </a:xfrm>
+          <a:prstGeom prst="rect">
+            <a:avLst>
+              <a:gd name="adj" fmla="val 6818"/>
+            </a:avLst>
+          </a:prstGeom>
+          <a:solidFill>
+            <a:srgbClr val="E2E8F0"/>
+          </a:solidFill>
+          <a:ln w="12700">
+            <a:solidFill>
+              <a:srgbClr val="E2E8F0"/>
+            </a:solidFill>
+            <a:prstDash val="solid"/>
+          </a:ln>
+        </p:spPr>
+      </p:sp>
+      <p:sp>
+        <p:nvSpPr>
+          <p:cNvPr id="31" name="Text 29"/>
+          <p:cNvSpPr/>
+          <p:nvPr/>
+        </p:nvSpPr>
+        <p:spPr>
+          <a:xfrm>
+            <a:off x="365760" y="4096512"/>
+            <a:ext cx="1371600" cy="804672"/>
+          </a:xfrm>
+          <a:prstGeom prst="rect">
+            <a:avLst/>
+          </a:prstGeom>
+          <a:noFill/>
+          <a:ln/>
+        </p:spPr>
+        <p:txBody>
+          <a:bodyPr wrap="square" lIns="0" tIns="0" rIns="0" bIns="0" rtlCol="0" anchor="ctr"/>
+          <a:lstStyle/>
+          <a:p>
+            <a:pPr algn="ctr" indent="0" marL="0">
+              <a:buNone/>
+            </a:pPr>
+            <a:r>
+              <a:rPr lang="en-US" sz="1100" b="1" dirty="0">
+                <a:solidFill>
+                  <a:srgbClr val="475569"/>
                 </a:solidFill>
                 <a:latin typeface="Trebuchet MS" pitchFamily="34" charset="0"/>
                 <a:ea typeface="Trebuchet MS" pitchFamily="34" charset="-122"/>
                 <a:cs typeface="Trebuchet MS" pitchFamily="34" charset="-120"/>
               </a:rPr>
-              <a:t>·</a:t>
-            </a:r>
-            <a:endParaRPr lang="en-US" sz="1600" dirty="0"/>
-          </a:p>
-        </p:txBody>
-      </p:sp>
-      <p:sp>
-        <p:nvSpPr>
-          <p:cNvPr id="31" name="Shape 29"/>
-          <p:cNvSpPr/>
-          <p:nvPr/>
-        </p:nvSpPr>
-        <p:spPr>
-          <a:xfrm>
-            <a:off x="3602736" y="3364992"/>
-            <a:ext cx="1554480" cy="475488"/>
-          </a:xfrm>
-          <a:prstGeom prst="rect">
-            <a:avLst>
-              <a:gd name="adj" fmla="val 9615"/>
-            </a:avLst>
-          </a:prstGeom>
-          <a:solidFill>
-            <a:srgbClr val="FFFFFF"/>
-          </a:solidFill>
-          <a:ln w="12700">
-            <a:solidFill>
-              <a:srgbClr val="0D9488"/>
-            </a:solidFill>
-            <a:prstDash val="solid"/>
-          </a:ln>
-        </p:spPr>
-      </p:sp>
-      <p:sp>
-        <p:nvSpPr>
-          <p:cNvPr id="32" name="Text 30"/>
-          <p:cNvSpPr/>
-          <p:nvPr/>
-        </p:nvSpPr>
-        <p:spPr>
-          <a:xfrm>
-            <a:off x="3602736" y="3364992"/>
-            <a:ext cx="1554480" cy="475488"/>
-          </a:xfrm>
-          <a:prstGeom prst="rect">
-            <a:avLst/>
-          </a:prstGeom>
-          <a:noFill/>
-          <a:ln/>
-        </p:spPr>
-        <p:txBody>
-          <a:bodyPr wrap="square" lIns="0" tIns="0" rIns="0" bIns="0" rtlCol="0" anchor="ctr"/>
-          <a:lstStyle/>
-          <a:p>
-            <a:pPr algn="ctr" indent="0" marL="0">
-              <a:buNone/>
-            </a:pPr>
-            <a:r>
-              <a:rPr lang="en-US" sz="1400" b="1" dirty="0">
-                <a:solidFill>
-                  <a:srgbClr val="0D9488"/>
-                </a:solidFill>
-                <a:latin typeface="Trebuchet MS" pitchFamily="34" charset="0"/>
-                <a:ea typeface="Trebuchet MS" pitchFamily="34" charset="-122"/>
-                <a:cs typeface="Trebuchet MS" pitchFamily="34" charset="-120"/>
-              </a:rPr>
-              <a:t>ter</a:t>
-            </a:r>
-            <a:endParaRPr lang="en-US" sz="1400" dirty="0"/>
-          </a:p>
-        </p:txBody>
-      </p:sp>
-      <p:sp>
-        <p:nvSpPr>
-          <p:cNvPr id="33" name="Text 31"/>
-          <p:cNvSpPr/>
-          <p:nvPr/>
-        </p:nvSpPr>
-        <p:spPr>
-          <a:xfrm>
-            <a:off x="5157216" y="3364992"/>
-            <a:ext cx="73152" cy="475488"/>
-          </a:xfrm>
-          <a:prstGeom prst="rect">
-            <a:avLst/>
-          </a:prstGeom>
-          <a:noFill/>
-          <a:ln/>
-        </p:spPr>
-        <p:txBody>
-          <a:bodyPr wrap="square" lIns="0" tIns="0" rIns="0" bIns="0" rtlCol="0" anchor="ctr"/>
-          <a:lstStyle/>
-          <a:p>
-            <a:pPr algn="ctr" indent="0" marL="0">
-              <a:buNone/>
-            </a:pPr>
-            <a:r>
-              <a:rPr lang="en-US" sz="1600" b="1" dirty="0">
-                <a:solidFill>
-                  <a:srgbClr val="0D9488"/>
-                </a:solidFill>
-                <a:latin typeface="Trebuchet MS" pitchFamily="34" charset="0"/>
-                <a:ea typeface="Trebuchet MS" pitchFamily="34" charset="-122"/>
-                <a:cs typeface="Trebuchet MS" pitchFamily="34" charset="-120"/>
-              </a:rPr>
-              <a:t>·</a:t>
-            </a:r>
-            <a:endParaRPr lang="en-US" sz="1600" dirty="0"/>
-          </a:p>
-        </p:txBody>
-      </p:sp>
-      <p:sp>
-        <p:nvSpPr>
-          <p:cNvPr id="34" name="Shape 32"/>
-          <p:cNvSpPr/>
-          <p:nvPr/>
-        </p:nvSpPr>
-        <p:spPr>
-          <a:xfrm>
-            <a:off x="5230368" y="3364992"/>
-            <a:ext cx="1554480" cy="475488"/>
-          </a:xfrm>
-          <a:prstGeom prst="rect">
-            <a:avLst>
-              <a:gd name="adj" fmla="val 9615"/>
-            </a:avLst>
-          </a:prstGeom>
-          <a:solidFill>
-            <a:srgbClr val="FFFFFF"/>
-          </a:solidFill>
-          <a:ln w="12700">
-            <a:solidFill>
-              <a:srgbClr val="0D9488"/>
-            </a:solidFill>
-            <a:prstDash val="solid"/>
-          </a:ln>
-        </p:spPr>
-      </p:sp>
-      <p:sp>
-        <p:nvSpPr>
-          <p:cNvPr id="35" name="Text 33"/>
-          <p:cNvSpPr/>
-          <p:nvPr/>
-        </p:nvSpPr>
-        <p:spPr>
-          <a:xfrm>
-            <a:off x="5230368" y="3364992"/>
-            <a:ext cx="1554480" cy="475488"/>
-          </a:xfrm>
-          <a:prstGeom prst="rect">
-            <a:avLst/>
-          </a:prstGeom>
-          <a:noFill/>
-          <a:ln/>
-        </p:spPr>
-        <p:txBody>
-          <a:bodyPr wrap="square" lIns="0" tIns="0" rIns="0" bIns="0" rtlCol="0" anchor="ctr"/>
-          <a:lstStyle/>
-          <a:p>
-            <a:pPr algn="ctr" indent="0" marL="0">
-              <a:buNone/>
-            </a:pPr>
-            <a:r>
-              <a:rPr lang="en-US" sz="1400" b="1" dirty="0">
-                <a:solidFill>
-                  <a:srgbClr val="0D9488"/>
-                </a:solidFill>
-                <a:latin typeface="Trebuchet MS" pitchFamily="34" charset="0"/>
-                <a:ea typeface="Trebuchet MS" pitchFamily="34" charset="-122"/>
-                <a:cs typeface="Trebuchet MS" pitchFamily="34" charset="-120"/>
-              </a:rPr>
-              <a:t>ac</a:t>
-            </a:r>
-            <a:endParaRPr lang="en-US" sz="1400" dirty="0"/>
-          </a:p>
-        </p:txBody>
-      </p:sp>
-      <p:sp>
-        <p:nvSpPr>
-          <p:cNvPr id="36" name="Text 34"/>
-          <p:cNvSpPr/>
-          <p:nvPr/>
-        </p:nvSpPr>
-        <p:spPr>
-          <a:xfrm>
-            <a:off x="6784848" y="3364992"/>
-            <a:ext cx="73152" cy="475488"/>
-          </a:xfrm>
-          <a:prstGeom prst="rect">
-            <a:avLst/>
-          </a:prstGeom>
-          <a:noFill/>
-          <a:ln/>
-        </p:spPr>
-        <p:txBody>
-          <a:bodyPr wrap="square" lIns="0" tIns="0" rIns="0" bIns="0" rtlCol="0" anchor="ctr"/>
-          <a:lstStyle/>
-          <a:p>
-            <a:pPr algn="ctr" indent="0" marL="0">
-              <a:buNone/>
-            </a:pPr>
-            <a:r>
-              <a:rPr lang="en-US" sz="1600" b="1" dirty="0">
-                <a:solidFill>
-                  <a:srgbClr val="0D9488"/>
-                </a:solidFill>
-                <a:latin typeface="Trebuchet MS" pitchFamily="34" charset="0"/>
-                <a:ea typeface="Trebuchet MS" pitchFamily="34" charset="-122"/>
-                <a:cs typeface="Trebuchet MS" pitchFamily="34" charset="-120"/>
-              </a:rPr>
-              <a:t>·</a:t>
-            </a:r>
-            <a:endParaRPr lang="en-US" sz="1600" dirty="0"/>
-          </a:p>
-        </p:txBody>
-      </p:sp>
-      <p:sp>
-        <p:nvSpPr>
-          <p:cNvPr id="37" name="Shape 35"/>
-          <p:cNvSpPr/>
-          <p:nvPr/>
-        </p:nvSpPr>
-        <p:spPr>
-          <a:xfrm>
-            <a:off x="6858000" y="3364992"/>
-            <a:ext cx="1554480" cy="475488"/>
-          </a:xfrm>
-          <a:prstGeom prst="rect">
-            <a:avLst>
-              <a:gd name="adj" fmla="val 9615"/>
-            </a:avLst>
-          </a:prstGeom>
-          <a:solidFill>
-            <a:srgbClr val="FFFFFF"/>
-          </a:solidFill>
-          <a:ln w="12700">
-            <a:solidFill>
-              <a:srgbClr val="0D9488"/>
-            </a:solidFill>
-            <a:prstDash val="solid"/>
-          </a:ln>
-        </p:spPr>
-      </p:sp>
-      <p:sp>
-        <p:nvSpPr>
-          <p:cNvPr id="38" name="Text 36"/>
-          <p:cNvSpPr/>
-          <p:nvPr/>
-        </p:nvSpPr>
-        <p:spPr>
-          <a:xfrm>
-            <a:off x="6858000" y="3364992"/>
-            <a:ext cx="1554480" cy="475488"/>
-          </a:xfrm>
-          <a:prstGeom prst="rect">
-            <a:avLst/>
-          </a:prstGeom>
-          <a:noFill/>
-          <a:ln/>
-        </p:spPr>
-        <p:txBody>
-          <a:bodyPr wrap="square" lIns="0" tIns="0" rIns="0" bIns="0" rtlCol="0" anchor="ctr"/>
-          <a:lstStyle/>
-          <a:p>
-            <a:pPr algn="ctr" indent="0" marL="0">
-              <a:buNone/>
-            </a:pPr>
-            <a:r>
-              <a:rPr lang="en-US" sz="1400" b="1" dirty="0">
-                <a:solidFill>
-                  <a:srgbClr val="0D9488"/>
-                </a:solidFill>
-                <a:latin typeface="Trebuchet MS" pitchFamily="34" charset="0"/>
-                <a:ea typeface="Trebuchet MS" pitchFamily="34" charset="-122"/>
-                <a:cs typeface="Trebuchet MS" pitchFamily="34" charset="-120"/>
-              </a:rPr>
-              <a:t>tion</a:t>
-            </a:r>
-            <a:endParaRPr lang="en-US" sz="1400" dirty="0"/>
-          </a:p>
-        </p:txBody>
-      </p:sp>
-      <p:sp>
-        <p:nvSpPr>
-          <p:cNvPr id="39" name="Shape 37"/>
-          <p:cNvSpPr/>
-          <p:nvPr/>
-        </p:nvSpPr>
-        <p:spPr>
-          <a:xfrm>
-            <a:off x="365760" y="4096512"/>
-            <a:ext cx="1371600" cy="804672"/>
+              <a:t>Phonemes</a:t>
+            </a:r>
+            <a:endParaRPr lang="en-US" sz="1100" dirty="0"/>
+          </a:p>
+        </p:txBody>
+      </p:sp>
+      <p:sp>
+        <p:nvSpPr>
+          <p:cNvPr id="32" name="Shape 30"/>
+          <p:cNvSpPr/>
+          <p:nvPr/>
+        </p:nvSpPr>
+        <p:spPr>
+          <a:xfrm>
+            <a:off x="1874520" y="4096512"/>
+            <a:ext cx="6903720" cy="804672"/>
           </a:xfrm>
           <a:prstGeom prst="rect">
             <a:avLst>
@@ -20420,85 +20433,19 @@
             </a:avLst>
           </a:prstGeom>
           <a:solidFill>
-            <a:srgbClr val="E2E8F0"/>
+            <a:srgbClr val="F8FAFC"/>
           </a:solidFill>
           <a:ln w="12700">
             <a:solidFill>
               <a:srgbClr val="E2E8F0"/>
             </a:solidFill>
-            <a:prstDash val="solid"/>
-          </a:ln>
-        </p:spPr>
-      </p:sp>
-      <p:sp>
-        <p:nvSpPr>
-          <p:cNvPr id="40" name="Text 38"/>
-          <p:cNvSpPr/>
-          <p:nvPr/>
-        </p:nvSpPr>
-        <p:spPr>
-          <a:xfrm>
-            <a:off x="365760" y="4096512"/>
-            <a:ext cx="1371600" cy="804672"/>
-          </a:xfrm>
-          <a:prstGeom prst="rect">
-            <a:avLst/>
-          </a:prstGeom>
-          <a:noFill/>
-          <a:ln/>
-        </p:spPr>
-        <p:txBody>
-          <a:bodyPr wrap="square" lIns="0" tIns="0" rIns="0" bIns="0" rtlCol="0" anchor="ctr"/>
-          <a:lstStyle/>
-          <a:p>
-            <a:pPr algn="ctr" indent="0" marL="0">
-              <a:buNone/>
-            </a:pPr>
-            <a:r>
-              <a:rPr lang="en-US" sz="1100" b="1" dirty="0">
-                <a:solidFill>
-                  <a:srgbClr val="475569"/>
-                </a:solidFill>
-                <a:latin typeface="Trebuchet MS" pitchFamily="34" charset="0"/>
-                <a:ea typeface="Trebuchet MS" pitchFamily="34" charset="-122"/>
-                <a:cs typeface="Trebuchet MS" pitchFamily="34" charset="-120"/>
-              </a:rPr>
-              <a:t>Phonemes</a:t>
-            </a:r>
-            <a:endParaRPr lang="en-US" sz="1100" dirty="0"/>
-          </a:p>
-        </p:txBody>
-      </p:sp>
-      <p:sp>
-        <p:nvSpPr>
-          <p:cNvPr id="41" name="Shape 39"/>
-          <p:cNvSpPr/>
-          <p:nvPr/>
-        </p:nvSpPr>
-        <p:spPr>
-          <a:xfrm>
-            <a:off x="1874520" y="4096512"/>
-            <a:ext cx="6903720" cy="804672"/>
-          </a:xfrm>
-          <a:prstGeom prst="rect">
-            <a:avLst>
-              <a:gd name="adj" fmla="val 6818"/>
-            </a:avLst>
-          </a:prstGeom>
-          <a:solidFill>
-            <a:srgbClr val="F8FAFC"/>
-          </a:solidFill>
-          <a:ln w="12700">
-            <a:solidFill>
-              <a:srgbClr val="E2E8F0"/>
-            </a:solidFill>
             <a:prstDash val="dash"/>
           </a:ln>
         </p:spPr>
       </p:sp>
       <p:sp>
         <p:nvSpPr>
-          <p:cNvPr id="42" name="Text 40"/>
+          <p:cNvPr id="33" name="Text 31"/>
           <p:cNvSpPr/>
           <p:nvPr/>
         </p:nvSpPr>
@@ -20960,7 +20907,7 @@
                 <a:ea typeface="Trebuchet MS" pitchFamily="34" charset="-122"/>
                 <a:cs typeface="Trebuchet MS" pitchFamily="34" charset="-120"/>
               </a:rPr>
-              <a:t>interaction</a:t>
+              <a:t>active</a:t>
             </a:r>
             <a:endParaRPr lang="en-US" sz="2800" dirty="0"/>
           </a:p>
@@ -21040,7 +20987,7 @@
         </p:nvSpPr>
         <p:spPr>
           <a:xfrm>
-            <a:off x="2221992" y="2258568"/>
+            <a:off x="2938272" y="2258568"/>
             <a:ext cx="1828800" cy="292608"/>
           </a:xfrm>
           <a:prstGeom prst="rect">
@@ -21049,11 +20996,11 @@
             </a:avLst>
           </a:prstGeom>
           <a:solidFill>
-            <a:srgbClr val="DDD6FE"/>
+            <a:srgbClr val="CCFBF1"/>
           </a:solidFill>
           <a:ln w="19050">
             <a:solidFill>
-              <a:srgbClr val="7C3AED"/>
+              <a:srgbClr val="0D9488"/>
             </a:solidFill>
             <a:prstDash val="solid"/>
           </a:ln>
@@ -21074,7 +21021,7 @@
         </p:nvSpPr>
         <p:spPr>
           <a:xfrm>
-            <a:off x="2221992" y="2258568"/>
+            <a:off x="2938272" y="2258568"/>
             <a:ext cx="1828800" cy="292608"/>
           </a:xfrm>
           <a:prstGeom prst="rect">
@@ -21093,13 +21040,13 @@
             <a:r>
               <a:rPr lang="en-US" sz="1300" b="1" dirty="0">
                 <a:solidFill>
-                  <a:srgbClr val="4C1D95"/>
+                  <a:srgbClr val="0F766E"/>
                 </a:solidFill>
                 <a:latin typeface="Trebuchet MS" pitchFamily="34" charset="0"/>
                 <a:ea typeface="Trebuchet MS" pitchFamily="34" charset="-122"/>
                 <a:cs typeface="Trebuchet MS" pitchFamily="34" charset="-120"/>
               </a:rPr>
-              <a:t>inter</a:t>
+              <a:t>act</a:t>
             </a:r>
             <a:endParaRPr lang="en-US" sz="1300" dirty="0"/>
           </a:p>
@@ -21113,7 +21060,7 @@
         </p:nvSpPr>
         <p:spPr>
           <a:xfrm>
-            <a:off x="2221992" y="2569464"/>
+            <a:off x="2938272" y="2569464"/>
             <a:ext cx="1828800" cy="201168"/>
           </a:xfrm>
           <a:prstGeom prst="rect">
@@ -21138,7 +21085,7 @@
                 <a:ea typeface="Calibri" pitchFamily="34" charset="-122"/>
                 <a:cs typeface="Calibri" pitchFamily="34" charset="-120"/>
               </a:rPr>
-              <a:t>between, among</a:t>
+              <a:t>to do or perform</a:t>
             </a:r>
             <a:endParaRPr lang="en-US" sz="850" dirty="0"/>
           </a:p>
@@ -21152,7 +21099,7 @@
         </p:nvSpPr>
         <p:spPr>
           <a:xfrm>
-            <a:off x="4370832" y="2258568"/>
+            <a:off x="5803392" y="2258568"/>
             <a:ext cx="1828800" cy="292608"/>
           </a:xfrm>
           <a:prstGeom prst="rect">
@@ -21161,11 +21108,11 @@
             </a:avLst>
           </a:prstGeom>
           <a:solidFill>
-            <a:srgbClr val="CCFBF1"/>
+            <a:srgbClr val="FCE7F3"/>
           </a:solidFill>
           <a:ln w="19050">
             <a:solidFill>
-              <a:srgbClr val="0D9488"/>
+              <a:srgbClr val="DB2777"/>
             </a:solidFill>
             <a:prstDash val="solid"/>
           </a:ln>
@@ -21186,7 +21133,7 @@
         </p:nvSpPr>
         <p:spPr>
           <a:xfrm>
-            <a:off x="4370832" y="2258568"/>
+            <a:off x="5803392" y="2258568"/>
             <a:ext cx="1828800" cy="292608"/>
           </a:xfrm>
           <a:prstGeom prst="rect">
@@ -21205,13 +21152,13 @@
             <a:r>
               <a:rPr lang="en-US" sz="1300" b="1" dirty="0">
                 <a:solidFill>
-                  <a:srgbClr val="0F766E"/>
+                  <a:srgbClr val="9D174D"/>
                 </a:solidFill>
                 <a:latin typeface="Trebuchet MS" pitchFamily="34" charset="0"/>
                 <a:ea typeface="Trebuchet MS" pitchFamily="34" charset="-122"/>
                 <a:cs typeface="Trebuchet MS" pitchFamily="34" charset="-120"/>
               </a:rPr>
-              <a:t>act</a:t>
+              <a:t>ive</a:t>
             </a:r>
             <a:endParaRPr lang="en-US" sz="1300" dirty="0"/>
           </a:p>
@@ -21225,7 +21172,7 @@
         </p:nvSpPr>
         <p:spPr>
           <a:xfrm>
-            <a:off x="4370832" y="2569464"/>
+            <a:off x="5803392" y="2569464"/>
             <a:ext cx="1828800" cy="201168"/>
           </a:xfrm>
           <a:prstGeom prst="rect">
@@ -21250,7 +21197,7 @@
                 <a:ea typeface="Calibri" pitchFamily="34" charset="-122"/>
                 <a:cs typeface="Calibri" pitchFamily="34" charset="-120"/>
               </a:rPr>
-              <a:t>to do or perform</a:t>
+              <a:t>having the quality of</a:t>
             </a:r>
             <a:endParaRPr lang="en-US" sz="850" dirty="0"/>
           </a:p>
@@ -21264,30 +21211,23 @@
         </p:nvSpPr>
         <p:spPr>
           <a:xfrm>
-            <a:off x="6519672" y="2258568"/>
-            <a:ext cx="1828800" cy="292608"/>
+            <a:off x="365760" y="3273552"/>
+            <a:ext cx="1371600" cy="658368"/>
           </a:xfrm>
           <a:prstGeom prst="rect">
             <a:avLst>
-              <a:gd name="adj" fmla="val 25000"/>
+              <a:gd name="adj" fmla="val 8333"/>
             </a:avLst>
           </a:prstGeom>
           <a:solidFill>
-            <a:srgbClr val="FCE7F3"/>
-          </a:solidFill>
-          <a:ln w="19050">
-            <a:solidFill>
-              <a:srgbClr val="DB2777"/>
-            </a:solidFill>
-            <a:prstDash val="solid"/>
-          </a:ln>
-          <a:effectLst>
-            <a:outerShdw sx="100000" sy="100000" kx="0" ky="0" algn="bl" rotWithShape="0" blurRad="101600" dist="38100" dir="8100000">
-              <a:srgbClr val="000000">
-                <a:alpha val="12000"/>
-              </a:srgbClr>
-            </a:outerShdw>
-          </a:effectLst>
+            <a:srgbClr val="E2E8F0"/>
+          </a:solidFill>
+          <a:ln w="12700">
+            <a:solidFill>
+              <a:srgbClr val="E2E8F0"/>
+            </a:solidFill>
+            <a:prstDash val="solid"/>
+          </a:ln>
         </p:spPr>
       </p:sp>
       <p:sp>
@@ -21298,47 +21238,668 @@
         </p:nvSpPr>
         <p:spPr>
           <a:xfrm>
-            <a:off x="6519672" y="2258568"/>
-            <a:ext cx="1828800" cy="292608"/>
-          </a:xfrm>
-          <a:prstGeom prst="rect">
-            <a:avLst/>
-          </a:prstGeom>
-          <a:noFill/>
-          <a:ln/>
-        </p:spPr>
-        <p:txBody>
-          <a:bodyPr wrap="square" lIns="0" tIns="0" rIns="0" bIns="0" rtlCol="0" anchor="ctr"/>
-          <a:lstStyle/>
-          <a:p>
-            <a:pPr algn="ctr" indent="0" marL="0">
-              <a:buNone/>
-            </a:pPr>
-            <a:r>
-              <a:rPr lang="en-US" sz="1300" b="1" dirty="0">
-                <a:solidFill>
-                  <a:srgbClr val="9D174D"/>
+            <a:off x="365760" y="3273552"/>
+            <a:ext cx="1371600" cy="658368"/>
+          </a:xfrm>
+          <a:prstGeom prst="rect">
+            <a:avLst/>
+          </a:prstGeom>
+          <a:noFill/>
+          <a:ln/>
+        </p:spPr>
+        <p:txBody>
+          <a:bodyPr wrap="square" lIns="0" tIns="0" rIns="0" bIns="0" rtlCol="0" anchor="ctr"/>
+          <a:lstStyle/>
+          <a:p>
+            <a:pPr algn="ctr" indent="0" marL="0">
+              <a:buNone/>
+            </a:pPr>
+            <a:r>
+              <a:rPr lang="en-US" sz="1100" b="1" dirty="0">
+                <a:solidFill>
+                  <a:srgbClr val="475569"/>
                 </a:solidFill>
                 <a:latin typeface="Trebuchet MS" pitchFamily="34" charset="0"/>
                 <a:ea typeface="Trebuchet MS" pitchFamily="34" charset="-122"/>
                 <a:cs typeface="Trebuchet MS" pitchFamily="34" charset="-120"/>
               </a:rPr>
-              <a:t>ion</a:t>
-            </a:r>
-            <a:endParaRPr lang="en-US" sz="1300" dirty="0"/>
-          </a:p>
-        </p:txBody>
-      </p:sp>
-      <p:sp>
-        <p:nvSpPr>
-          <p:cNvPr id="24" name="Text 22"/>
-          <p:cNvSpPr/>
-          <p:nvPr/>
-        </p:nvSpPr>
-        <p:spPr>
-          <a:xfrm>
-            <a:off x="6519672" y="2569464"/>
-            <a:ext cx="1828800" cy="201168"/>
+              <a:t>Syllables</a:t>
+            </a:r>
+            <a:endParaRPr lang="en-US" sz="1100" dirty="0"/>
+          </a:p>
+        </p:txBody>
+      </p:sp>
+      <p:sp>
+        <p:nvSpPr>
+          <p:cNvPr id="24" name="Shape 22"/>
+          <p:cNvSpPr/>
+          <p:nvPr/>
+        </p:nvSpPr>
+        <p:spPr>
+          <a:xfrm>
+            <a:off x="1874520" y="3273552"/>
+            <a:ext cx="6903720" cy="658368"/>
+          </a:xfrm>
+          <a:prstGeom prst="rect">
+            <a:avLst>
+              <a:gd name="adj" fmla="val 8333"/>
+            </a:avLst>
+          </a:prstGeom>
+          <a:solidFill>
+            <a:srgbClr val="CCFBF1"/>
+          </a:solidFill>
+          <a:ln w="12700">
+            <a:solidFill>
+              <a:srgbClr val="0D9488"/>
+            </a:solidFill>
+            <a:prstDash val="solid"/>
+          </a:ln>
+        </p:spPr>
+      </p:sp>
+      <p:sp>
+        <p:nvSpPr>
+          <p:cNvPr id="25" name="Shape 23"/>
+          <p:cNvSpPr/>
+          <p:nvPr/>
+        </p:nvSpPr>
+        <p:spPr>
+          <a:xfrm>
+            <a:off x="2999232" y="3364992"/>
+            <a:ext cx="1645920" cy="475488"/>
+          </a:xfrm>
+          <a:prstGeom prst="rect">
+            <a:avLst>
+              <a:gd name="adj" fmla="val 9615"/>
+            </a:avLst>
+          </a:prstGeom>
+          <a:solidFill>
+            <a:srgbClr val="FFFFFF"/>
+          </a:solidFill>
+          <a:ln w="12700">
+            <a:solidFill>
+              <a:srgbClr val="0D9488"/>
+            </a:solidFill>
+            <a:prstDash val="solid"/>
+          </a:ln>
+        </p:spPr>
+      </p:sp>
+      <p:sp>
+        <p:nvSpPr>
+          <p:cNvPr id="26" name="Text 24"/>
+          <p:cNvSpPr/>
+          <p:nvPr/>
+        </p:nvSpPr>
+        <p:spPr>
+          <a:xfrm>
+            <a:off x="2999232" y="3364992"/>
+            <a:ext cx="1645920" cy="475488"/>
+          </a:xfrm>
+          <a:prstGeom prst="rect">
+            <a:avLst/>
+          </a:prstGeom>
+          <a:noFill/>
+          <a:ln/>
+        </p:spPr>
+        <p:txBody>
+          <a:bodyPr wrap="square" lIns="0" tIns="0" rIns="0" bIns="0" rtlCol="0" anchor="ctr"/>
+          <a:lstStyle/>
+          <a:p>
+            <a:pPr algn="ctr" indent="0" marL="0">
+              <a:buNone/>
+            </a:pPr>
+            <a:r>
+              <a:rPr lang="en-US" sz="1400" b="1" dirty="0">
+                <a:solidFill>
+                  <a:srgbClr val="0D9488"/>
+                </a:solidFill>
+                <a:latin typeface="Trebuchet MS" pitchFamily="34" charset="0"/>
+                <a:ea typeface="Trebuchet MS" pitchFamily="34" charset="-122"/>
+                <a:cs typeface="Trebuchet MS" pitchFamily="34" charset="-120"/>
+              </a:rPr>
+              <a:t>ac</a:t>
+            </a:r>
+            <a:endParaRPr lang="en-US" sz="1400" dirty="0"/>
+          </a:p>
+        </p:txBody>
+      </p:sp>
+      <p:sp>
+        <p:nvSpPr>
+          <p:cNvPr id="27" name="Text 25"/>
+          <p:cNvSpPr/>
+          <p:nvPr/>
+        </p:nvSpPr>
+        <p:spPr>
+          <a:xfrm>
+            <a:off x="4645152" y="3364992"/>
+            <a:ext cx="1097280" cy="475488"/>
+          </a:xfrm>
+          <a:prstGeom prst="rect">
+            <a:avLst/>
+          </a:prstGeom>
+          <a:noFill/>
+          <a:ln/>
+        </p:spPr>
+        <p:txBody>
+          <a:bodyPr wrap="square" lIns="0" tIns="0" rIns="0" bIns="0" rtlCol="0" anchor="ctr"/>
+          <a:lstStyle/>
+          <a:p>
+            <a:pPr algn="ctr" indent="0" marL="0">
+              <a:buNone/>
+            </a:pPr>
+            <a:r>
+              <a:rPr lang="en-US" sz="1600" b="1" dirty="0">
+                <a:solidFill>
+                  <a:srgbClr val="0D9488"/>
+                </a:solidFill>
+                <a:latin typeface="Trebuchet MS" pitchFamily="34" charset="0"/>
+                <a:ea typeface="Trebuchet MS" pitchFamily="34" charset="-122"/>
+                <a:cs typeface="Trebuchet MS" pitchFamily="34" charset="-120"/>
+              </a:rPr>
+              <a:t>·</a:t>
+            </a:r>
+            <a:endParaRPr lang="en-US" sz="1600" dirty="0"/>
+          </a:p>
+        </p:txBody>
+      </p:sp>
+      <p:sp>
+        <p:nvSpPr>
+          <p:cNvPr id="28" name="Shape 26"/>
+          <p:cNvSpPr/>
+          <p:nvPr/>
+        </p:nvSpPr>
+        <p:spPr>
+          <a:xfrm>
+            <a:off x="5742432" y="3364992"/>
+            <a:ext cx="1645920" cy="475488"/>
+          </a:xfrm>
+          <a:prstGeom prst="rect">
+            <a:avLst>
+              <a:gd name="adj" fmla="val 9615"/>
+            </a:avLst>
+          </a:prstGeom>
+          <a:solidFill>
+            <a:srgbClr val="FFFFFF"/>
+          </a:solidFill>
+          <a:ln w="12700">
+            <a:solidFill>
+              <a:srgbClr val="0D9488"/>
+            </a:solidFill>
+            <a:prstDash val="solid"/>
+          </a:ln>
+        </p:spPr>
+      </p:sp>
+      <p:sp>
+        <p:nvSpPr>
+          <p:cNvPr id="29" name="Text 27"/>
+          <p:cNvSpPr/>
+          <p:nvPr/>
+        </p:nvSpPr>
+        <p:spPr>
+          <a:xfrm>
+            <a:off x="5742432" y="3364992"/>
+            <a:ext cx="1645920" cy="475488"/>
+          </a:xfrm>
+          <a:prstGeom prst="rect">
+            <a:avLst/>
+          </a:prstGeom>
+          <a:noFill/>
+          <a:ln/>
+        </p:spPr>
+        <p:txBody>
+          <a:bodyPr wrap="square" lIns="0" tIns="0" rIns="0" bIns="0" rtlCol="0" anchor="ctr"/>
+          <a:lstStyle/>
+          <a:p>
+            <a:pPr algn="ctr" indent="0" marL="0">
+              <a:buNone/>
+            </a:pPr>
+            <a:r>
+              <a:rPr lang="en-US" sz="1400" b="1" dirty="0">
+                <a:solidFill>
+                  <a:srgbClr val="0D9488"/>
+                </a:solidFill>
+                <a:latin typeface="Trebuchet MS" pitchFamily="34" charset="0"/>
+                <a:ea typeface="Trebuchet MS" pitchFamily="34" charset="-122"/>
+                <a:cs typeface="Trebuchet MS" pitchFamily="34" charset="-120"/>
+              </a:rPr>
+              <a:t>tive</a:t>
+            </a:r>
+            <a:endParaRPr lang="en-US" sz="1400" dirty="0"/>
+          </a:p>
+        </p:txBody>
+      </p:sp>
+      <p:sp>
+        <p:nvSpPr>
+          <p:cNvPr id="30" name="Shape 28"/>
+          <p:cNvSpPr/>
+          <p:nvPr/>
+        </p:nvSpPr>
+        <p:spPr>
+          <a:xfrm>
+            <a:off x="365760" y="4096512"/>
+            <a:ext cx="1371600" cy="804672"/>
+          </a:xfrm>
+          <a:prstGeom prst="rect">
+            <a:avLst>
+              <a:gd name="adj" fmla="val 6818"/>
+            </a:avLst>
+          </a:prstGeom>
+          <a:solidFill>
+            <a:srgbClr val="E2E8F0"/>
+          </a:solidFill>
+          <a:ln w="12700">
+            <a:solidFill>
+              <a:srgbClr val="E2E8F0"/>
+            </a:solidFill>
+            <a:prstDash val="solid"/>
+          </a:ln>
+        </p:spPr>
+      </p:sp>
+      <p:sp>
+        <p:nvSpPr>
+          <p:cNvPr id="31" name="Text 29"/>
+          <p:cNvSpPr/>
+          <p:nvPr/>
+        </p:nvSpPr>
+        <p:spPr>
+          <a:xfrm>
+            <a:off x="365760" y="4096512"/>
+            <a:ext cx="1371600" cy="804672"/>
+          </a:xfrm>
+          <a:prstGeom prst="rect">
+            <a:avLst/>
+          </a:prstGeom>
+          <a:noFill/>
+          <a:ln/>
+        </p:spPr>
+        <p:txBody>
+          <a:bodyPr wrap="square" lIns="0" tIns="0" rIns="0" bIns="0" rtlCol="0" anchor="ctr"/>
+          <a:lstStyle/>
+          <a:p>
+            <a:pPr algn="ctr" indent="0" marL="0">
+              <a:buNone/>
+            </a:pPr>
+            <a:r>
+              <a:rPr lang="en-US" sz="1100" b="1" dirty="0">
+                <a:solidFill>
+                  <a:srgbClr val="475569"/>
+                </a:solidFill>
+                <a:latin typeface="Trebuchet MS" pitchFamily="34" charset="0"/>
+                <a:ea typeface="Trebuchet MS" pitchFamily="34" charset="-122"/>
+                <a:cs typeface="Trebuchet MS" pitchFamily="34" charset="-120"/>
+              </a:rPr>
+              <a:t>Phonemes</a:t>
+            </a:r>
+            <a:endParaRPr lang="en-US" sz="1100" dirty="0"/>
+          </a:p>
+        </p:txBody>
+      </p:sp>
+      <p:sp>
+        <p:nvSpPr>
+          <p:cNvPr id="32" name="Shape 30"/>
+          <p:cNvSpPr/>
+          <p:nvPr/>
+        </p:nvSpPr>
+        <p:spPr>
+          <a:xfrm>
+            <a:off x="1874520" y="4096512"/>
+            <a:ext cx="6903720" cy="804672"/>
+          </a:xfrm>
+          <a:prstGeom prst="rect">
+            <a:avLst>
+              <a:gd name="adj" fmla="val 6818"/>
+            </a:avLst>
+          </a:prstGeom>
+          <a:solidFill>
+            <a:srgbClr val="FCE7F3"/>
+          </a:solidFill>
+          <a:ln w="12700">
+            <a:solidFill>
+              <a:srgbClr val="DB2777"/>
+            </a:solidFill>
+            <a:prstDash val="solid"/>
+          </a:ln>
+        </p:spPr>
+      </p:sp>
+      <p:sp>
+        <p:nvSpPr>
+          <p:cNvPr id="33" name="Shape 31"/>
+          <p:cNvSpPr/>
+          <p:nvPr/>
+        </p:nvSpPr>
+        <p:spPr>
+          <a:xfrm>
+            <a:off x="2427732" y="4169664"/>
+            <a:ext cx="685800" cy="384048"/>
+          </a:xfrm>
+          <a:prstGeom prst="rect">
+            <a:avLst>
+              <a:gd name="adj" fmla="val 9524"/>
+            </a:avLst>
+          </a:prstGeom>
+          <a:solidFill>
+            <a:srgbClr val="FFFFFF"/>
+          </a:solidFill>
+          <a:ln w="12700">
+            <a:solidFill>
+              <a:srgbClr val="DB2777"/>
+            </a:solidFill>
+            <a:prstDash val="solid"/>
+          </a:ln>
+        </p:spPr>
+      </p:sp>
+      <p:sp>
+        <p:nvSpPr>
+          <p:cNvPr id="34" name="Text 32"/>
+          <p:cNvSpPr/>
+          <p:nvPr/>
+        </p:nvSpPr>
+        <p:spPr>
+          <a:xfrm>
+            <a:off x="2427732" y="4169664"/>
+            <a:ext cx="685800" cy="384048"/>
+          </a:xfrm>
+          <a:prstGeom prst="rect">
+            <a:avLst/>
+          </a:prstGeom>
+          <a:noFill/>
+          <a:ln/>
+        </p:spPr>
+        <p:txBody>
+          <a:bodyPr wrap="square" lIns="0" tIns="0" rIns="0" bIns="0" rtlCol="0" anchor="ctr"/>
+          <a:lstStyle/>
+          <a:p>
+            <a:pPr algn="ctr" indent="0" marL="0">
+              <a:buNone/>
+            </a:pPr>
+            <a:r>
+              <a:rPr lang="en-US" sz="900" b="1" dirty="0">
+                <a:solidFill>
+                  <a:srgbClr val="9D174D"/>
+                </a:solidFill>
+                <a:latin typeface="Trebuchet MS" pitchFamily="34" charset="0"/>
+                <a:ea typeface="Trebuchet MS" pitchFamily="34" charset="-122"/>
+                <a:cs typeface="Trebuchet MS" pitchFamily="34" charset="-120"/>
+              </a:rPr>
+              <a:t>a</a:t>
+            </a:r>
+            <a:endParaRPr lang="en-US" sz="900" dirty="0"/>
+          </a:p>
+        </p:txBody>
+      </p:sp>
+      <p:sp>
+        <p:nvSpPr>
+          <p:cNvPr id="35" name="Shape 33"/>
+          <p:cNvSpPr/>
+          <p:nvPr/>
+        </p:nvSpPr>
+        <p:spPr>
+          <a:xfrm>
+            <a:off x="3639312" y="4169664"/>
+            <a:ext cx="685800" cy="384048"/>
+          </a:xfrm>
+          <a:prstGeom prst="rect">
+            <a:avLst>
+              <a:gd name="adj" fmla="val 9524"/>
+            </a:avLst>
+          </a:prstGeom>
+          <a:solidFill>
+            <a:srgbClr val="FFFFFF"/>
+          </a:solidFill>
+          <a:ln w="12700">
+            <a:solidFill>
+              <a:srgbClr val="DB2777"/>
+            </a:solidFill>
+            <a:prstDash val="solid"/>
+          </a:ln>
+        </p:spPr>
+      </p:sp>
+      <p:sp>
+        <p:nvSpPr>
+          <p:cNvPr id="36" name="Text 34"/>
+          <p:cNvSpPr/>
+          <p:nvPr/>
+        </p:nvSpPr>
+        <p:spPr>
+          <a:xfrm>
+            <a:off x="3639312" y="4169664"/>
+            <a:ext cx="685800" cy="384048"/>
+          </a:xfrm>
+          <a:prstGeom prst="rect">
+            <a:avLst/>
+          </a:prstGeom>
+          <a:noFill/>
+          <a:ln/>
+        </p:spPr>
+        <p:txBody>
+          <a:bodyPr wrap="square" lIns="0" tIns="0" rIns="0" bIns="0" rtlCol="0" anchor="ctr"/>
+          <a:lstStyle/>
+          <a:p>
+            <a:pPr algn="ctr" indent="0" marL="0">
+              <a:buNone/>
+            </a:pPr>
+            <a:r>
+              <a:rPr lang="en-US" sz="900" b="1" dirty="0">
+                <a:solidFill>
+                  <a:srgbClr val="9D174D"/>
+                </a:solidFill>
+                <a:latin typeface="Trebuchet MS" pitchFamily="34" charset="0"/>
+                <a:ea typeface="Trebuchet MS" pitchFamily="34" charset="-122"/>
+                <a:cs typeface="Trebuchet MS" pitchFamily="34" charset="-120"/>
+              </a:rPr>
+              <a:t>c</a:t>
+            </a:r>
+            <a:endParaRPr lang="en-US" sz="900" dirty="0"/>
+          </a:p>
+        </p:txBody>
+      </p:sp>
+      <p:sp>
+        <p:nvSpPr>
+          <p:cNvPr id="37" name="Shape 35"/>
+          <p:cNvSpPr/>
+          <p:nvPr/>
+        </p:nvSpPr>
+        <p:spPr>
+          <a:xfrm>
+            <a:off x="4850892" y="4169664"/>
+            <a:ext cx="685800" cy="384048"/>
+          </a:xfrm>
+          <a:prstGeom prst="rect">
+            <a:avLst>
+              <a:gd name="adj" fmla="val 9524"/>
+            </a:avLst>
+          </a:prstGeom>
+          <a:solidFill>
+            <a:srgbClr val="FFFFFF"/>
+          </a:solidFill>
+          <a:ln w="12700">
+            <a:solidFill>
+              <a:srgbClr val="DB2777"/>
+            </a:solidFill>
+            <a:prstDash val="solid"/>
+          </a:ln>
+        </p:spPr>
+      </p:sp>
+      <p:sp>
+        <p:nvSpPr>
+          <p:cNvPr id="38" name="Text 36"/>
+          <p:cNvSpPr/>
+          <p:nvPr/>
+        </p:nvSpPr>
+        <p:spPr>
+          <a:xfrm>
+            <a:off x="4850892" y="4169664"/>
+            <a:ext cx="685800" cy="384048"/>
+          </a:xfrm>
+          <a:prstGeom prst="rect">
+            <a:avLst/>
+          </a:prstGeom>
+          <a:noFill/>
+          <a:ln/>
+        </p:spPr>
+        <p:txBody>
+          <a:bodyPr wrap="square" lIns="0" tIns="0" rIns="0" bIns="0" rtlCol="0" anchor="ctr"/>
+          <a:lstStyle/>
+          <a:p>
+            <a:pPr algn="ctr" indent="0" marL="0">
+              <a:buNone/>
+            </a:pPr>
+            <a:r>
+              <a:rPr lang="en-US" sz="900" b="1" dirty="0">
+                <a:solidFill>
+                  <a:srgbClr val="9D174D"/>
+                </a:solidFill>
+                <a:latin typeface="Trebuchet MS" pitchFamily="34" charset="0"/>
+                <a:ea typeface="Trebuchet MS" pitchFamily="34" charset="-122"/>
+                <a:cs typeface="Trebuchet MS" pitchFamily="34" charset="-120"/>
+              </a:rPr>
+              <a:t>t</a:t>
+            </a:r>
+            <a:endParaRPr lang="en-US" sz="900" dirty="0"/>
+          </a:p>
+        </p:txBody>
+      </p:sp>
+      <p:sp>
+        <p:nvSpPr>
+          <p:cNvPr id="39" name="Shape 37"/>
+          <p:cNvSpPr/>
+          <p:nvPr/>
+        </p:nvSpPr>
+        <p:spPr>
+          <a:xfrm>
+            <a:off x="6062472" y="4169664"/>
+            <a:ext cx="685800" cy="384048"/>
+          </a:xfrm>
+          <a:prstGeom prst="rect">
+            <a:avLst>
+              <a:gd name="adj" fmla="val 9524"/>
+            </a:avLst>
+          </a:prstGeom>
+          <a:solidFill>
+            <a:srgbClr val="FFFFFF"/>
+          </a:solidFill>
+          <a:ln w="12700">
+            <a:solidFill>
+              <a:srgbClr val="DB2777"/>
+            </a:solidFill>
+            <a:prstDash val="solid"/>
+          </a:ln>
+        </p:spPr>
+      </p:sp>
+      <p:sp>
+        <p:nvSpPr>
+          <p:cNvPr id="40" name="Text 38"/>
+          <p:cNvSpPr/>
+          <p:nvPr/>
+        </p:nvSpPr>
+        <p:spPr>
+          <a:xfrm>
+            <a:off x="6062472" y="4169664"/>
+            <a:ext cx="685800" cy="384048"/>
+          </a:xfrm>
+          <a:prstGeom prst="rect">
+            <a:avLst/>
+          </a:prstGeom>
+          <a:noFill/>
+          <a:ln/>
+        </p:spPr>
+        <p:txBody>
+          <a:bodyPr wrap="square" lIns="0" tIns="0" rIns="0" bIns="0" rtlCol="0" anchor="ctr"/>
+          <a:lstStyle/>
+          <a:p>
+            <a:pPr algn="ctr" indent="0" marL="0">
+              <a:buNone/>
+            </a:pPr>
+            <a:r>
+              <a:rPr lang="en-US" sz="900" b="1" dirty="0">
+                <a:solidFill>
+                  <a:srgbClr val="9D174D"/>
+                </a:solidFill>
+                <a:latin typeface="Trebuchet MS" pitchFamily="34" charset="0"/>
+                <a:ea typeface="Trebuchet MS" pitchFamily="34" charset="-122"/>
+                <a:cs typeface="Trebuchet MS" pitchFamily="34" charset="-120"/>
+              </a:rPr>
+              <a:t>i</a:t>
+            </a:r>
+            <a:endParaRPr lang="en-US" sz="900" dirty="0"/>
+          </a:p>
+        </p:txBody>
+      </p:sp>
+      <p:sp>
+        <p:nvSpPr>
+          <p:cNvPr id="41" name="Shape 39"/>
+          <p:cNvSpPr/>
+          <p:nvPr/>
+        </p:nvSpPr>
+        <p:spPr>
+          <a:xfrm>
+            <a:off x="7274052" y="4169664"/>
+            <a:ext cx="685800" cy="384048"/>
+          </a:xfrm>
+          <a:prstGeom prst="rect">
+            <a:avLst>
+              <a:gd name="adj" fmla="val 9524"/>
+            </a:avLst>
+          </a:prstGeom>
+          <a:solidFill>
+            <a:srgbClr val="FFFFFF"/>
+          </a:solidFill>
+          <a:ln w="12700">
+            <a:solidFill>
+              <a:srgbClr val="DB2777"/>
+            </a:solidFill>
+            <a:prstDash val="solid"/>
+          </a:ln>
+        </p:spPr>
+      </p:sp>
+      <p:sp>
+        <p:nvSpPr>
+          <p:cNvPr id="42" name="Text 40"/>
+          <p:cNvSpPr/>
+          <p:nvPr/>
+        </p:nvSpPr>
+        <p:spPr>
+          <a:xfrm>
+            <a:off x="7274052" y="4169664"/>
+            <a:ext cx="685800" cy="384048"/>
+          </a:xfrm>
+          <a:prstGeom prst="rect">
+            <a:avLst/>
+          </a:prstGeom>
+          <a:noFill/>
+          <a:ln/>
+        </p:spPr>
+        <p:txBody>
+          <a:bodyPr wrap="square" lIns="0" tIns="0" rIns="0" bIns="0" rtlCol="0" anchor="ctr"/>
+          <a:lstStyle/>
+          <a:p>
+            <a:pPr algn="ctr" indent="0" marL="0">
+              <a:buNone/>
+            </a:pPr>
+            <a:r>
+              <a:rPr lang="en-US" sz="900" b="1" dirty="0">
+                <a:solidFill>
+                  <a:srgbClr val="9D174D"/>
+                </a:solidFill>
+                <a:latin typeface="Trebuchet MS" pitchFamily="34" charset="0"/>
+                <a:ea typeface="Trebuchet MS" pitchFamily="34" charset="-122"/>
+                <a:cs typeface="Trebuchet MS" pitchFamily="34" charset="-120"/>
+              </a:rPr>
+              <a:t>ve</a:t>
+            </a:r>
+            <a:endParaRPr lang="en-US" sz="900" dirty="0"/>
+          </a:p>
+        </p:txBody>
+      </p:sp>
+      <p:sp>
+        <p:nvSpPr>
+          <p:cNvPr id="43" name="Text 41"/>
+          <p:cNvSpPr/>
+          <p:nvPr/>
+        </p:nvSpPr>
+        <p:spPr>
+          <a:xfrm>
+            <a:off x="7274052" y="4572000"/>
+            <a:ext cx="685800" cy="219456"/>
           </a:xfrm>
           <a:prstGeom prst="rect">
             <a:avLst/>
@@ -21354,1244 +21915,17 @@
               <a:buNone/>
             </a:pPr>
             <a:r>
-              <a:rPr lang="en-US" sz="850" dirty="0">
-                <a:solidFill>
-                  <a:srgbClr val="475569"/>
+              <a:rPr lang="en-US" sz="750" i="1" dirty="0">
+                <a:solidFill>
+                  <a:srgbClr val="94A3B8"/>
                 </a:solidFill>
                 <a:latin typeface="Calibri" pitchFamily="34" charset="0"/>
                 <a:ea typeface="Calibri" pitchFamily="34" charset="-122"/>
                 <a:cs typeface="Calibri" pitchFamily="34" charset="-120"/>
               </a:rPr>
-              <a:t>act or process of</a:t>
-            </a:r>
-            <a:endParaRPr lang="en-US" sz="850" dirty="0"/>
-          </a:p>
-        </p:txBody>
-      </p:sp>
-      <p:sp>
-        <p:nvSpPr>
-          <p:cNvPr id="25" name="Shape 23"/>
-          <p:cNvSpPr/>
-          <p:nvPr/>
-        </p:nvSpPr>
-        <p:spPr>
-          <a:xfrm>
-            <a:off x="365760" y="3273552"/>
-            <a:ext cx="1371600" cy="658368"/>
-          </a:xfrm>
-          <a:prstGeom prst="rect">
-            <a:avLst>
-              <a:gd name="adj" fmla="val 8333"/>
-            </a:avLst>
-          </a:prstGeom>
-          <a:solidFill>
-            <a:srgbClr val="E2E8F0"/>
-          </a:solidFill>
-          <a:ln w="12700">
-            <a:solidFill>
-              <a:srgbClr val="E2E8F0"/>
-            </a:solidFill>
-            <a:prstDash val="solid"/>
-          </a:ln>
-        </p:spPr>
-      </p:sp>
-      <p:sp>
-        <p:nvSpPr>
-          <p:cNvPr id="26" name="Text 24"/>
-          <p:cNvSpPr/>
-          <p:nvPr/>
-        </p:nvSpPr>
-        <p:spPr>
-          <a:xfrm>
-            <a:off x="365760" y="3273552"/>
-            <a:ext cx="1371600" cy="658368"/>
-          </a:xfrm>
-          <a:prstGeom prst="rect">
-            <a:avLst/>
-          </a:prstGeom>
-          <a:noFill/>
-          <a:ln/>
-        </p:spPr>
-        <p:txBody>
-          <a:bodyPr wrap="square" lIns="0" tIns="0" rIns="0" bIns="0" rtlCol="0" anchor="ctr"/>
-          <a:lstStyle/>
-          <a:p>
-            <a:pPr algn="ctr" indent="0" marL="0">
-              <a:buNone/>
-            </a:pPr>
-            <a:r>
-              <a:rPr lang="en-US" sz="1100" b="1" dirty="0">
-                <a:solidFill>
-                  <a:srgbClr val="475569"/>
-                </a:solidFill>
-                <a:latin typeface="Trebuchet MS" pitchFamily="34" charset="0"/>
-                <a:ea typeface="Trebuchet MS" pitchFamily="34" charset="-122"/>
-                <a:cs typeface="Trebuchet MS" pitchFamily="34" charset="-120"/>
-              </a:rPr>
-              <a:t>Syllables</a:t>
-            </a:r>
-            <a:endParaRPr lang="en-US" sz="1100" dirty="0"/>
-          </a:p>
-        </p:txBody>
-      </p:sp>
-      <p:sp>
-        <p:nvSpPr>
-          <p:cNvPr id="27" name="Shape 25"/>
-          <p:cNvSpPr/>
-          <p:nvPr/>
-        </p:nvSpPr>
-        <p:spPr>
-          <a:xfrm>
-            <a:off x="1874520" y="3273552"/>
-            <a:ext cx="6903720" cy="658368"/>
-          </a:xfrm>
-          <a:prstGeom prst="rect">
-            <a:avLst>
-              <a:gd name="adj" fmla="val 8333"/>
-            </a:avLst>
-          </a:prstGeom>
-          <a:solidFill>
-            <a:srgbClr val="CCFBF1"/>
-          </a:solidFill>
-          <a:ln w="12700">
-            <a:solidFill>
-              <a:srgbClr val="0D9488"/>
-            </a:solidFill>
-            <a:prstDash val="solid"/>
-          </a:ln>
-        </p:spPr>
-      </p:sp>
-      <p:sp>
-        <p:nvSpPr>
-          <p:cNvPr id="28" name="Shape 26"/>
-          <p:cNvSpPr/>
-          <p:nvPr/>
-        </p:nvSpPr>
-        <p:spPr>
-          <a:xfrm>
-            <a:off x="1975104" y="3364992"/>
-            <a:ext cx="1554480" cy="475488"/>
-          </a:xfrm>
-          <a:prstGeom prst="rect">
-            <a:avLst>
-              <a:gd name="adj" fmla="val 9615"/>
-            </a:avLst>
-          </a:prstGeom>
-          <a:solidFill>
-            <a:srgbClr val="FFFFFF"/>
-          </a:solidFill>
-          <a:ln w="12700">
-            <a:solidFill>
-              <a:srgbClr val="0D9488"/>
-            </a:solidFill>
-            <a:prstDash val="solid"/>
-          </a:ln>
-        </p:spPr>
-      </p:sp>
-      <p:sp>
-        <p:nvSpPr>
-          <p:cNvPr id="29" name="Text 27"/>
-          <p:cNvSpPr/>
-          <p:nvPr/>
-        </p:nvSpPr>
-        <p:spPr>
-          <a:xfrm>
-            <a:off x="1975104" y="3364992"/>
-            <a:ext cx="1554480" cy="475488"/>
-          </a:xfrm>
-          <a:prstGeom prst="rect">
-            <a:avLst/>
-          </a:prstGeom>
-          <a:noFill/>
-          <a:ln/>
-        </p:spPr>
-        <p:txBody>
-          <a:bodyPr wrap="square" lIns="0" tIns="0" rIns="0" bIns="0" rtlCol="0" anchor="ctr"/>
-          <a:lstStyle/>
-          <a:p>
-            <a:pPr algn="ctr" indent="0" marL="0">
-              <a:buNone/>
-            </a:pPr>
-            <a:r>
-              <a:rPr lang="en-US" sz="1400" b="1" dirty="0">
-                <a:solidFill>
-                  <a:srgbClr val="0D9488"/>
-                </a:solidFill>
-                <a:latin typeface="Trebuchet MS" pitchFamily="34" charset="0"/>
-                <a:ea typeface="Trebuchet MS" pitchFamily="34" charset="-122"/>
-                <a:cs typeface="Trebuchet MS" pitchFamily="34" charset="-120"/>
-              </a:rPr>
-              <a:t>in</a:t>
-            </a:r>
-            <a:endParaRPr lang="en-US" sz="1400" dirty="0"/>
-          </a:p>
-        </p:txBody>
-      </p:sp>
-      <p:sp>
-        <p:nvSpPr>
-          <p:cNvPr id="30" name="Text 28"/>
-          <p:cNvSpPr/>
-          <p:nvPr/>
-        </p:nvSpPr>
-        <p:spPr>
-          <a:xfrm>
-            <a:off x="3529584" y="3364992"/>
-            <a:ext cx="73152" cy="475488"/>
-          </a:xfrm>
-          <a:prstGeom prst="rect">
-            <a:avLst/>
-          </a:prstGeom>
-          <a:noFill/>
-          <a:ln/>
-        </p:spPr>
-        <p:txBody>
-          <a:bodyPr wrap="square" lIns="0" tIns="0" rIns="0" bIns="0" rtlCol="0" anchor="ctr"/>
-          <a:lstStyle/>
-          <a:p>
-            <a:pPr algn="ctr" indent="0" marL="0">
-              <a:buNone/>
-            </a:pPr>
-            <a:r>
-              <a:rPr lang="en-US" sz="1600" b="1" dirty="0">
-                <a:solidFill>
-                  <a:srgbClr val="0D9488"/>
-                </a:solidFill>
-                <a:latin typeface="Trebuchet MS" pitchFamily="34" charset="0"/>
-                <a:ea typeface="Trebuchet MS" pitchFamily="34" charset="-122"/>
-                <a:cs typeface="Trebuchet MS" pitchFamily="34" charset="-120"/>
-              </a:rPr>
-              <a:t>·</a:t>
-            </a:r>
-            <a:endParaRPr lang="en-US" sz="1600" dirty="0"/>
-          </a:p>
-        </p:txBody>
-      </p:sp>
-      <p:sp>
-        <p:nvSpPr>
-          <p:cNvPr id="31" name="Shape 29"/>
-          <p:cNvSpPr/>
-          <p:nvPr/>
-        </p:nvSpPr>
-        <p:spPr>
-          <a:xfrm>
-            <a:off x="3602736" y="3364992"/>
-            <a:ext cx="1554480" cy="475488"/>
-          </a:xfrm>
-          <a:prstGeom prst="rect">
-            <a:avLst>
-              <a:gd name="adj" fmla="val 9615"/>
-            </a:avLst>
-          </a:prstGeom>
-          <a:solidFill>
-            <a:srgbClr val="FFFFFF"/>
-          </a:solidFill>
-          <a:ln w="12700">
-            <a:solidFill>
-              <a:srgbClr val="0D9488"/>
-            </a:solidFill>
-            <a:prstDash val="solid"/>
-          </a:ln>
-        </p:spPr>
-      </p:sp>
-      <p:sp>
-        <p:nvSpPr>
-          <p:cNvPr id="32" name="Text 30"/>
-          <p:cNvSpPr/>
-          <p:nvPr/>
-        </p:nvSpPr>
-        <p:spPr>
-          <a:xfrm>
-            <a:off x="3602736" y="3364992"/>
-            <a:ext cx="1554480" cy="475488"/>
-          </a:xfrm>
-          <a:prstGeom prst="rect">
-            <a:avLst/>
-          </a:prstGeom>
-          <a:noFill/>
-          <a:ln/>
-        </p:spPr>
-        <p:txBody>
-          <a:bodyPr wrap="square" lIns="0" tIns="0" rIns="0" bIns="0" rtlCol="0" anchor="ctr"/>
-          <a:lstStyle/>
-          <a:p>
-            <a:pPr algn="ctr" indent="0" marL="0">
-              <a:buNone/>
-            </a:pPr>
-            <a:r>
-              <a:rPr lang="en-US" sz="1400" b="1" dirty="0">
-                <a:solidFill>
-                  <a:srgbClr val="0D9488"/>
-                </a:solidFill>
-                <a:latin typeface="Trebuchet MS" pitchFamily="34" charset="0"/>
-                <a:ea typeface="Trebuchet MS" pitchFamily="34" charset="-122"/>
-                <a:cs typeface="Trebuchet MS" pitchFamily="34" charset="-120"/>
-              </a:rPr>
-              <a:t>ter</a:t>
-            </a:r>
-            <a:endParaRPr lang="en-US" sz="1400" dirty="0"/>
-          </a:p>
-        </p:txBody>
-      </p:sp>
-      <p:sp>
-        <p:nvSpPr>
-          <p:cNvPr id="33" name="Text 31"/>
-          <p:cNvSpPr/>
-          <p:nvPr/>
-        </p:nvSpPr>
-        <p:spPr>
-          <a:xfrm>
-            <a:off x="5157216" y="3364992"/>
-            <a:ext cx="73152" cy="475488"/>
-          </a:xfrm>
-          <a:prstGeom prst="rect">
-            <a:avLst/>
-          </a:prstGeom>
-          <a:noFill/>
-          <a:ln/>
-        </p:spPr>
-        <p:txBody>
-          <a:bodyPr wrap="square" lIns="0" tIns="0" rIns="0" bIns="0" rtlCol="0" anchor="ctr"/>
-          <a:lstStyle/>
-          <a:p>
-            <a:pPr algn="ctr" indent="0" marL="0">
-              <a:buNone/>
-            </a:pPr>
-            <a:r>
-              <a:rPr lang="en-US" sz="1600" b="1" dirty="0">
-                <a:solidFill>
-                  <a:srgbClr val="0D9488"/>
-                </a:solidFill>
-                <a:latin typeface="Trebuchet MS" pitchFamily="34" charset="0"/>
-                <a:ea typeface="Trebuchet MS" pitchFamily="34" charset="-122"/>
-                <a:cs typeface="Trebuchet MS" pitchFamily="34" charset="-120"/>
-              </a:rPr>
-              <a:t>·</a:t>
-            </a:r>
-            <a:endParaRPr lang="en-US" sz="1600" dirty="0"/>
-          </a:p>
-        </p:txBody>
-      </p:sp>
-      <p:sp>
-        <p:nvSpPr>
-          <p:cNvPr id="34" name="Shape 32"/>
-          <p:cNvSpPr/>
-          <p:nvPr/>
-        </p:nvSpPr>
-        <p:spPr>
-          <a:xfrm>
-            <a:off x="5230368" y="3364992"/>
-            <a:ext cx="1554480" cy="475488"/>
-          </a:xfrm>
-          <a:prstGeom prst="rect">
-            <a:avLst>
-              <a:gd name="adj" fmla="val 9615"/>
-            </a:avLst>
-          </a:prstGeom>
-          <a:solidFill>
-            <a:srgbClr val="FFFFFF"/>
-          </a:solidFill>
-          <a:ln w="12700">
-            <a:solidFill>
-              <a:srgbClr val="0D9488"/>
-            </a:solidFill>
-            <a:prstDash val="solid"/>
-          </a:ln>
-        </p:spPr>
-      </p:sp>
-      <p:sp>
-        <p:nvSpPr>
-          <p:cNvPr id="35" name="Text 33"/>
-          <p:cNvSpPr/>
-          <p:nvPr/>
-        </p:nvSpPr>
-        <p:spPr>
-          <a:xfrm>
-            <a:off x="5230368" y="3364992"/>
-            <a:ext cx="1554480" cy="475488"/>
-          </a:xfrm>
-          <a:prstGeom prst="rect">
-            <a:avLst/>
-          </a:prstGeom>
-          <a:noFill/>
-          <a:ln/>
-        </p:spPr>
-        <p:txBody>
-          <a:bodyPr wrap="square" lIns="0" tIns="0" rIns="0" bIns="0" rtlCol="0" anchor="ctr"/>
-          <a:lstStyle/>
-          <a:p>
-            <a:pPr algn="ctr" indent="0" marL="0">
-              <a:buNone/>
-            </a:pPr>
-            <a:r>
-              <a:rPr lang="en-US" sz="1400" b="1" dirty="0">
-                <a:solidFill>
-                  <a:srgbClr val="0D9488"/>
-                </a:solidFill>
-                <a:latin typeface="Trebuchet MS" pitchFamily="34" charset="0"/>
-                <a:ea typeface="Trebuchet MS" pitchFamily="34" charset="-122"/>
-                <a:cs typeface="Trebuchet MS" pitchFamily="34" charset="-120"/>
-              </a:rPr>
-              <a:t>ac</a:t>
-            </a:r>
-            <a:endParaRPr lang="en-US" sz="1400" dirty="0"/>
-          </a:p>
-        </p:txBody>
-      </p:sp>
-      <p:sp>
-        <p:nvSpPr>
-          <p:cNvPr id="36" name="Text 34"/>
-          <p:cNvSpPr/>
-          <p:nvPr/>
-        </p:nvSpPr>
-        <p:spPr>
-          <a:xfrm>
-            <a:off x="6784848" y="3364992"/>
-            <a:ext cx="73152" cy="475488"/>
-          </a:xfrm>
-          <a:prstGeom prst="rect">
-            <a:avLst/>
-          </a:prstGeom>
-          <a:noFill/>
-          <a:ln/>
-        </p:spPr>
-        <p:txBody>
-          <a:bodyPr wrap="square" lIns="0" tIns="0" rIns="0" bIns="0" rtlCol="0" anchor="ctr"/>
-          <a:lstStyle/>
-          <a:p>
-            <a:pPr algn="ctr" indent="0" marL="0">
-              <a:buNone/>
-            </a:pPr>
-            <a:r>
-              <a:rPr lang="en-US" sz="1600" b="1" dirty="0">
-                <a:solidFill>
-                  <a:srgbClr val="0D9488"/>
-                </a:solidFill>
-                <a:latin typeface="Trebuchet MS" pitchFamily="34" charset="0"/>
-                <a:ea typeface="Trebuchet MS" pitchFamily="34" charset="-122"/>
-                <a:cs typeface="Trebuchet MS" pitchFamily="34" charset="-120"/>
-              </a:rPr>
-              <a:t>·</a:t>
-            </a:r>
-            <a:endParaRPr lang="en-US" sz="1600" dirty="0"/>
-          </a:p>
-        </p:txBody>
-      </p:sp>
-      <p:sp>
-        <p:nvSpPr>
-          <p:cNvPr id="37" name="Shape 35"/>
-          <p:cNvSpPr/>
-          <p:nvPr/>
-        </p:nvSpPr>
-        <p:spPr>
-          <a:xfrm>
-            <a:off x="6858000" y="3364992"/>
-            <a:ext cx="1554480" cy="475488"/>
-          </a:xfrm>
-          <a:prstGeom prst="rect">
-            <a:avLst>
-              <a:gd name="adj" fmla="val 9615"/>
-            </a:avLst>
-          </a:prstGeom>
-          <a:solidFill>
-            <a:srgbClr val="FFFFFF"/>
-          </a:solidFill>
-          <a:ln w="12700">
-            <a:solidFill>
-              <a:srgbClr val="0D9488"/>
-            </a:solidFill>
-            <a:prstDash val="solid"/>
-          </a:ln>
-        </p:spPr>
-      </p:sp>
-      <p:sp>
-        <p:nvSpPr>
-          <p:cNvPr id="38" name="Text 36"/>
-          <p:cNvSpPr/>
-          <p:nvPr/>
-        </p:nvSpPr>
-        <p:spPr>
-          <a:xfrm>
-            <a:off x="6858000" y="3364992"/>
-            <a:ext cx="1554480" cy="475488"/>
-          </a:xfrm>
-          <a:prstGeom prst="rect">
-            <a:avLst/>
-          </a:prstGeom>
-          <a:noFill/>
-          <a:ln/>
-        </p:spPr>
-        <p:txBody>
-          <a:bodyPr wrap="square" lIns="0" tIns="0" rIns="0" bIns="0" rtlCol="0" anchor="ctr"/>
-          <a:lstStyle/>
-          <a:p>
-            <a:pPr algn="ctr" indent="0" marL="0">
-              <a:buNone/>
-            </a:pPr>
-            <a:r>
-              <a:rPr lang="en-US" sz="1400" b="1" dirty="0">
-                <a:solidFill>
-                  <a:srgbClr val="0D9488"/>
-                </a:solidFill>
-                <a:latin typeface="Trebuchet MS" pitchFamily="34" charset="0"/>
-                <a:ea typeface="Trebuchet MS" pitchFamily="34" charset="-122"/>
-                <a:cs typeface="Trebuchet MS" pitchFamily="34" charset="-120"/>
-              </a:rPr>
-              <a:t>tion</a:t>
-            </a:r>
-            <a:endParaRPr lang="en-US" sz="1400" dirty="0"/>
-          </a:p>
-        </p:txBody>
-      </p:sp>
-      <p:sp>
-        <p:nvSpPr>
-          <p:cNvPr id="39" name="Shape 37"/>
-          <p:cNvSpPr/>
-          <p:nvPr/>
-        </p:nvSpPr>
-        <p:spPr>
-          <a:xfrm>
-            <a:off x="365760" y="4096512"/>
-            <a:ext cx="1371600" cy="804672"/>
-          </a:xfrm>
-          <a:prstGeom prst="rect">
-            <a:avLst>
-              <a:gd name="adj" fmla="val 6818"/>
-            </a:avLst>
-          </a:prstGeom>
-          <a:solidFill>
-            <a:srgbClr val="E2E8F0"/>
-          </a:solidFill>
-          <a:ln w="12700">
-            <a:solidFill>
-              <a:srgbClr val="E2E8F0"/>
-            </a:solidFill>
-            <a:prstDash val="solid"/>
-          </a:ln>
-        </p:spPr>
-      </p:sp>
-      <p:sp>
-        <p:nvSpPr>
-          <p:cNvPr id="40" name="Text 38"/>
-          <p:cNvSpPr/>
-          <p:nvPr/>
-        </p:nvSpPr>
-        <p:spPr>
-          <a:xfrm>
-            <a:off x="365760" y="4096512"/>
-            <a:ext cx="1371600" cy="804672"/>
-          </a:xfrm>
-          <a:prstGeom prst="rect">
-            <a:avLst/>
-          </a:prstGeom>
-          <a:noFill/>
-          <a:ln/>
-        </p:spPr>
-        <p:txBody>
-          <a:bodyPr wrap="square" lIns="0" tIns="0" rIns="0" bIns="0" rtlCol="0" anchor="ctr"/>
-          <a:lstStyle/>
-          <a:p>
-            <a:pPr algn="ctr" indent="0" marL="0">
-              <a:buNone/>
-            </a:pPr>
-            <a:r>
-              <a:rPr lang="en-US" sz="1100" b="1" dirty="0">
-                <a:solidFill>
-                  <a:srgbClr val="475569"/>
-                </a:solidFill>
-                <a:latin typeface="Trebuchet MS" pitchFamily="34" charset="0"/>
-                <a:ea typeface="Trebuchet MS" pitchFamily="34" charset="-122"/>
-                <a:cs typeface="Trebuchet MS" pitchFamily="34" charset="-120"/>
-              </a:rPr>
-              <a:t>Phonemes</a:t>
-            </a:r>
-            <a:endParaRPr lang="en-US" sz="1100" dirty="0"/>
-          </a:p>
-        </p:txBody>
-      </p:sp>
-      <p:sp>
-        <p:nvSpPr>
-          <p:cNvPr id="41" name="Shape 39"/>
-          <p:cNvSpPr/>
-          <p:nvPr/>
-        </p:nvSpPr>
-        <p:spPr>
-          <a:xfrm>
-            <a:off x="1874520" y="4096512"/>
-            <a:ext cx="6903720" cy="658368"/>
-          </a:xfrm>
-          <a:prstGeom prst="rect">
-            <a:avLst>
-              <a:gd name="adj" fmla="val 8333"/>
-            </a:avLst>
-          </a:prstGeom>
-          <a:solidFill>
-            <a:srgbClr val="FCE7F3"/>
-          </a:solidFill>
-          <a:ln w="12700">
-            <a:solidFill>
-              <a:srgbClr val="DB2777"/>
-            </a:solidFill>
-            <a:prstDash val="solid"/>
-          </a:ln>
-        </p:spPr>
-      </p:sp>
-      <p:sp>
-        <p:nvSpPr>
-          <p:cNvPr id="42" name="Shape 40"/>
-          <p:cNvSpPr/>
-          <p:nvPr/>
-        </p:nvSpPr>
-        <p:spPr>
-          <a:xfrm>
-            <a:off x="1951828" y="4169664"/>
-            <a:ext cx="603504" cy="475488"/>
-          </a:xfrm>
-          <a:prstGeom prst="rect">
-            <a:avLst>
-              <a:gd name="adj" fmla="val 7692"/>
-            </a:avLst>
-          </a:prstGeom>
-          <a:solidFill>
-            <a:srgbClr val="FFFFFF"/>
-          </a:solidFill>
-          <a:ln w="12700">
-            <a:solidFill>
-              <a:srgbClr val="DB2777"/>
-            </a:solidFill>
-            <a:prstDash val="solid"/>
-          </a:ln>
-        </p:spPr>
-      </p:sp>
-      <p:sp>
-        <p:nvSpPr>
-          <p:cNvPr id="43" name="Text 41"/>
-          <p:cNvSpPr/>
-          <p:nvPr/>
-        </p:nvSpPr>
-        <p:spPr>
-          <a:xfrm>
-            <a:off x="1951828" y="4169664"/>
-            <a:ext cx="603504" cy="475488"/>
-          </a:xfrm>
-          <a:prstGeom prst="rect">
-            <a:avLst/>
-          </a:prstGeom>
-          <a:noFill/>
-          <a:ln/>
-        </p:spPr>
-        <p:txBody>
-          <a:bodyPr wrap="square" lIns="0" tIns="0" rIns="0" bIns="0" rtlCol="0" anchor="ctr"/>
-          <a:lstStyle/>
-          <a:p>
-            <a:pPr algn="ctr" indent="0" marL="0">
-              <a:buNone/>
-            </a:pPr>
-            <a:r>
-              <a:rPr lang="en-US" sz="900" b="1" dirty="0">
-                <a:solidFill>
-                  <a:srgbClr val="9D174D"/>
-                </a:solidFill>
-                <a:latin typeface="Trebuchet MS" pitchFamily="34" charset="0"/>
-                <a:ea typeface="Trebuchet MS" pitchFamily="34" charset="-122"/>
-                <a:cs typeface="Trebuchet MS" pitchFamily="34" charset="-120"/>
-              </a:rPr>
-              <a:t>i</a:t>
-            </a:r>
-            <a:endParaRPr lang="en-US" sz="900" dirty="0"/>
-          </a:p>
-        </p:txBody>
-      </p:sp>
-      <p:sp>
-        <p:nvSpPr>
-          <p:cNvPr id="44" name="Shape 42"/>
-          <p:cNvSpPr/>
-          <p:nvPr/>
-        </p:nvSpPr>
-        <p:spPr>
-          <a:xfrm>
-            <a:off x="2605209" y="4169664"/>
-            <a:ext cx="603504" cy="475488"/>
-          </a:xfrm>
-          <a:prstGeom prst="rect">
-            <a:avLst>
-              <a:gd name="adj" fmla="val 7692"/>
-            </a:avLst>
-          </a:prstGeom>
-          <a:solidFill>
-            <a:srgbClr val="FFFFFF"/>
-          </a:solidFill>
-          <a:ln w="12700">
-            <a:solidFill>
-              <a:srgbClr val="DB2777"/>
-            </a:solidFill>
-            <a:prstDash val="solid"/>
-          </a:ln>
-        </p:spPr>
-      </p:sp>
-      <p:sp>
-        <p:nvSpPr>
-          <p:cNvPr id="45" name="Text 43"/>
-          <p:cNvSpPr/>
-          <p:nvPr/>
-        </p:nvSpPr>
-        <p:spPr>
-          <a:xfrm>
-            <a:off x="2605209" y="4169664"/>
-            <a:ext cx="603504" cy="475488"/>
-          </a:xfrm>
-          <a:prstGeom prst="rect">
-            <a:avLst/>
-          </a:prstGeom>
-          <a:noFill/>
-          <a:ln/>
-        </p:spPr>
-        <p:txBody>
-          <a:bodyPr wrap="square" lIns="0" tIns="0" rIns="0" bIns="0" rtlCol="0" anchor="ctr"/>
-          <a:lstStyle/>
-          <a:p>
-            <a:pPr algn="ctr" indent="0" marL="0">
-              <a:buNone/>
-            </a:pPr>
-            <a:r>
-              <a:rPr lang="en-US" sz="900" b="1" dirty="0">
-                <a:solidFill>
-                  <a:srgbClr val="9D174D"/>
-                </a:solidFill>
-                <a:latin typeface="Trebuchet MS" pitchFamily="34" charset="0"/>
-                <a:ea typeface="Trebuchet MS" pitchFamily="34" charset="-122"/>
-                <a:cs typeface="Trebuchet MS" pitchFamily="34" charset="-120"/>
-              </a:rPr>
-              <a:t>n</a:t>
-            </a:r>
-            <a:endParaRPr lang="en-US" sz="900" dirty="0"/>
-          </a:p>
-        </p:txBody>
-      </p:sp>
-      <p:sp>
-        <p:nvSpPr>
-          <p:cNvPr id="46" name="Shape 44"/>
-          <p:cNvSpPr/>
-          <p:nvPr/>
-        </p:nvSpPr>
-        <p:spPr>
-          <a:xfrm>
-            <a:off x="3258589" y="4169664"/>
-            <a:ext cx="603504" cy="475488"/>
-          </a:xfrm>
-          <a:prstGeom prst="rect">
-            <a:avLst>
-              <a:gd name="adj" fmla="val 7692"/>
-            </a:avLst>
-          </a:prstGeom>
-          <a:solidFill>
-            <a:srgbClr val="FFFFFF"/>
-          </a:solidFill>
-          <a:ln w="12700">
-            <a:solidFill>
-              <a:srgbClr val="DB2777"/>
-            </a:solidFill>
-            <a:prstDash val="solid"/>
-          </a:ln>
-        </p:spPr>
-      </p:sp>
-      <p:sp>
-        <p:nvSpPr>
-          <p:cNvPr id="47" name="Text 45"/>
-          <p:cNvSpPr/>
-          <p:nvPr/>
-        </p:nvSpPr>
-        <p:spPr>
-          <a:xfrm>
-            <a:off x="3258589" y="4169664"/>
-            <a:ext cx="603504" cy="475488"/>
-          </a:xfrm>
-          <a:prstGeom prst="rect">
-            <a:avLst/>
-          </a:prstGeom>
-          <a:noFill/>
-          <a:ln/>
-        </p:spPr>
-        <p:txBody>
-          <a:bodyPr wrap="square" lIns="0" tIns="0" rIns="0" bIns="0" rtlCol="0" anchor="ctr"/>
-          <a:lstStyle/>
-          <a:p>
-            <a:pPr algn="ctr" indent="0" marL="0">
-              <a:buNone/>
-            </a:pPr>
-            <a:r>
-              <a:rPr lang="en-US" sz="900" b="1" dirty="0">
-                <a:solidFill>
-                  <a:srgbClr val="9D174D"/>
-                </a:solidFill>
-                <a:latin typeface="Trebuchet MS" pitchFamily="34" charset="0"/>
-                <a:ea typeface="Trebuchet MS" pitchFamily="34" charset="-122"/>
-                <a:cs typeface="Trebuchet MS" pitchFamily="34" charset="-120"/>
-              </a:rPr>
-              <a:t>t</a:t>
-            </a:r>
-            <a:endParaRPr lang="en-US" sz="900" dirty="0"/>
-          </a:p>
-        </p:txBody>
-      </p:sp>
-      <p:sp>
-        <p:nvSpPr>
-          <p:cNvPr id="48" name="Shape 46"/>
-          <p:cNvSpPr/>
-          <p:nvPr/>
-        </p:nvSpPr>
-        <p:spPr>
-          <a:xfrm>
-            <a:off x="3911969" y="4169664"/>
-            <a:ext cx="603504" cy="475488"/>
-          </a:xfrm>
-          <a:prstGeom prst="rect">
-            <a:avLst>
-              <a:gd name="adj" fmla="val 7692"/>
-            </a:avLst>
-          </a:prstGeom>
-          <a:solidFill>
-            <a:srgbClr val="FFFFFF"/>
-          </a:solidFill>
-          <a:ln w="12700">
-            <a:solidFill>
-              <a:srgbClr val="DB2777"/>
-            </a:solidFill>
-            <a:prstDash val="solid"/>
-          </a:ln>
-        </p:spPr>
-      </p:sp>
-      <p:sp>
-        <p:nvSpPr>
-          <p:cNvPr id="49" name="Text 47"/>
-          <p:cNvSpPr/>
-          <p:nvPr/>
-        </p:nvSpPr>
-        <p:spPr>
-          <a:xfrm>
-            <a:off x="3911969" y="4169664"/>
-            <a:ext cx="603504" cy="475488"/>
-          </a:xfrm>
-          <a:prstGeom prst="rect">
-            <a:avLst/>
-          </a:prstGeom>
-          <a:noFill/>
-          <a:ln/>
-        </p:spPr>
-        <p:txBody>
-          <a:bodyPr wrap="square" lIns="0" tIns="0" rIns="0" bIns="0" rtlCol="0" anchor="ctr"/>
-          <a:lstStyle/>
-          <a:p>
-            <a:pPr algn="ctr" indent="0" marL="0">
-              <a:buNone/>
-            </a:pPr>
-            <a:r>
-              <a:rPr lang="en-US" sz="900" b="1" dirty="0">
-                <a:solidFill>
-                  <a:srgbClr val="9D174D"/>
-                </a:solidFill>
-                <a:latin typeface="Trebuchet MS" pitchFamily="34" charset="0"/>
-                <a:ea typeface="Trebuchet MS" pitchFamily="34" charset="-122"/>
-                <a:cs typeface="Trebuchet MS" pitchFamily="34" charset="-120"/>
-              </a:rPr>
-              <a:t>er</a:t>
-            </a:r>
-            <a:endParaRPr lang="en-US" sz="900" dirty="0"/>
-          </a:p>
-        </p:txBody>
-      </p:sp>
-      <p:sp>
-        <p:nvSpPr>
-          <p:cNvPr id="50" name="Shape 48"/>
-          <p:cNvSpPr/>
-          <p:nvPr/>
-        </p:nvSpPr>
-        <p:spPr>
-          <a:xfrm>
-            <a:off x="4565350" y="4169664"/>
-            <a:ext cx="603504" cy="475488"/>
-          </a:xfrm>
-          <a:prstGeom prst="rect">
-            <a:avLst>
-              <a:gd name="adj" fmla="val 7692"/>
-            </a:avLst>
-          </a:prstGeom>
-          <a:solidFill>
-            <a:srgbClr val="FFFFFF"/>
-          </a:solidFill>
-          <a:ln w="12700">
-            <a:solidFill>
-              <a:srgbClr val="DB2777"/>
-            </a:solidFill>
-            <a:prstDash val="solid"/>
-          </a:ln>
-        </p:spPr>
-      </p:sp>
-      <p:sp>
-        <p:nvSpPr>
-          <p:cNvPr id="51" name="Text 49"/>
-          <p:cNvSpPr/>
-          <p:nvPr/>
-        </p:nvSpPr>
-        <p:spPr>
-          <a:xfrm>
-            <a:off x="4565350" y="4169664"/>
-            <a:ext cx="603504" cy="475488"/>
-          </a:xfrm>
-          <a:prstGeom prst="rect">
-            <a:avLst/>
-          </a:prstGeom>
-          <a:noFill/>
-          <a:ln/>
-        </p:spPr>
-        <p:txBody>
-          <a:bodyPr wrap="square" lIns="0" tIns="0" rIns="0" bIns="0" rtlCol="0" anchor="ctr"/>
-          <a:lstStyle/>
-          <a:p>
-            <a:pPr algn="ctr" indent="0" marL="0">
-              <a:buNone/>
-            </a:pPr>
-            <a:r>
-              <a:rPr lang="en-US" sz="900" b="1" dirty="0">
-                <a:solidFill>
-                  <a:srgbClr val="9D174D"/>
-                </a:solidFill>
-                <a:latin typeface="Trebuchet MS" pitchFamily="34" charset="0"/>
-                <a:ea typeface="Trebuchet MS" pitchFamily="34" charset="-122"/>
-                <a:cs typeface="Trebuchet MS" pitchFamily="34" charset="-120"/>
-              </a:rPr>
-              <a:t>a</a:t>
-            </a:r>
-            <a:endParaRPr lang="en-US" sz="900" dirty="0"/>
-          </a:p>
-        </p:txBody>
-      </p:sp>
-      <p:sp>
-        <p:nvSpPr>
-          <p:cNvPr id="52" name="Shape 50"/>
-          <p:cNvSpPr/>
-          <p:nvPr/>
-        </p:nvSpPr>
-        <p:spPr>
-          <a:xfrm>
-            <a:off x="5218730" y="4169664"/>
-            <a:ext cx="603504" cy="475488"/>
-          </a:xfrm>
-          <a:prstGeom prst="rect">
-            <a:avLst>
-              <a:gd name="adj" fmla="val 7692"/>
-            </a:avLst>
-          </a:prstGeom>
-          <a:solidFill>
-            <a:srgbClr val="FFFFFF"/>
-          </a:solidFill>
-          <a:ln w="12700">
-            <a:solidFill>
-              <a:srgbClr val="DB2777"/>
-            </a:solidFill>
-            <a:prstDash val="solid"/>
-          </a:ln>
-        </p:spPr>
-      </p:sp>
-      <p:sp>
-        <p:nvSpPr>
-          <p:cNvPr id="53" name="Text 51"/>
-          <p:cNvSpPr/>
-          <p:nvPr/>
-        </p:nvSpPr>
-        <p:spPr>
-          <a:xfrm>
-            <a:off x="5218730" y="4169664"/>
-            <a:ext cx="603504" cy="475488"/>
-          </a:xfrm>
-          <a:prstGeom prst="rect">
-            <a:avLst/>
-          </a:prstGeom>
-          <a:noFill/>
-          <a:ln/>
-        </p:spPr>
-        <p:txBody>
-          <a:bodyPr wrap="square" lIns="0" tIns="0" rIns="0" bIns="0" rtlCol="0" anchor="ctr"/>
-          <a:lstStyle/>
-          <a:p>
-            <a:pPr algn="ctr" indent="0" marL="0">
-              <a:buNone/>
-            </a:pPr>
-            <a:r>
-              <a:rPr lang="en-US" sz="900" b="1" dirty="0">
-                <a:solidFill>
-                  <a:srgbClr val="9D174D"/>
-                </a:solidFill>
-                <a:latin typeface="Trebuchet MS" pitchFamily="34" charset="0"/>
-                <a:ea typeface="Trebuchet MS" pitchFamily="34" charset="-122"/>
-                <a:cs typeface="Trebuchet MS" pitchFamily="34" charset="-120"/>
-              </a:rPr>
-              <a:t>c</a:t>
-            </a:r>
-            <a:endParaRPr lang="en-US" sz="900" dirty="0"/>
-          </a:p>
-        </p:txBody>
-      </p:sp>
-      <p:sp>
-        <p:nvSpPr>
-          <p:cNvPr id="54" name="Shape 52"/>
-          <p:cNvSpPr/>
-          <p:nvPr/>
-        </p:nvSpPr>
-        <p:spPr>
-          <a:xfrm>
-            <a:off x="5872111" y="4169664"/>
-            <a:ext cx="603504" cy="475488"/>
-          </a:xfrm>
-          <a:prstGeom prst="rect">
-            <a:avLst>
-              <a:gd name="adj" fmla="val 7692"/>
-            </a:avLst>
-          </a:prstGeom>
-          <a:solidFill>
-            <a:srgbClr val="FFFFFF"/>
-          </a:solidFill>
-          <a:ln w="12700">
-            <a:solidFill>
-              <a:srgbClr val="DB2777"/>
-            </a:solidFill>
-            <a:prstDash val="solid"/>
-          </a:ln>
-        </p:spPr>
-      </p:sp>
-      <p:sp>
-        <p:nvSpPr>
-          <p:cNvPr id="55" name="Text 53"/>
-          <p:cNvSpPr/>
-          <p:nvPr/>
-        </p:nvSpPr>
-        <p:spPr>
-          <a:xfrm>
-            <a:off x="5872111" y="4169664"/>
-            <a:ext cx="603504" cy="475488"/>
-          </a:xfrm>
-          <a:prstGeom prst="rect">
-            <a:avLst/>
-          </a:prstGeom>
-          <a:noFill/>
-          <a:ln/>
-        </p:spPr>
-        <p:txBody>
-          <a:bodyPr wrap="square" lIns="0" tIns="0" rIns="0" bIns="0" rtlCol="0" anchor="ctr"/>
-          <a:lstStyle/>
-          <a:p>
-            <a:pPr algn="ctr" indent="0" marL="0">
-              <a:buNone/>
-            </a:pPr>
-            <a:r>
-              <a:rPr lang="en-US" sz="900" b="1" dirty="0">
-                <a:solidFill>
-                  <a:srgbClr val="9D174D"/>
-                </a:solidFill>
-                <a:latin typeface="Trebuchet MS" pitchFamily="34" charset="0"/>
-                <a:ea typeface="Trebuchet MS" pitchFamily="34" charset="-122"/>
-                <a:cs typeface="Trebuchet MS" pitchFamily="34" charset="-120"/>
-              </a:rPr>
-              <a:t>t</a:t>
-            </a:r>
-            <a:endParaRPr lang="en-US" sz="900" dirty="0"/>
-          </a:p>
-        </p:txBody>
-      </p:sp>
-      <p:sp>
-        <p:nvSpPr>
-          <p:cNvPr id="56" name="Shape 54"/>
-          <p:cNvSpPr/>
-          <p:nvPr/>
-        </p:nvSpPr>
-        <p:spPr>
-          <a:xfrm>
-            <a:off x="6525491" y="4169664"/>
-            <a:ext cx="603504" cy="475488"/>
-          </a:xfrm>
-          <a:prstGeom prst="rect">
-            <a:avLst>
-              <a:gd name="adj" fmla="val 7692"/>
-            </a:avLst>
-          </a:prstGeom>
-          <a:solidFill>
-            <a:srgbClr val="FFFFFF"/>
-          </a:solidFill>
-          <a:ln w="12700">
-            <a:solidFill>
-              <a:srgbClr val="DB2777"/>
-            </a:solidFill>
-            <a:prstDash val="solid"/>
-          </a:ln>
-        </p:spPr>
-      </p:sp>
-      <p:sp>
-        <p:nvSpPr>
-          <p:cNvPr id="57" name="Text 55"/>
-          <p:cNvSpPr/>
-          <p:nvPr/>
-        </p:nvSpPr>
-        <p:spPr>
-          <a:xfrm>
-            <a:off x="6525491" y="4169664"/>
-            <a:ext cx="603504" cy="475488"/>
-          </a:xfrm>
-          <a:prstGeom prst="rect">
-            <a:avLst/>
-          </a:prstGeom>
-          <a:noFill/>
-          <a:ln/>
-        </p:spPr>
-        <p:txBody>
-          <a:bodyPr wrap="square" lIns="0" tIns="0" rIns="0" bIns="0" rtlCol="0" anchor="ctr"/>
-          <a:lstStyle/>
-          <a:p>
-            <a:pPr algn="ctr" indent="0" marL="0">
-              <a:buNone/>
-            </a:pPr>
-            <a:r>
-              <a:rPr lang="en-US" sz="900" b="1" dirty="0">
-                <a:solidFill>
-                  <a:srgbClr val="9D174D"/>
-                </a:solidFill>
-                <a:latin typeface="Trebuchet MS" pitchFamily="34" charset="0"/>
-                <a:ea typeface="Trebuchet MS" pitchFamily="34" charset="-122"/>
-                <a:cs typeface="Trebuchet MS" pitchFamily="34" charset="-120"/>
-              </a:rPr>
-              <a:t>i</a:t>
-            </a:r>
-            <a:endParaRPr lang="en-US" sz="900" dirty="0"/>
-          </a:p>
-        </p:txBody>
-      </p:sp>
-      <p:sp>
-        <p:nvSpPr>
-          <p:cNvPr id="58" name="Shape 56"/>
-          <p:cNvSpPr/>
-          <p:nvPr/>
-        </p:nvSpPr>
-        <p:spPr>
-          <a:xfrm>
-            <a:off x="7178871" y="4169664"/>
-            <a:ext cx="603504" cy="475488"/>
-          </a:xfrm>
-          <a:prstGeom prst="rect">
-            <a:avLst>
-              <a:gd name="adj" fmla="val 7692"/>
-            </a:avLst>
-          </a:prstGeom>
-          <a:solidFill>
-            <a:srgbClr val="FFFFFF"/>
-          </a:solidFill>
-          <a:ln w="12700">
-            <a:solidFill>
-              <a:srgbClr val="DB2777"/>
-            </a:solidFill>
-            <a:prstDash val="solid"/>
-          </a:ln>
-        </p:spPr>
-      </p:sp>
-      <p:sp>
-        <p:nvSpPr>
-          <p:cNvPr id="59" name="Text 57"/>
-          <p:cNvSpPr/>
-          <p:nvPr/>
-        </p:nvSpPr>
-        <p:spPr>
-          <a:xfrm>
-            <a:off x="7178871" y="4169664"/>
-            <a:ext cx="603504" cy="475488"/>
-          </a:xfrm>
-          <a:prstGeom prst="rect">
-            <a:avLst/>
-          </a:prstGeom>
-          <a:noFill/>
-          <a:ln/>
-        </p:spPr>
-        <p:txBody>
-          <a:bodyPr wrap="square" lIns="0" tIns="0" rIns="0" bIns="0" rtlCol="0" anchor="ctr"/>
-          <a:lstStyle/>
-          <a:p>
-            <a:pPr algn="ctr" indent="0" marL="0">
-              <a:buNone/>
-            </a:pPr>
-            <a:r>
-              <a:rPr lang="en-US" sz="900" b="1" dirty="0">
-                <a:solidFill>
-                  <a:srgbClr val="9D174D"/>
-                </a:solidFill>
-                <a:latin typeface="Trebuchet MS" pitchFamily="34" charset="0"/>
-                <a:ea typeface="Trebuchet MS" pitchFamily="34" charset="-122"/>
-                <a:cs typeface="Trebuchet MS" pitchFamily="34" charset="-120"/>
-              </a:rPr>
-              <a:t>o</a:t>
-            </a:r>
-            <a:endParaRPr lang="en-US" sz="900" dirty="0"/>
-          </a:p>
-        </p:txBody>
-      </p:sp>
-      <p:sp>
-        <p:nvSpPr>
-          <p:cNvPr id="60" name="Shape 58"/>
-          <p:cNvSpPr/>
-          <p:nvPr/>
-        </p:nvSpPr>
-        <p:spPr>
-          <a:xfrm>
-            <a:off x="7832252" y="4169664"/>
-            <a:ext cx="603504" cy="475488"/>
-          </a:xfrm>
-          <a:prstGeom prst="rect">
-            <a:avLst>
-              <a:gd name="adj" fmla="val 7692"/>
-            </a:avLst>
-          </a:prstGeom>
-          <a:solidFill>
-            <a:srgbClr val="FFFFFF"/>
-          </a:solidFill>
-          <a:ln w="12700">
-            <a:solidFill>
-              <a:srgbClr val="DB2777"/>
-            </a:solidFill>
-            <a:prstDash val="solid"/>
-          </a:ln>
-        </p:spPr>
-      </p:sp>
-      <p:sp>
-        <p:nvSpPr>
-          <p:cNvPr id="61" name="Text 59"/>
-          <p:cNvSpPr/>
-          <p:nvPr/>
-        </p:nvSpPr>
-        <p:spPr>
-          <a:xfrm>
-            <a:off x="7832252" y="4169664"/>
-            <a:ext cx="603504" cy="475488"/>
-          </a:xfrm>
-          <a:prstGeom prst="rect">
-            <a:avLst/>
-          </a:prstGeom>
-          <a:noFill/>
-          <a:ln/>
-        </p:spPr>
-        <p:txBody>
-          <a:bodyPr wrap="square" lIns="0" tIns="0" rIns="0" bIns="0" rtlCol="0" anchor="ctr"/>
-          <a:lstStyle/>
-          <a:p>
-            <a:pPr algn="ctr" indent="0" marL="0">
-              <a:buNone/>
-            </a:pPr>
-            <a:r>
-              <a:rPr lang="en-US" sz="900" b="1" dirty="0">
-                <a:solidFill>
-                  <a:srgbClr val="9D174D"/>
-                </a:solidFill>
-                <a:latin typeface="Trebuchet MS" pitchFamily="34" charset="0"/>
-                <a:ea typeface="Trebuchet MS" pitchFamily="34" charset="-122"/>
-                <a:cs typeface="Trebuchet MS" pitchFamily="34" charset="-120"/>
-              </a:rPr>
-              <a:t>n</a:t>
-            </a:r>
-            <a:endParaRPr lang="en-US" sz="900" dirty="0"/>
+              <a:t>/v/</a:t>
+            </a:r>
+            <a:endParaRPr lang="en-US" sz="750" dirty="0"/>
           </a:p>
         </p:txBody>
       </p:sp>
@@ -23020,7 +22354,7 @@
                 <a:ea typeface="Trebuchet MS" pitchFamily="34" charset="-122"/>
                 <a:cs typeface="Trebuchet MS" pitchFamily="34" charset="-120"/>
               </a:rPr>
-              <a:t>active</a:t>
+              <a:t>interact</a:t>
             </a:r>
             <a:endParaRPr lang="en-US" sz="2800" dirty="0"/>
           </a:p>
@@ -23847,7 +23181,7 @@
                 <a:ea typeface="Trebuchet MS" pitchFamily="34" charset="-122"/>
                 <a:cs typeface="Trebuchet MS" pitchFamily="34" charset="-120"/>
               </a:rPr>
-              <a:t>active</a:t>
+              <a:t>interact</a:t>
             </a:r>
             <a:endParaRPr lang="en-US" sz="2800" dirty="0"/>
           </a:p>
@@ -23936,11 +23270,11 @@
             </a:avLst>
           </a:prstGeom>
           <a:solidFill>
-            <a:srgbClr val="CCFBF1"/>
+            <a:srgbClr val="DDD6FE"/>
           </a:solidFill>
           <a:ln w="19050">
             <a:solidFill>
-              <a:srgbClr val="0D9488"/>
+              <a:srgbClr val="7C3AED"/>
             </a:solidFill>
             <a:prstDash val="solid"/>
           </a:ln>
@@ -23980,13 +23314,13 @@
             <a:r>
               <a:rPr lang="en-US" sz="1300" b="1" dirty="0">
                 <a:solidFill>
-                  <a:srgbClr val="0F766E"/>
+                  <a:srgbClr val="4C1D95"/>
                 </a:solidFill>
                 <a:latin typeface="Trebuchet MS" pitchFamily="34" charset="0"/>
                 <a:ea typeface="Trebuchet MS" pitchFamily="34" charset="-122"/>
                 <a:cs typeface="Trebuchet MS" pitchFamily="34" charset="-120"/>
               </a:rPr>
-              <a:t>act</a:t>
+              <a:t>inter</a:t>
             </a:r>
             <a:endParaRPr lang="en-US" sz="1300" dirty="0"/>
           </a:p>
@@ -24025,7 +23359,7 @@
                 <a:ea typeface="Calibri" pitchFamily="34" charset="-122"/>
                 <a:cs typeface="Calibri" pitchFamily="34" charset="-120"/>
               </a:rPr>
-              <a:t>to do or perform</a:t>
+              <a:t>between or among</a:t>
             </a:r>
             <a:endParaRPr lang="en-US" sz="850" dirty="0"/>
           </a:p>
@@ -24048,11 +23382,11 @@
             </a:avLst>
           </a:prstGeom>
           <a:solidFill>
-            <a:srgbClr val="FCE7F3"/>
+            <a:srgbClr val="CCFBF1"/>
           </a:solidFill>
           <a:ln w="19050">
             <a:solidFill>
-              <a:srgbClr val="DB2777"/>
+              <a:srgbClr val="0D9488"/>
             </a:solidFill>
             <a:prstDash val="solid"/>
           </a:ln>
@@ -24092,13 +23426,13 @@
             <a:r>
               <a:rPr lang="en-US" sz="1300" b="1" dirty="0">
                 <a:solidFill>
-                  <a:srgbClr val="9D174D"/>
+                  <a:srgbClr val="0F766E"/>
                 </a:solidFill>
                 <a:latin typeface="Trebuchet MS" pitchFamily="34" charset="0"/>
                 <a:ea typeface="Trebuchet MS" pitchFamily="34" charset="-122"/>
                 <a:cs typeface="Trebuchet MS" pitchFamily="34" charset="-120"/>
               </a:rPr>
-              <a:t>ive</a:t>
+              <a:t>act</a:t>
             </a:r>
             <a:endParaRPr lang="en-US" sz="1300" dirty="0"/>
           </a:p>
@@ -24137,7 +23471,7 @@
                 <a:ea typeface="Calibri" pitchFamily="34" charset="-122"/>
                 <a:cs typeface="Calibri" pitchFamily="34" charset="-120"/>
               </a:rPr>
-              <a:t>having the quality of</a:t>
+              <a:t>to do or perform</a:t>
             </a:r>
             <a:endParaRPr lang="en-US" sz="850" dirty="0"/>
           </a:p>
@@ -25551,7 +24885,7 @@
                 <a:ea typeface="Trebuchet MS" pitchFamily="34" charset="-122"/>
                 <a:cs typeface="Trebuchet MS" pitchFamily="34" charset="-120"/>
               </a:rPr>
-              <a:t>active</a:t>
+              <a:t>interact</a:t>
             </a:r>
             <a:endParaRPr lang="en-US" sz="2800" dirty="0"/>
           </a:p>
@@ -25640,11 +24974,11 @@
             </a:avLst>
           </a:prstGeom>
           <a:solidFill>
-            <a:srgbClr val="CCFBF1"/>
+            <a:srgbClr val="DDD6FE"/>
           </a:solidFill>
           <a:ln w="19050">
             <a:solidFill>
-              <a:srgbClr val="0D9488"/>
+              <a:srgbClr val="7C3AED"/>
             </a:solidFill>
             <a:prstDash val="solid"/>
           </a:ln>
@@ -25684,13 +25018,13 @@
             <a:r>
               <a:rPr lang="en-US" sz="1300" b="1" dirty="0">
                 <a:solidFill>
-                  <a:srgbClr val="0F766E"/>
+                  <a:srgbClr val="4C1D95"/>
                 </a:solidFill>
                 <a:latin typeface="Trebuchet MS" pitchFamily="34" charset="0"/>
                 <a:ea typeface="Trebuchet MS" pitchFamily="34" charset="-122"/>
                 <a:cs typeface="Trebuchet MS" pitchFamily="34" charset="-120"/>
               </a:rPr>
-              <a:t>act</a:t>
+              <a:t>inter</a:t>
             </a:r>
             <a:endParaRPr lang="en-US" sz="1300" dirty="0"/>
           </a:p>
@@ -25729,7 +25063,7 @@
                 <a:ea typeface="Calibri" pitchFamily="34" charset="-122"/>
                 <a:cs typeface="Calibri" pitchFamily="34" charset="-120"/>
               </a:rPr>
-              <a:t>to do or perform</a:t>
+              <a:t>between or among</a:t>
             </a:r>
             <a:endParaRPr lang="en-US" sz="850" dirty="0"/>
           </a:p>
@@ -25752,11 +25086,11 @@
             </a:avLst>
           </a:prstGeom>
           <a:solidFill>
-            <a:srgbClr val="FCE7F3"/>
+            <a:srgbClr val="CCFBF1"/>
           </a:solidFill>
           <a:ln w="19050">
             <a:solidFill>
-              <a:srgbClr val="DB2777"/>
+              <a:srgbClr val="0D9488"/>
             </a:solidFill>
             <a:prstDash val="solid"/>
           </a:ln>
@@ -25796,13 +25130,13 @@
             <a:r>
               <a:rPr lang="en-US" sz="1300" b="1" dirty="0">
                 <a:solidFill>
-                  <a:srgbClr val="9D174D"/>
+                  <a:srgbClr val="0F766E"/>
                 </a:solidFill>
                 <a:latin typeface="Trebuchet MS" pitchFamily="34" charset="0"/>
                 <a:ea typeface="Trebuchet MS" pitchFamily="34" charset="-122"/>
                 <a:cs typeface="Trebuchet MS" pitchFamily="34" charset="-120"/>
               </a:rPr>
-              <a:t>ive</a:t>
+              <a:t>act</a:t>
             </a:r>
             <a:endParaRPr lang="en-US" sz="1300" dirty="0"/>
           </a:p>
@@ -25841,7 +25175,7 @@
                 <a:ea typeface="Calibri" pitchFamily="34" charset="-122"/>
                 <a:cs typeface="Calibri" pitchFamily="34" charset="-120"/>
               </a:rPr>
-              <a:t>having the quality of</a:t>
+              <a:t>to do or perform</a:t>
             </a:r>
             <a:endParaRPr lang="en-US" sz="850" dirty="0"/>
           </a:p>
@@ -25948,7 +25282,7 @@
         </p:nvSpPr>
         <p:spPr>
           <a:xfrm>
-            <a:off x="2999232" y="3364992"/>
+            <a:off x="2313432" y="3364992"/>
             <a:ext cx="1645920" cy="475488"/>
           </a:xfrm>
           <a:prstGeom prst="rect">
@@ -25975,7 +25309,7 @@
         </p:nvSpPr>
         <p:spPr>
           <a:xfrm>
-            <a:off x="2999232" y="3364992"/>
+            <a:off x="2313432" y="3364992"/>
             <a:ext cx="1645920" cy="475488"/>
           </a:xfrm>
           <a:prstGeom prst="rect">
@@ -26000,7 +25334,7 @@
                 <a:ea typeface="Trebuchet MS" pitchFamily="34" charset="-122"/>
                 <a:cs typeface="Trebuchet MS" pitchFamily="34" charset="-120"/>
               </a:rPr>
-              <a:t>ac</a:t>
+              <a:t>in</a:t>
             </a:r>
             <a:endParaRPr lang="en-US" sz="1400" dirty="0"/>
           </a:p>
@@ -26014,8 +25348,8 @@
         </p:nvSpPr>
         <p:spPr>
           <a:xfrm>
-            <a:off x="4645152" y="3364992"/>
-            <a:ext cx="1097280" cy="475488"/>
+            <a:off x="3959352" y="3364992"/>
+            <a:ext cx="411480" cy="475488"/>
           </a:xfrm>
           <a:prstGeom prst="rect">
             <a:avLst/>
@@ -26053,7 +25387,7 @@
         </p:nvSpPr>
         <p:spPr>
           <a:xfrm>
-            <a:off x="5742432" y="3364992"/>
+            <a:off x="4370832" y="3364992"/>
             <a:ext cx="1645920" cy="475488"/>
           </a:xfrm>
           <a:prstGeom prst="rect">
@@ -26080,7 +25414,7 @@
         </p:nvSpPr>
         <p:spPr>
           <a:xfrm>
-            <a:off x="5742432" y="3364992"/>
+            <a:off x="4370832" y="3364992"/>
             <a:ext cx="1645920" cy="475488"/>
           </a:xfrm>
           <a:prstGeom prst="rect">
@@ -26105,7 +25439,7 @@
                 <a:ea typeface="Trebuchet MS" pitchFamily="34" charset="-122"/>
                 <a:cs typeface="Trebuchet MS" pitchFamily="34" charset="-120"/>
               </a:rPr>
-              <a:t>tive</a:t>
+              <a:t>ter</a:t>
             </a:r>
             <a:endParaRPr lang="en-US" sz="1400" dirty="0"/>
           </a:p>
@@ -26113,7 +25447,112 @@
       </p:sp>
       <p:sp>
         <p:nvSpPr>
-          <p:cNvPr id="30" name="Shape 28"/>
+          <p:cNvPr id="30" name="Text 28"/>
+          <p:cNvSpPr/>
+          <p:nvPr/>
+        </p:nvSpPr>
+        <p:spPr>
+          <a:xfrm>
+            <a:off x="6016752" y="3364992"/>
+            <a:ext cx="411480" cy="475488"/>
+          </a:xfrm>
+          <a:prstGeom prst="rect">
+            <a:avLst/>
+          </a:prstGeom>
+          <a:noFill/>
+          <a:ln/>
+        </p:spPr>
+        <p:txBody>
+          <a:bodyPr wrap="square" lIns="0" tIns="0" rIns="0" bIns="0" rtlCol="0" anchor="ctr"/>
+          <a:lstStyle/>
+          <a:p>
+            <a:pPr algn="ctr" indent="0" marL="0">
+              <a:buNone/>
+            </a:pPr>
+            <a:r>
+              <a:rPr lang="en-US" sz="1600" b="1" dirty="0">
+                <a:solidFill>
+                  <a:srgbClr val="0D9488"/>
+                </a:solidFill>
+                <a:latin typeface="Trebuchet MS" pitchFamily="34" charset="0"/>
+                <a:ea typeface="Trebuchet MS" pitchFamily="34" charset="-122"/>
+                <a:cs typeface="Trebuchet MS" pitchFamily="34" charset="-120"/>
+              </a:rPr>
+              <a:t>·</a:t>
+            </a:r>
+            <a:endParaRPr lang="en-US" sz="1600" dirty="0"/>
+          </a:p>
+        </p:txBody>
+      </p:sp>
+      <p:sp>
+        <p:nvSpPr>
+          <p:cNvPr id="31" name="Shape 29"/>
+          <p:cNvSpPr/>
+          <p:nvPr/>
+        </p:nvSpPr>
+        <p:spPr>
+          <a:xfrm>
+            <a:off x="6428232" y="3364992"/>
+            <a:ext cx="1645920" cy="475488"/>
+          </a:xfrm>
+          <a:prstGeom prst="rect">
+            <a:avLst>
+              <a:gd name="adj" fmla="val 9615"/>
+            </a:avLst>
+          </a:prstGeom>
+          <a:solidFill>
+            <a:srgbClr val="FFFFFF"/>
+          </a:solidFill>
+          <a:ln w="12700">
+            <a:solidFill>
+              <a:srgbClr val="0D9488"/>
+            </a:solidFill>
+            <a:prstDash val="solid"/>
+          </a:ln>
+        </p:spPr>
+      </p:sp>
+      <p:sp>
+        <p:nvSpPr>
+          <p:cNvPr id="32" name="Text 30"/>
+          <p:cNvSpPr/>
+          <p:nvPr/>
+        </p:nvSpPr>
+        <p:spPr>
+          <a:xfrm>
+            <a:off x="6428232" y="3364992"/>
+            <a:ext cx="1645920" cy="475488"/>
+          </a:xfrm>
+          <a:prstGeom prst="rect">
+            <a:avLst/>
+          </a:prstGeom>
+          <a:noFill/>
+          <a:ln/>
+        </p:spPr>
+        <p:txBody>
+          <a:bodyPr wrap="square" lIns="0" tIns="0" rIns="0" bIns="0" rtlCol="0" anchor="ctr"/>
+          <a:lstStyle/>
+          <a:p>
+            <a:pPr algn="ctr" indent="0" marL="0">
+              <a:buNone/>
+            </a:pPr>
+            <a:r>
+              <a:rPr lang="en-US" sz="1400" b="1" dirty="0">
+                <a:solidFill>
+                  <a:srgbClr val="0D9488"/>
+                </a:solidFill>
+                <a:latin typeface="Trebuchet MS" pitchFamily="34" charset="0"/>
+                <a:ea typeface="Trebuchet MS" pitchFamily="34" charset="-122"/>
+                <a:cs typeface="Trebuchet MS" pitchFamily="34" charset="-120"/>
+              </a:rPr>
+              <a:t>act</a:t>
+            </a:r>
+            <a:endParaRPr lang="en-US" sz="1400" dirty="0"/>
+          </a:p>
+        </p:txBody>
+      </p:sp>
+      <p:sp>
+        <p:nvSpPr>
+          <p:cNvPr id="33" name="Shape 31"/>
           <p:cNvSpPr/>
           <p:nvPr/>
         </p:nvSpPr>
@@ -26140,7 +25579,7 @@
       </p:sp>
       <p:sp>
         <p:nvSpPr>
-          <p:cNvPr id="31" name="Text 29"/>
+          <p:cNvPr id="34" name="Text 32"/>
           <p:cNvSpPr/>
           <p:nvPr/>
         </p:nvSpPr>
@@ -26179,7 +25618,7 @@
       </p:sp>
       <p:sp>
         <p:nvSpPr>
-          <p:cNvPr id="32" name="Shape 30"/>
+          <p:cNvPr id="35" name="Shape 33"/>
           <p:cNvSpPr/>
           <p:nvPr/>
         </p:nvSpPr>
@@ -26206,7 +25645,7 @@
       </p:sp>
       <p:sp>
         <p:nvSpPr>
-          <p:cNvPr id="33" name="Text 31"/>
+          <p:cNvPr id="36" name="Text 34"/>
           <p:cNvSpPr/>
           <p:nvPr/>
         </p:nvSpPr>
@@ -26668,7 +26107,7 @@
                 <a:ea typeface="Trebuchet MS" pitchFamily="34" charset="-122"/>
                 <a:cs typeface="Trebuchet MS" pitchFamily="34" charset="-120"/>
               </a:rPr>
-              <a:t>active</a:t>
+              <a:t>interact</a:t>
             </a:r>
             <a:endParaRPr lang="en-US" sz="2800" dirty="0"/>
           </a:p>
@@ -26757,11 +26196,11 @@
             </a:avLst>
           </a:prstGeom>
           <a:solidFill>
-            <a:srgbClr val="CCFBF1"/>
+            <a:srgbClr val="DDD6FE"/>
           </a:solidFill>
           <a:ln w="19050">
             <a:solidFill>
-              <a:srgbClr val="0D9488"/>
+              <a:srgbClr val="7C3AED"/>
             </a:solidFill>
             <a:prstDash val="solid"/>
           </a:ln>
@@ -26801,13 +26240,13 @@
             <a:r>
               <a:rPr lang="en-US" sz="1300" b="1" dirty="0">
                 <a:solidFill>
-                  <a:srgbClr val="0F766E"/>
+                  <a:srgbClr val="4C1D95"/>
                 </a:solidFill>
                 <a:latin typeface="Trebuchet MS" pitchFamily="34" charset="0"/>
                 <a:ea typeface="Trebuchet MS" pitchFamily="34" charset="-122"/>
                 <a:cs typeface="Trebuchet MS" pitchFamily="34" charset="-120"/>
               </a:rPr>
-              <a:t>act</a:t>
+              <a:t>inter</a:t>
             </a:r>
             <a:endParaRPr lang="en-US" sz="1300" dirty="0"/>
           </a:p>
@@ -26846,7 +26285,7 @@
                 <a:ea typeface="Calibri" pitchFamily="34" charset="-122"/>
                 <a:cs typeface="Calibri" pitchFamily="34" charset="-120"/>
               </a:rPr>
-              <a:t>to do or perform</a:t>
+              <a:t>between or among</a:t>
             </a:r>
             <a:endParaRPr lang="en-US" sz="850" dirty="0"/>
           </a:p>
@@ -26869,11 +26308,11 @@
             </a:avLst>
           </a:prstGeom>
           <a:solidFill>
-            <a:srgbClr val="FCE7F3"/>
+            <a:srgbClr val="CCFBF1"/>
           </a:solidFill>
           <a:ln w="19050">
             <a:solidFill>
-              <a:srgbClr val="DB2777"/>
+              <a:srgbClr val="0D9488"/>
             </a:solidFill>
             <a:prstDash val="solid"/>
           </a:ln>
@@ -26913,13 +26352,13 @@
             <a:r>
               <a:rPr lang="en-US" sz="1300" b="1" dirty="0">
                 <a:solidFill>
-                  <a:srgbClr val="9D174D"/>
+                  <a:srgbClr val="0F766E"/>
                 </a:solidFill>
                 <a:latin typeface="Trebuchet MS" pitchFamily="34" charset="0"/>
                 <a:ea typeface="Trebuchet MS" pitchFamily="34" charset="-122"/>
                 <a:cs typeface="Trebuchet MS" pitchFamily="34" charset="-120"/>
               </a:rPr>
-              <a:t>ive</a:t>
+              <a:t>act</a:t>
             </a:r>
             <a:endParaRPr lang="en-US" sz="1300" dirty="0"/>
           </a:p>
@@ -26958,7 +26397,7 @@
                 <a:ea typeface="Calibri" pitchFamily="34" charset="-122"/>
                 <a:cs typeface="Calibri" pitchFamily="34" charset="-120"/>
               </a:rPr>
-              <a:t>having the quality of</a:t>
+              <a:t>to do or perform</a:t>
             </a:r>
             <a:endParaRPr lang="en-US" sz="850" dirty="0"/>
           </a:p>
@@ -27065,7 +26504,7 @@
         </p:nvSpPr>
         <p:spPr>
           <a:xfrm>
-            <a:off x="2999232" y="3364992"/>
+            <a:off x="2313432" y="3364992"/>
             <a:ext cx="1645920" cy="475488"/>
           </a:xfrm>
           <a:prstGeom prst="rect">
@@ -27092,7 +26531,7 @@
         </p:nvSpPr>
         <p:spPr>
           <a:xfrm>
-            <a:off x="2999232" y="3364992"/>
+            <a:off x="2313432" y="3364992"/>
             <a:ext cx="1645920" cy="475488"/>
           </a:xfrm>
           <a:prstGeom prst="rect">
@@ -27117,7 +26556,7 @@
                 <a:ea typeface="Trebuchet MS" pitchFamily="34" charset="-122"/>
                 <a:cs typeface="Trebuchet MS" pitchFamily="34" charset="-120"/>
               </a:rPr>
-              <a:t>ac</a:t>
+              <a:t>in</a:t>
             </a:r>
             <a:endParaRPr lang="en-US" sz="1400" dirty="0"/>
           </a:p>
@@ -27131,8 +26570,8 @@
         </p:nvSpPr>
         <p:spPr>
           <a:xfrm>
-            <a:off x="4645152" y="3364992"/>
-            <a:ext cx="1097280" cy="475488"/>
+            <a:off x="3959352" y="3364992"/>
+            <a:ext cx="411480" cy="475488"/>
           </a:xfrm>
           <a:prstGeom prst="rect">
             <a:avLst/>
@@ -27170,7 +26609,7 @@
         </p:nvSpPr>
         <p:spPr>
           <a:xfrm>
-            <a:off x="5742432" y="3364992"/>
+            <a:off x="4370832" y="3364992"/>
             <a:ext cx="1645920" cy="475488"/>
           </a:xfrm>
           <a:prstGeom prst="rect">
@@ -27197,7 +26636,7 @@
         </p:nvSpPr>
         <p:spPr>
           <a:xfrm>
-            <a:off x="5742432" y="3364992"/>
+            <a:off x="4370832" y="3364992"/>
             <a:ext cx="1645920" cy="475488"/>
           </a:xfrm>
           <a:prstGeom prst="rect">
@@ -27222,7 +26661,7 @@
                 <a:ea typeface="Trebuchet MS" pitchFamily="34" charset="-122"/>
                 <a:cs typeface="Trebuchet MS" pitchFamily="34" charset="-120"/>
               </a:rPr>
-              <a:t>tive</a:t>
+              <a:t>ter</a:t>
             </a:r>
             <a:endParaRPr lang="en-US" sz="1400" dirty="0"/>
           </a:p>
@@ -27230,7 +26669,112 @@
       </p:sp>
       <p:sp>
         <p:nvSpPr>
-          <p:cNvPr id="30" name="Shape 28"/>
+          <p:cNvPr id="30" name="Text 28"/>
+          <p:cNvSpPr/>
+          <p:nvPr/>
+        </p:nvSpPr>
+        <p:spPr>
+          <a:xfrm>
+            <a:off x="6016752" y="3364992"/>
+            <a:ext cx="411480" cy="475488"/>
+          </a:xfrm>
+          <a:prstGeom prst="rect">
+            <a:avLst/>
+          </a:prstGeom>
+          <a:noFill/>
+          <a:ln/>
+        </p:spPr>
+        <p:txBody>
+          <a:bodyPr wrap="square" lIns="0" tIns="0" rIns="0" bIns="0" rtlCol="0" anchor="ctr"/>
+          <a:lstStyle/>
+          <a:p>
+            <a:pPr algn="ctr" indent="0" marL="0">
+              <a:buNone/>
+            </a:pPr>
+            <a:r>
+              <a:rPr lang="en-US" sz="1600" b="1" dirty="0">
+                <a:solidFill>
+                  <a:srgbClr val="0D9488"/>
+                </a:solidFill>
+                <a:latin typeface="Trebuchet MS" pitchFamily="34" charset="0"/>
+                <a:ea typeface="Trebuchet MS" pitchFamily="34" charset="-122"/>
+                <a:cs typeface="Trebuchet MS" pitchFamily="34" charset="-120"/>
+              </a:rPr>
+              <a:t>·</a:t>
+            </a:r>
+            <a:endParaRPr lang="en-US" sz="1600" dirty="0"/>
+          </a:p>
+        </p:txBody>
+      </p:sp>
+      <p:sp>
+        <p:nvSpPr>
+          <p:cNvPr id="31" name="Shape 29"/>
+          <p:cNvSpPr/>
+          <p:nvPr/>
+        </p:nvSpPr>
+        <p:spPr>
+          <a:xfrm>
+            <a:off x="6428232" y="3364992"/>
+            <a:ext cx="1645920" cy="475488"/>
+          </a:xfrm>
+          <a:prstGeom prst="rect">
+            <a:avLst>
+              <a:gd name="adj" fmla="val 9615"/>
+            </a:avLst>
+          </a:prstGeom>
+          <a:solidFill>
+            <a:srgbClr val="FFFFFF"/>
+          </a:solidFill>
+          <a:ln w="12700">
+            <a:solidFill>
+              <a:srgbClr val="0D9488"/>
+            </a:solidFill>
+            <a:prstDash val="solid"/>
+          </a:ln>
+        </p:spPr>
+      </p:sp>
+      <p:sp>
+        <p:nvSpPr>
+          <p:cNvPr id="32" name="Text 30"/>
+          <p:cNvSpPr/>
+          <p:nvPr/>
+        </p:nvSpPr>
+        <p:spPr>
+          <a:xfrm>
+            <a:off x="6428232" y="3364992"/>
+            <a:ext cx="1645920" cy="475488"/>
+          </a:xfrm>
+          <a:prstGeom prst="rect">
+            <a:avLst/>
+          </a:prstGeom>
+          <a:noFill/>
+          <a:ln/>
+        </p:spPr>
+        <p:txBody>
+          <a:bodyPr wrap="square" lIns="0" tIns="0" rIns="0" bIns="0" rtlCol="0" anchor="ctr"/>
+          <a:lstStyle/>
+          <a:p>
+            <a:pPr algn="ctr" indent="0" marL="0">
+              <a:buNone/>
+            </a:pPr>
+            <a:r>
+              <a:rPr lang="en-US" sz="1400" b="1" dirty="0">
+                <a:solidFill>
+                  <a:srgbClr val="0D9488"/>
+                </a:solidFill>
+                <a:latin typeface="Trebuchet MS" pitchFamily="34" charset="0"/>
+                <a:ea typeface="Trebuchet MS" pitchFamily="34" charset="-122"/>
+                <a:cs typeface="Trebuchet MS" pitchFamily="34" charset="-120"/>
+              </a:rPr>
+              <a:t>act</a:t>
+            </a:r>
+            <a:endParaRPr lang="en-US" sz="1400" dirty="0"/>
+          </a:p>
+        </p:txBody>
+      </p:sp>
+      <p:sp>
+        <p:nvSpPr>
+          <p:cNvPr id="33" name="Shape 31"/>
           <p:cNvSpPr/>
           <p:nvPr/>
         </p:nvSpPr>
@@ -27257,7 +26801,7 @@
       </p:sp>
       <p:sp>
         <p:nvSpPr>
-          <p:cNvPr id="31" name="Text 29"/>
+          <p:cNvPr id="34" name="Text 32"/>
           <p:cNvSpPr/>
           <p:nvPr/>
         </p:nvSpPr>
@@ -27296,18 +26840,18 @@
       </p:sp>
       <p:sp>
         <p:nvSpPr>
-          <p:cNvPr id="32" name="Shape 30"/>
+          <p:cNvPr id="35" name="Shape 33"/>
           <p:cNvSpPr/>
           <p:nvPr/>
         </p:nvSpPr>
         <p:spPr>
           <a:xfrm>
             <a:off x="1874520" y="4096512"/>
-            <a:ext cx="6903720" cy="804672"/>
+            <a:ext cx="6903720" cy="658368"/>
           </a:xfrm>
           <a:prstGeom prst="rect">
             <a:avLst>
-              <a:gd name="adj" fmla="val 6818"/>
+              <a:gd name="adj" fmla="val 8333"/>
             </a:avLst>
           </a:prstGeom>
           <a:solidFill>
@@ -27323,18 +26867,18 @@
       </p:sp>
       <p:sp>
         <p:nvSpPr>
-          <p:cNvPr id="33" name="Shape 31"/>
-          <p:cNvSpPr/>
-          <p:nvPr/>
-        </p:nvSpPr>
-        <p:spPr>
-          <a:xfrm>
-            <a:off x="2427732" y="4169664"/>
-            <a:ext cx="685800" cy="384048"/>
+          <p:cNvPr id="36" name="Shape 34"/>
+          <p:cNvSpPr/>
+          <p:nvPr/>
+        </p:nvSpPr>
+        <p:spPr>
+          <a:xfrm>
+            <a:off x="2124837" y="4169664"/>
+            <a:ext cx="685800" cy="475488"/>
           </a:xfrm>
           <a:prstGeom prst="rect">
             <a:avLst>
-              <a:gd name="adj" fmla="val 9524"/>
+              <a:gd name="adj" fmla="val 7692"/>
             </a:avLst>
           </a:prstGeom>
           <a:solidFill>
@@ -27350,14 +26894,14 @@
       </p:sp>
       <p:sp>
         <p:nvSpPr>
-          <p:cNvPr id="34" name="Text 32"/>
-          <p:cNvSpPr/>
-          <p:nvPr/>
-        </p:nvSpPr>
-        <p:spPr>
-          <a:xfrm>
-            <a:off x="2427732" y="4169664"/>
-            <a:ext cx="685800" cy="384048"/>
+          <p:cNvPr id="37" name="Text 35"/>
+          <p:cNvSpPr/>
+          <p:nvPr/>
+        </p:nvSpPr>
+        <p:spPr>
+          <a:xfrm>
+            <a:off x="2124837" y="4169664"/>
+            <a:ext cx="685800" cy="475488"/>
           </a:xfrm>
           <a:prstGeom prst="rect">
             <a:avLst/>
@@ -27381,7 +26925,7 @@
                 <a:ea typeface="Trebuchet MS" pitchFamily="34" charset="-122"/>
                 <a:cs typeface="Trebuchet MS" pitchFamily="34" charset="-120"/>
               </a:rPr>
-              <a:t>a</a:t>
+              <a:t>i</a:t>
             </a:r>
             <a:endParaRPr lang="en-US" sz="900" dirty="0"/>
           </a:p>
@@ -27389,18 +26933,18 @@
       </p:sp>
       <p:sp>
         <p:nvSpPr>
-          <p:cNvPr id="35" name="Shape 33"/>
-          <p:cNvSpPr/>
-          <p:nvPr/>
-        </p:nvSpPr>
-        <p:spPr>
-          <a:xfrm>
-            <a:off x="3639312" y="4169664"/>
-            <a:ext cx="685800" cy="384048"/>
+          <p:cNvPr id="38" name="Shape 36"/>
+          <p:cNvSpPr/>
+          <p:nvPr/>
+        </p:nvSpPr>
+        <p:spPr>
+          <a:xfrm>
+            <a:off x="3033522" y="4169664"/>
+            <a:ext cx="685800" cy="475488"/>
           </a:xfrm>
           <a:prstGeom prst="rect">
             <a:avLst>
-              <a:gd name="adj" fmla="val 9524"/>
+              <a:gd name="adj" fmla="val 7692"/>
             </a:avLst>
           </a:prstGeom>
           <a:solidFill>
@@ -27416,14 +26960,14 @@
       </p:sp>
       <p:sp>
         <p:nvSpPr>
-          <p:cNvPr id="36" name="Text 34"/>
-          <p:cNvSpPr/>
-          <p:nvPr/>
-        </p:nvSpPr>
-        <p:spPr>
-          <a:xfrm>
-            <a:off x="3639312" y="4169664"/>
-            <a:ext cx="685800" cy="384048"/>
+          <p:cNvPr id="39" name="Text 37"/>
+          <p:cNvSpPr/>
+          <p:nvPr/>
+        </p:nvSpPr>
+        <p:spPr>
+          <a:xfrm>
+            <a:off x="3033522" y="4169664"/>
+            <a:ext cx="685800" cy="475488"/>
           </a:xfrm>
           <a:prstGeom prst="rect">
             <a:avLst/>
@@ -27447,7 +26991,7 @@
                 <a:ea typeface="Trebuchet MS" pitchFamily="34" charset="-122"/>
                 <a:cs typeface="Trebuchet MS" pitchFamily="34" charset="-120"/>
               </a:rPr>
-              <a:t>c</a:t>
+              <a:t>n</a:t>
             </a:r>
             <a:endParaRPr lang="en-US" sz="900" dirty="0"/>
           </a:p>
@@ -27455,18 +26999,18 @@
       </p:sp>
       <p:sp>
         <p:nvSpPr>
-          <p:cNvPr id="37" name="Shape 35"/>
-          <p:cNvSpPr/>
-          <p:nvPr/>
-        </p:nvSpPr>
-        <p:spPr>
-          <a:xfrm>
-            <a:off x="4850892" y="4169664"/>
-            <a:ext cx="685800" cy="384048"/>
+          <p:cNvPr id="40" name="Shape 38"/>
+          <p:cNvSpPr/>
+          <p:nvPr/>
+        </p:nvSpPr>
+        <p:spPr>
+          <a:xfrm>
+            <a:off x="3942207" y="4169664"/>
+            <a:ext cx="685800" cy="475488"/>
           </a:xfrm>
           <a:prstGeom prst="rect">
             <a:avLst>
-              <a:gd name="adj" fmla="val 9524"/>
+              <a:gd name="adj" fmla="val 7692"/>
             </a:avLst>
           </a:prstGeom>
           <a:solidFill>
@@ -27482,14 +27026,14 @@
       </p:sp>
       <p:sp>
         <p:nvSpPr>
-          <p:cNvPr id="38" name="Text 36"/>
-          <p:cNvSpPr/>
-          <p:nvPr/>
-        </p:nvSpPr>
-        <p:spPr>
-          <a:xfrm>
-            <a:off x="4850892" y="4169664"/>
-            <a:ext cx="685800" cy="384048"/>
+          <p:cNvPr id="41" name="Text 39"/>
+          <p:cNvSpPr/>
+          <p:nvPr/>
+        </p:nvSpPr>
+        <p:spPr>
+          <a:xfrm>
+            <a:off x="3942207" y="4169664"/>
+            <a:ext cx="685800" cy="475488"/>
           </a:xfrm>
           <a:prstGeom prst="rect">
             <a:avLst/>
@@ -27521,18 +27065,18 @@
       </p:sp>
       <p:sp>
         <p:nvSpPr>
-          <p:cNvPr id="39" name="Shape 37"/>
-          <p:cNvSpPr/>
-          <p:nvPr/>
-        </p:nvSpPr>
-        <p:spPr>
-          <a:xfrm>
-            <a:off x="6062472" y="4169664"/>
-            <a:ext cx="685800" cy="384048"/>
+          <p:cNvPr id="42" name="Shape 40"/>
+          <p:cNvSpPr/>
+          <p:nvPr/>
+        </p:nvSpPr>
+        <p:spPr>
+          <a:xfrm>
+            <a:off x="4850892" y="4169664"/>
+            <a:ext cx="685800" cy="475488"/>
           </a:xfrm>
           <a:prstGeom prst="rect">
             <a:avLst>
-              <a:gd name="adj" fmla="val 9524"/>
+              <a:gd name="adj" fmla="val 7692"/>
             </a:avLst>
           </a:prstGeom>
           <a:solidFill>
@@ -27548,14 +27092,14 @@
       </p:sp>
       <p:sp>
         <p:nvSpPr>
-          <p:cNvPr id="40" name="Text 38"/>
-          <p:cNvSpPr/>
-          <p:nvPr/>
-        </p:nvSpPr>
-        <p:spPr>
-          <a:xfrm>
-            <a:off x="6062472" y="4169664"/>
-            <a:ext cx="685800" cy="384048"/>
+          <p:cNvPr id="43" name="Text 41"/>
+          <p:cNvSpPr/>
+          <p:nvPr/>
+        </p:nvSpPr>
+        <p:spPr>
+          <a:xfrm>
+            <a:off x="4850892" y="4169664"/>
+            <a:ext cx="685800" cy="475488"/>
           </a:xfrm>
           <a:prstGeom prst="rect">
             <a:avLst/>
@@ -27579,7 +27123,7 @@
                 <a:ea typeface="Trebuchet MS" pitchFamily="34" charset="-122"/>
                 <a:cs typeface="Trebuchet MS" pitchFamily="34" charset="-120"/>
               </a:rPr>
-              <a:t>i</a:t>
+              <a:t>er</a:t>
             </a:r>
             <a:endParaRPr lang="en-US" sz="900" dirty="0"/>
           </a:p>
@@ -27587,18 +27131,18 @@
       </p:sp>
       <p:sp>
         <p:nvSpPr>
-          <p:cNvPr id="41" name="Shape 39"/>
-          <p:cNvSpPr/>
-          <p:nvPr/>
-        </p:nvSpPr>
-        <p:spPr>
-          <a:xfrm>
-            <a:off x="7274052" y="4169664"/>
-            <a:ext cx="685800" cy="384048"/>
+          <p:cNvPr id="44" name="Shape 42"/>
+          <p:cNvSpPr/>
+          <p:nvPr/>
+        </p:nvSpPr>
+        <p:spPr>
+          <a:xfrm>
+            <a:off x="5759577" y="4169664"/>
+            <a:ext cx="685800" cy="475488"/>
           </a:xfrm>
           <a:prstGeom prst="rect">
             <a:avLst>
-              <a:gd name="adj" fmla="val 9524"/>
+              <a:gd name="adj" fmla="val 7692"/>
             </a:avLst>
           </a:prstGeom>
           <a:solidFill>
@@ -27614,14 +27158,14 @@
       </p:sp>
       <p:sp>
         <p:nvSpPr>
-          <p:cNvPr id="42" name="Text 40"/>
-          <p:cNvSpPr/>
-          <p:nvPr/>
-        </p:nvSpPr>
-        <p:spPr>
-          <a:xfrm>
-            <a:off x="7274052" y="4169664"/>
-            <a:ext cx="685800" cy="384048"/>
+          <p:cNvPr id="45" name="Text 43"/>
+          <p:cNvSpPr/>
+          <p:nvPr/>
+        </p:nvSpPr>
+        <p:spPr>
+          <a:xfrm>
+            <a:off x="5759577" y="4169664"/>
+            <a:ext cx="685800" cy="475488"/>
           </a:xfrm>
           <a:prstGeom prst="rect">
             <a:avLst/>
@@ -27645,7 +27189,7 @@
                 <a:ea typeface="Trebuchet MS" pitchFamily="34" charset="-122"/>
                 <a:cs typeface="Trebuchet MS" pitchFamily="34" charset="-120"/>
               </a:rPr>
-              <a:t>ve</a:t>
+              <a:t>a</a:t>
             </a:r>
             <a:endParaRPr lang="en-US" sz="900" dirty="0"/>
           </a:p>
@@ -27653,40 +27197,133 @@
       </p:sp>
       <p:sp>
         <p:nvSpPr>
-          <p:cNvPr id="43" name="Text 41"/>
-          <p:cNvSpPr/>
-          <p:nvPr/>
-        </p:nvSpPr>
-        <p:spPr>
-          <a:xfrm>
-            <a:off x="7274052" y="4572000"/>
-            <a:ext cx="685800" cy="219456"/>
-          </a:xfrm>
-          <a:prstGeom prst="rect">
-            <a:avLst/>
-          </a:prstGeom>
-          <a:noFill/>
-          <a:ln/>
-        </p:spPr>
-        <p:txBody>
-          <a:bodyPr wrap="square" lIns="0" tIns="0" rIns="0" bIns="0" rtlCol="0" anchor="t"/>
-          <a:lstStyle/>
-          <a:p>
-            <a:pPr algn="ctr" indent="0" marL="0">
-              <a:buNone/>
-            </a:pPr>
-            <a:r>
-              <a:rPr lang="en-US" sz="750" i="1" dirty="0">
-                <a:solidFill>
-                  <a:srgbClr val="94A3B8"/>
-                </a:solidFill>
-                <a:latin typeface="Calibri" pitchFamily="34" charset="0"/>
-                <a:ea typeface="Calibri" pitchFamily="34" charset="-122"/>
-                <a:cs typeface="Calibri" pitchFamily="34" charset="-120"/>
-              </a:rPr>
-              <a:t>/v/</a:t>
-            </a:r>
-            <a:endParaRPr lang="en-US" sz="750" dirty="0"/>
+          <p:cNvPr id="46" name="Shape 44"/>
+          <p:cNvSpPr/>
+          <p:nvPr/>
+        </p:nvSpPr>
+        <p:spPr>
+          <a:xfrm>
+            <a:off x="6668262" y="4169664"/>
+            <a:ext cx="685800" cy="475488"/>
+          </a:xfrm>
+          <a:prstGeom prst="rect">
+            <a:avLst>
+              <a:gd name="adj" fmla="val 7692"/>
+            </a:avLst>
+          </a:prstGeom>
+          <a:solidFill>
+            <a:srgbClr val="FFFFFF"/>
+          </a:solidFill>
+          <a:ln w="12700">
+            <a:solidFill>
+              <a:srgbClr val="DB2777"/>
+            </a:solidFill>
+            <a:prstDash val="solid"/>
+          </a:ln>
+        </p:spPr>
+      </p:sp>
+      <p:sp>
+        <p:nvSpPr>
+          <p:cNvPr id="47" name="Text 45"/>
+          <p:cNvSpPr/>
+          <p:nvPr/>
+        </p:nvSpPr>
+        <p:spPr>
+          <a:xfrm>
+            <a:off x="6668262" y="4169664"/>
+            <a:ext cx="685800" cy="475488"/>
+          </a:xfrm>
+          <a:prstGeom prst="rect">
+            <a:avLst/>
+          </a:prstGeom>
+          <a:noFill/>
+          <a:ln/>
+        </p:spPr>
+        <p:txBody>
+          <a:bodyPr wrap="square" lIns="0" tIns="0" rIns="0" bIns="0" rtlCol="0" anchor="ctr"/>
+          <a:lstStyle/>
+          <a:p>
+            <a:pPr algn="ctr" indent="0" marL="0">
+              <a:buNone/>
+            </a:pPr>
+            <a:r>
+              <a:rPr lang="en-US" sz="900" b="1" dirty="0">
+                <a:solidFill>
+                  <a:srgbClr val="9D174D"/>
+                </a:solidFill>
+                <a:latin typeface="Trebuchet MS" pitchFamily="34" charset="0"/>
+                <a:ea typeface="Trebuchet MS" pitchFamily="34" charset="-122"/>
+                <a:cs typeface="Trebuchet MS" pitchFamily="34" charset="-120"/>
+              </a:rPr>
+              <a:t>c</a:t>
+            </a:r>
+            <a:endParaRPr lang="en-US" sz="900" dirty="0"/>
+          </a:p>
+        </p:txBody>
+      </p:sp>
+      <p:sp>
+        <p:nvSpPr>
+          <p:cNvPr id="48" name="Shape 46"/>
+          <p:cNvSpPr/>
+          <p:nvPr/>
+        </p:nvSpPr>
+        <p:spPr>
+          <a:xfrm>
+            <a:off x="7576947" y="4169664"/>
+            <a:ext cx="685800" cy="475488"/>
+          </a:xfrm>
+          <a:prstGeom prst="rect">
+            <a:avLst>
+              <a:gd name="adj" fmla="val 7692"/>
+            </a:avLst>
+          </a:prstGeom>
+          <a:solidFill>
+            <a:srgbClr val="FFFFFF"/>
+          </a:solidFill>
+          <a:ln w="12700">
+            <a:solidFill>
+              <a:srgbClr val="DB2777"/>
+            </a:solidFill>
+            <a:prstDash val="solid"/>
+          </a:ln>
+        </p:spPr>
+      </p:sp>
+      <p:sp>
+        <p:nvSpPr>
+          <p:cNvPr id="49" name="Text 47"/>
+          <p:cNvSpPr/>
+          <p:nvPr/>
+        </p:nvSpPr>
+        <p:spPr>
+          <a:xfrm>
+            <a:off x="7576947" y="4169664"/>
+            <a:ext cx="685800" cy="475488"/>
+          </a:xfrm>
+          <a:prstGeom prst="rect">
+            <a:avLst/>
+          </a:prstGeom>
+          <a:noFill/>
+          <a:ln/>
+        </p:spPr>
+        <p:txBody>
+          <a:bodyPr wrap="square" lIns="0" tIns="0" rIns="0" bIns="0" rtlCol="0" anchor="ctr"/>
+          <a:lstStyle/>
+          <a:p>
+            <a:pPr algn="ctr" indent="0" marL="0">
+              <a:buNone/>
+            </a:pPr>
+            <a:r>
+              <a:rPr lang="en-US" sz="900" b="1" dirty="0">
+                <a:solidFill>
+                  <a:srgbClr val="9D174D"/>
+                </a:solidFill>
+                <a:latin typeface="Trebuchet MS" pitchFamily="34" charset="0"/>
+                <a:ea typeface="Trebuchet MS" pitchFamily="34" charset="-122"/>
+                <a:cs typeface="Trebuchet MS" pitchFamily="34" charset="-120"/>
+              </a:rPr>
+              <a:t>t</a:t>
+            </a:r>
+            <a:endParaRPr lang="en-US" sz="900" dirty="0"/>
           </a:p>
         </p:txBody>
       </p:sp>
@@ -28115,7 +27752,7 @@
                 <a:ea typeface="Trebuchet MS" pitchFamily="34" charset="-122"/>
                 <a:cs typeface="Trebuchet MS" pitchFamily="34" charset="-120"/>
               </a:rPr>
-              <a:t>exactly</a:t>
+              <a:t>transaction</a:t>
             </a:r>
             <a:endParaRPr lang="en-US" sz="2800" dirty="0"/>
           </a:p>
@@ -28942,7 +28579,7 @@
                 <a:ea typeface="Trebuchet MS" pitchFamily="34" charset="-122"/>
                 <a:cs typeface="Trebuchet MS" pitchFamily="34" charset="-120"/>
               </a:rPr>
-              <a:t>exactly</a:t>
+              <a:t>transaction</a:t>
             </a:r>
             <a:endParaRPr lang="en-US" sz="2800" dirty="0"/>
           </a:p>
@@ -29081,7 +28718,7 @@
                 <a:ea typeface="Trebuchet MS" pitchFamily="34" charset="-122"/>
                 <a:cs typeface="Trebuchet MS" pitchFamily="34" charset="-120"/>
               </a:rPr>
-              <a:t>ex</a:t>
+              <a:t>trans</a:t>
             </a:r>
             <a:endParaRPr lang="en-US" sz="1300" dirty="0"/>
           </a:p>
@@ -29120,7 +28757,7 @@
                 <a:ea typeface="Calibri" pitchFamily="34" charset="-122"/>
                 <a:cs typeface="Calibri" pitchFamily="34" charset="-120"/>
               </a:rPr>
-              <a:t>out, thoroughly</a:t>
+              <a:t>across or through</a:t>
             </a:r>
             <a:endParaRPr lang="en-US" sz="850" dirty="0"/>
           </a:p>
@@ -29305,7 +28942,7 @@
                 <a:ea typeface="Trebuchet MS" pitchFamily="34" charset="-122"/>
                 <a:cs typeface="Trebuchet MS" pitchFamily="34" charset="-120"/>
               </a:rPr>
-              <a:t>ly</a:t>
+              <a:t>ion</a:t>
             </a:r>
             <a:endParaRPr lang="en-US" sz="1300" dirty="0"/>
           </a:p>
@@ -29344,7 +28981,7 @@
                 <a:ea typeface="Calibri" pitchFamily="34" charset="-122"/>
                 <a:cs typeface="Calibri" pitchFamily="34" charset="-120"/>
               </a:rPr>
-              <a:t>in a way that is</a:t>
+              <a:t>state or process of</a:t>
             </a:r>
             <a:endParaRPr lang="en-US" sz="850" dirty="0"/>
           </a:p>
@@ -30039,7 +29676,7 @@
                 <a:ea typeface="Trebuchet MS" pitchFamily="34" charset="-122"/>
                 <a:cs typeface="Trebuchet MS" pitchFamily="34" charset="-120"/>
               </a:rPr>
-              <a:t>exactly</a:t>
+              <a:t>transaction</a:t>
             </a:r>
             <a:endParaRPr lang="en-US" sz="2800" dirty="0"/>
           </a:p>
@@ -30178,7 +29815,7 @@
                 <a:ea typeface="Trebuchet MS" pitchFamily="34" charset="-122"/>
                 <a:cs typeface="Trebuchet MS" pitchFamily="34" charset="-120"/>
               </a:rPr>
-              <a:t>ex</a:t>
+              <a:t>trans</a:t>
             </a:r>
             <a:endParaRPr lang="en-US" sz="1300" dirty="0"/>
           </a:p>
@@ -30217,7 +29854,7 @@
                 <a:ea typeface="Calibri" pitchFamily="34" charset="-122"/>
                 <a:cs typeface="Calibri" pitchFamily="34" charset="-120"/>
               </a:rPr>
-              <a:t>out, thoroughly</a:t>
+              <a:t>across or through</a:t>
             </a:r>
             <a:endParaRPr lang="en-US" sz="850" dirty="0"/>
           </a:p>
@@ -30402,7 +30039,7 @@
                 <a:ea typeface="Trebuchet MS" pitchFamily="34" charset="-122"/>
                 <a:cs typeface="Trebuchet MS" pitchFamily="34" charset="-120"/>
               </a:rPr>
-              <a:t>ly</a:t>
+              <a:t>ion</a:t>
             </a:r>
             <a:endParaRPr lang="en-US" sz="1300" dirty="0"/>
           </a:p>
@@ -30441,7 +30078,7 @@
                 <a:ea typeface="Calibri" pitchFamily="34" charset="-122"/>
                 <a:cs typeface="Calibri" pitchFamily="34" charset="-120"/>
               </a:rPr>
-              <a:t>in a way that is</a:t>
+              <a:t>state or process of</a:t>
             </a:r>
             <a:endParaRPr lang="en-US" sz="850" dirty="0"/>
           </a:p>
@@ -30600,7 +30237,7 @@
                 <a:ea typeface="Trebuchet MS" pitchFamily="34" charset="-122"/>
                 <a:cs typeface="Trebuchet MS" pitchFamily="34" charset="-120"/>
               </a:rPr>
-              <a:t>ex</a:t>
+              <a:t>trans</a:t>
             </a:r>
             <a:endParaRPr lang="en-US" sz="1400" dirty="0"/>
           </a:p>
@@ -30705,7 +30342,7 @@
                 <a:ea typeface="Trebuchet MS" pitchFamily="34" charset="-122"/>
                 <a:cs typeface="Trebuchet MS" pitchFamily="34" charset="-120"/>
               </a:rPr>
-              <a:t>act</a:t>
+              <a:t>ac</a:t>
             </a:r>
             <a:endParaRPr lang="en-US" sz="1400" dirty="0"/>
           </a:p>
@@ -30810,7 +30447,7 @@
                 <a:ea typeface="Trebuchet MS" pitchFamily="34" charset="-122"/>
                 <a:cs typeface="Trebuchet MS" pitchFamily="34" charset="-120"/>
               </a:rPr>
-              <a:t>ly</a:t>
+              <a:t>tion</a:t>
             </a:r>
             <a:endParaRPr lang="en-US" sz="1400" dirty="0"/>
           </a:p>
@@ -31373,7 +31010,7 @@
                 <a:ea typeface="Trebuchet MS" pitchFamily="34" charset="-122"/>
                 <a:cs typeface="Trebuchet MS" pitchFamily="34" charset="-120"/>
               </a:rPr>
-              <a:t>exactly</a:t>
+              <a:t>transaction</a:t>
             </a:r>
             <a:endParaRPr lang="en-US" sz="2800" dirty="0"/>
           </a:p>
@@ -31512,7 +31149,7 @@
                 <a:ea typeface="Trebuchet MS" pitchFamily="34" charset="-122"/>
                 <a:cs typeface="Trebuchet MS" pitchFamily="34" charset="-120"/>
               </a:rPr>
-              <a:t>ex</a:t>
+              <a:t>trans</a:t>
             </a:r>
             <a:endParaRPr lang="en-US" sz="1300" dirty="0"/>
           </a:p>
@@ -31551,7 +31188,7 @@
                 <a:ea typeface="Calibri" pitchFamily="34" charset="-122"/>
                 <a:cs typeface="Calibri" pitchFamily="34" charset="-120"/>
               </a:rPr>
-              <a:t>out, thoroughly</a:t>
+              <a:t>across or through</a:t>
             </a:r>
             <a:endParaRPr lang="en-US" sz="850" dirty="0"/>
           </a:p>
@@ -31736,7 +31373,7 @@
                 <a:ea typeface="Trebuchet MS" pitchFamily="34" charset="-122"/>
                 <a:cs typeface="Trebuchet MS" pitchFamily="34" charset="-120"/>
               </a:rPr>
-              <a:t>ly</a:t>
+              <a:t>ion</a:t>
             </a:r>
             <a:endParaRPr lang="en-US" sz="1300" dirty="0"/>
           </a:p>
@@ -31775,7 +31412,7 @@
                 <a:ea typeface="Calibri" pitchFamily="34" charset="-122"/>
                 <a:cs typeface="Calibri" pitchFamily="34" charset="-120"/>
               </a:rPr>
-              <a:t>in a way that is</a:t>
+              <a:t>state or process of</a:t>
             </a:r>
             <a:endParaRPr lang="en-US" sz="850" dirty="0"/>
           </a:p>
@@ -31934,7 +31571,7 @@
                 <a:ea typeface="Trebuchet MS" pitchFamily="34" charset="-122"/>
                 <a:cs typeface="Trebuchet MS" pitchFamily="34" charset="-120"/>
               </a:rPr>
-              <a:t>ex</a:t>
+              <a:t>trans</a:t>
             </a:r>
             <a:endParaRPr lang="en-US" sz="1400" dirty="0"/>
           </a:p>
@@ -32039,7 +31676,7 @@
                 <a:ea typeface="Trebuchet MS" pitchFamily="34" charset="-122"/>
                 <a:cs typeface="Trebuchet MS" pitchFamily="34" charset="-120"/>
               </a:rPr>
-              <a:t>act</a:t>
+              <a:t>ac</a:t>
             </a:r>
             <a:endParaRPr lang="en-US" sz="1400" dirty="0"/>
           </a:p>
@@ -32144,7 +31781,7 @@
                 <a:ea typeface="Trebuchet MS" pitchFamily="34" charset="-122"/>
                 <a:cs typeface="Trebuchet MS" pitchFamily="34" charset="-120"/>
               </a:rPr>
-              <a:t>ly</a:t>
+              <a:t>tion</a:t>
             </a:r>
             <a:endParaRPr lang="en-US" sz="1400" dirty="0"/>
           </a:p>
@@ -32225,11 +31862,11 @@
         <p:spPr>
           <a:xfrm>
             <a:off x="1874520" y="4096512"/>
-            <a:ext cx="6903720" cy="658368"/>
+            <a:ext cx="6903720" cy="804672"/>
           </a:xfrm>
           <a:prstGeom prst="rect">
             <a:avLst>
-              <a:gd name="adj" fmla="val 8333"/>
+              <a:gd name="adj" fmla="val 6818"/>
             </a:avLst>
           </a:prstGeom>
           <a:solidFill>
@@ -32251,12 +31888,12 @@
         </p:nvSpPr>
         <p:spPr>
           <a:xfrm>
-            <a:off x="2124837" y="4169664"/>
-            <a:ext cx="685800" cy="475488"/>
+            <a:off x="1951828" y="4169664"/>
+            <a:ext cx="603504" cy="384048"/>
           </a:xfrm>
           <a:prstGeom prst="rect">
             <a:avLst>
-              <a:gd name="adj" fmla="val 7692"/>
+              <a:gd name="adj" fmla="val 9524"/>
             </a:avLst>
           </a:prstGeom>
           <a:solidFill>
@@ -32278,8 +31915,8 @@
         </p:nvSpPr>
         <p:spPr>
           <a:xfrm>
-            <a:off x="2124837" y="4169664"/>
-            <a:ext cx="685800" cy="475488"/>
+            <a:off x="1951828" y="4169664"/>
+            <a:ext cx="603504" cy="384048"/>
           </a:xfrm>
           <a:prstGeom prst="rect">
             <a:avLst/>
@@ -32303,7 +31940,7 @@
                 <a:ea typeface="Trebuchet MS" pitchFamily="34" charset="-122"/>
                 <a:cs typeface="Trebuchet MS" pitchFamily="34" charset="-120"/>
               </a:rPr>
-              <a:t>e</a:t>
+              <a:t>t</a:t>
             </a:r>
             <a:endParaRPr lang="en-US" sz="900" dirty="0"/>
           </a:p>
@@ -32317,12 +31954,12 @@
         </p:nvSpPr>
         <p:spPr>
           <a:xfrm>
-            <a:off x="3033522" y="4169664"/>
-            <a:ext cx="685800" cy="475488"/>
+            <a:off x="2605209" y="4169664"/>
+            <a:ext cx="603504" cy="384048"/>
           </a:xfrm>
           <a:prstGeom prst="rect">
             <a:avLst>
-              <a:gd name="adj" fmla="val 7692"/>
+              <a:gd name="adj" fmla="val 9524"/>
             </a:avLst>
           </a:prstGeom>
           <a:solidFill>
@@ -32344,8 +31981,8 @@
         </p:nvSpPr>
         <p:spPr>
           <a:xfrm>
-            <a:off x="3033522" y="4169664"/>
-            <a:ext cx="685800" cy="475488"/>
+            <a:off x="2605209" y="4169664"/>
+            <a:ext cx="603504" cy="384048"/>
           </a:xfrm>
           <a:prstGeom prst="rect">
             <a:avLst/>
@@ -32369,7 +32006,7 @@
                 <a:ea typeface="Trebuchet MS" pitchFamily="34" charset="-122"/>
                 <a:cs typeface="Trebuchet MS" pitchFamily="34" charset="-120"/>
               </a:rPr>
-              <a:t>x</a:t>
+              <a:t>r</a:t>
             </a:r>
             <a:endParaRPr lang="en-US" sz="900" dirty="0"/>
           </a:p>
@@ -32383,12 +32020,12 @@
         </p:nvSpPr>
         <p:spPr>
           <a:xfrm>
-            <a:off x="3942207" y="4169664"/>
-            <a:ext cx="685800" cy="475488"/>
+            <a:off x="3258589" y="4169664"/>
+            <a:ext cx="603504" cy="384048"/>
           </a:xfrm>
           <a:prstGeom prst="rect">
             <a:avLst>
-              <a:gd name="adj" fmla="val 7692"/>
+              <a:gd name="adj" fmla="val 9524"/>
             </a:avLst>
           </a:prstGeom>
           <a:solidFill>
@@ -32410,8 +32047,8 @@
         </p:nvSpPr>
         <p:spPr>
           <a:xfrm>
-            <a:off x="3942207" y="4169664"/>
-            <a:ext cx="685800" cy="475488"/>
+            <a:off x="3258589" y="4169664"/>
+            <a:ext cx="603504" cy="384048"/>
           </a:xfrm>
           <a:prstGeom prst="rect">
             <a:avLst/>
@@ -32449,12 +32086,12 @@
         </p:nvSpPr>
         <p:spPr>
           <a:xfrm>
-            <a:off x="4850892" y="4169664"/>
-            <a:ext cx="685800" cy="475488"/>
+            <a:off x="3911969" y="4169664"/>
+            <a:ext cx="603504" cy="384048"/>
           </a:xfrm>
           <a:prstGeom prst="rect">
             <a:avLst>
-              <a:gd name="adj" fmla="val 7692"/>
+              <a:gd name="adj" fmla="val 9524"/>
             </a:avLst>
           </a:prstGeom>
           <a:solidFill>
@@ -32476,8 +32113,8 @@
         </p:nvSpPr>
         <p:spPr>
           <a:xfrm>
-            <a:off x="4850892" y="4169664"/>
-            <a:ext cx="685800" cy="475488"/>
+            <a:off x="3911969" y="4169664"/>
+            <a:ext cx="603504" cy="384048"/>
           </a:xfrm>
           <a:prstGeom prst="rect">
             <a:avLst/>
@@ -32501,7 +32138,7 @@
                 <a:ea typeface="Trebuchet MS" pitchFamily="34" charset="-122"/>
                 <a:cs typeface="Trebuchet MS" pitchFamily="34" charset="-120"/>
               </a:rPr>
-              <a:t>c</a:t>
+              <a:t>n</a:t>
             </a:r>
             <a:endParaRPr lang="en-US" sz="900" dirty="0"/>
           </a:p>
@@ -32515,12 +32152,12 @@
         </p:nvSpPr>
         <p:spPr>
           <a:xfrm>
-            <a:off x="5759577" y="4169664"/>
-            <a:ext cx="685800" cy="475488"/>
+            <a:off x="4565350" y="4169664"/>
+            <a:ext cx="603504" cy="384048"/>
           </a:xfrm>
           <a:prstGeom prst="rect">
             <a:avLst>
-              <a:gd name="adj" fmla="val 7692"/>
+              <a:gd name="adj" fmla="val 9524"/>
             </a:avLst>
           </a:prstGeom>
           <a:solidFill>
@@ -32542,8 +32179,8 @@
         </p:nvSpPr>
         <p:spPr>
           <a:xfrm>
-            <a:off x="5759577" y="4169664"/>
-            <a:ext cx="685800" cy="475488"/>
+            <a:off x="4565350" y="4169664"/>
+            <a:ext cx="603504" cy="384048"/>
           </a:xfrm>
           <a:prstGeom prst="rect">
             <a:avLst/>
@@ -32567,7 +32204,7 @@
                 <a:ea typeface="Trebuchet MS" pitchFamily="34" charset="-122"/>
                 <a:cs typeface="Trebuchet MS" pitchFamily="34" charset="-120"/>
               </a:rPr>
-              <a:t>t</a:t>
+              <a:t>s</a:t>
             </a:r>
             <a:endParaRPr lang="en-US" sz="900" dirty="0"/>
           </a:p>
@@ -32581,12 +32218,12 @@
         </p:nvSpPr>
         <p:spPr>
           <a:xfrm>
-            <a:off x="6668262" y="4169664"/>
-            <a:ext cx="685800" cy="475488"/>
+            <a:off x="5218730" y="4169664"/>
+            <a:ext cx="603504" cy="384048"/>
           </a:xfrm>
           <a:prstGeom prst="rect">
             <a:avLst>
-              <a:gd name="adj" fmla="val 7692"/>
+              <a:gd name="adj" fmla="val 9524"/>
             </a:avLst>
           </a:prstGeom>
           <a:solidFill>
@@ -32608,8 +32245,8 @@
         </p:nvSpPr>
         <p:spPr>
           <a:xfrm>
-            <a:off x="6668262" y="4169664"/>
-            <a:ext cx="685800" cy="475488"/>
+            <a:off x="5218730" y="4169664"/>
+            <a:ext cx="603504" cy="384048"/>
           </a:xfrm>
           <a:prstGeom prst="rect">
             <a:avLst/>
@@ -32633,7 +32270,7 @@
                 <a:ea typeface="Trebuchet MS" pitchFamily="34" charset="-122"/>
                 <a:cs typeface="Trebuchet MS" pitchFamily="34" charset="-120"/>
               </a:rPr>
-              <a:t>l</a:t>
+              <a:t>a</a:t>
             </a:r>
             <a:endParaRPr lang="en-US" sz="900" dirty="0"/>
           </a:p>
@@ -32647,12 +32284,12 @@
         </p:nvSpPr>
         <p:spPr>
           <a:xfrm>
-            <a:off x="7576947" y="4169664"/>
-            <a:ext cx="685800" cy="475488"/>
+            <a:off x="5872111" y="4169664"/>
+            <a:ext cx="603504" cy="384048"/>
           </a:xfrm>
           <a:prstGeom prst="rect">
             <a:avLst>
-              <a:gd name="adj" fmla="val 7692"/>
+              <a:gd name="adj" fmla="val 9524"/>
             </a:avLst>
           </a:prstGeom>
           <a:solidFill>
@@ -32674,8 +32311,8 @@
         </p:nvSpPr>
         <p:spPr>
           <a:xfrm>
-            <a:off x="7576947" y="4169664"/>
-            <a:ext cx="685800" cy="475488"/>
+            <a:off x="5872111" y="4169664"/>
+            <a:ext cx="603504" cy="384048"/>
           </a:xfrm>
           <a:prstGeom prst="rect">
             <a:avLst/>
@@ -32699,7 +32336,244 @@
                 <a:ea typeface="Trebuchet MS" pitchFamily="34" charset="-122"/>
                 <a:cs typeface="Trebuchet MS" pitchFamily="34" charset="-120"/>
               </a:rPr>
-              <a:t>y</a:t>
+              <a:t>c</a:t>
+            </a:r>
+            <a:endParaRPr lang="en-US" sz="900" dirty="0"/>
+          </a:p>
+        </p:txBody>
+      </p:sp>
+      <p:sp>
+        <p:nvSpPr>
+          <p:cNvPr id="53" name="Shape 51"/>
+          <p:cNvSpPr/>
+          <p:nvPr/>
+        </p:nvSpPr>
+        <p:spPr>
+          <a:xfrm>
+            <a:off x="6525491" y="4169664"/>
+            <a:ext cx="603504" cy="384048"/>
+          </a:xfrm>
+          <a:prstGeom prst="rect">
+            <a:avLst>
+              <a:gd name="adj" fmla="val 9524"/>
+            </a:avLst>
+          </a:prstGeom>
+          <a:solidFill>
+            <a:srgbClr val="FFFFFF"/>
+          </a:solidFill>
+          <a:ln w="12700">
+            <a:solidFill>
+              <a:srgbClr val="DB2777"/>
+            </a:solidFill>
+            <a:prstDash val="solid"/>
+          </a:ln>
+        </p:spPr>
+      </p:sp>
+      <p:sp>
+        <p:nvSpPr>
+          <p:cNvPr id="54" name="Text 52"/>
+          <p:cNvSpPr/>
+          <p:nvPr/>
+        </p:nvSpPr>
+        <p:spPr>
+          <a:xfrm>
+            <a:off x="6525491" y="4169664"/>
+            <a:ext cx="603504" cy="384048"/>
+          </a:xfrm>
+          <a:prstGeom prst="rect">
+            <a:avLst/>
+          </a:prstGeom>
+          <a:noFill/>
+          <a:ln/>
+        </p:spPr>
+        <p:txBody>
+          <a:bodyPr wrap="square" lIns="0" tIns="0" rIns="0" bIns="0" rtlCol="0" anchor="ctr"/>
+          <a:lstStyle/>
+          <a:p>
+            <a:pPr algn="ctr" indent="0" marL="0">
+              <a:buNone/>
+            </a:pPr>
+            <a:r>
+              <a:rPr lang="en-US" sz="900" b="1" dirty="0">
+                <a:solidFill>
+                  <a:srgbClr val="9D174D"/>
+                </a:solidFill>
+                <a:latin typeface="Trebuchet MS" pitchFamily="34" charset="0"/>
+                <a:ea typeface="Trebuchet MS" pitchFamily="34" charset="-122"/>
+                <a:cs typeface="Trebuchet MS" pitchFamily="34" charset="-120"/>
+              </a:rPr>
+              <a:t>t</a:t>
+            </a:r>
+            <a:endParaRPr lang="en-US" sz="900" dirty="0"/>
+          </a:p>
+        </p:txBody>
+      </p:sp>
+      <p:sp>
+        <p:nvSpPr>
+          <p:cNvPr id="55" name="Shape 53"/>
+          <p:cNvSpPr/>
+          <p:nvPr/>
+        </p:nvSpPr>
+        <p:spPr>
+          <a:xfrm>
+            <a:off x="7178871" y="4169664"/>
+            <a:ext cx="603504" cy="384048"/>
+          </a:xfrm>
+          <a:prstGeom prst="rect">
+            <a:avLst>
+              <a:gd name="adj" fmla="val 9524"/>
+            </a:avLst>
+          </a:prstGeom>
+          <a:solidFill>
+            <a:srgbClr val="FFFFFF"/>
+          </a:solidFill>
+          <a:ln w="12700">
+            <a:solidFill>
+              <a:srgbClr val="DB2777"/>
+            </a:solidFill>
+            <a:prstDash val="solid"/>
+          </a:ln>
+        </p:spPr>
+      </p:sp>
+      <p:sp>
+        <p:nvSpPr>
+          <p:cNvPr id="56" name="Text 54"/>
+          <p:cNvSpPr/>
+          <p:nvPr/>
+        </p:nvSpPr>
+        <p:spPr>
+          <a:xfrm>
+            <a:off x="7178871" y="4169664"/>
+            <a:ext cx="603504" cy="384048"/>
+          </a:xfrm>
+          <a:prstGeom prst="rect">
+            <a:avLst/>
+          </a:prstGeom>
+          <a:noFill/>
+          <a:ln/>
+        </p:spPr>
+        <p:txBody>
+          <a:bodyPr wrap="square" lIns="0" tIns="0" rIns="0" bIns="0" rtlCol="0" anchor="ctr"/>
+          <a:lstStyle/>
+          <a:p>
+            <a:pPr algn="ctr" indent="0" marL="0">
+              <a:buNone/>
+            </a:pPr>
+            <a:r>
+              <a:rPr lang="en-US" sz="900" b="1" dirty="0">
+                <a:solidFill>
+                  <a:srgbClr val="9D174D"/>
+                </a:solidFill>
+                <a:latin typeface="Trebuchet MS" pitchFamily="34" charset="0"/>
+                <a:ea typeface="Trebuchet MS" pitchFamily="34" charset="-122"/>
+                <a:cs typeface="Trebuchet MS" pitchFamily="34" charset="-120"/>
+              </a:rPr>
+              <a:t>io</a:t>
+            </a:r>
+            <a:endParaRPr lang="en-US" sz="900" dirty="0"/>
+          </a:p>
+        </p:txBody>
+      </p:sp>
+      <p:sp>
+        <p:nvSpPr>
+          <p:cNvPr id="57" name="Text 55"/>
+          <p:cNvSpPr/>
+          <p:nvPr/>
+        </p:nvSpPr>
+        <p:spPr>
+          <a:xfrm>
+            <a:off x="7178871" y="4572000"/>
+            <a:ext cx="603504" cy="219456"/>
+          </a:xfrm>
+          <a:prstGeom prst="rect">
+            <a:avLst/>
+          </a:prstGeom>
+          <a:noFill/>
+          <a:ln/>
+        </p:spPr>
+        <p:txBody>
+          <a:bodyPr wrap="square" lIns="0" tIns="0" rIns="0" bIns="0" rtlCol="0" anchor="t"/>
+          <a:lstStyle/>
+          <a:p>
+            <a:pPr algn="ctr" indent="0" marL="0">
+              <a:buNone/>
+            </a:pPr>
+            <a:r>
+              <a:rPr lang="en-US" sz="750" i="1" dirty="0">
+                <a:solidFill>
+                  <a:srgbClr val="94A3B8"/>
+                </a:solidFill>
+                <a:latin typeface="Calibri" pitchFamily="34" charset="0"/>
+                <a:ea typeface="Calibri" pitchFamily="34" charset="-122"/>
+                <a:cs typeface="Calibri" pitchFamily="34" charset="-120"/>
+              </a:rPr>
+              <a:t>/sh/</a:t>
+            </a:r>
+            <a:endParaRPr lang="en-US" sz="750" dirty="0"/>
+          </a:p>
+        </p:txBody>
+      </p:sp>
+      <p:sp>
+        <p:nvSpPr>
+          <p:cNvPr id="58" name="Shape 56"/>
+          <p:cNvSpPr/>
+          <p:nvPr/>
+        </p:nvSpPr>
+        <p:spPr>
+          <a:xfrm>
+            <a:off x="7832252" y="4169664"/>
+            <a:ext cx="603504" cy="384048"/>
+          </a:xfrm>
+          <a:prstGeom prst="rect">
+            <a:avLst>
+              <a:gd name="adj" fmla="val 9524"/>
+            </a:avLst>
+          </a:prstGeom>
+          <a:solidFill>
+            <a:srgbClr val="FFFFFF"/>
+          </a:solidFill>
+          <a:ln w="12700">
+            <a:solidFill>
+              <a:srgbClr val="DB2777"/>
+            </a:solidFill>
+            <a:prstDash val="solid"/>
+          </a:ln>
+        </p:spPr>
+      </p:sp>
+      <p:sp>
+        <p:nvSpPr>
+          <p:cNvPr id="59" name="Text 57"/>
+          <p:cNvSpPr/>
+          <p:nvPr/>
+        </p:nvSpPr>
+        <p:spPr>
+          <a:xfrm>
+            <a:off x="7832252" y="4169664"/>
+            <a:ext cx="603504" cy="384048"/>
+          </a:xfrm>
+          <a:prstGeom prst="rect">
+            <a:avLst/>
+          </a:prstGeom>
+          <a:noFill/>
+          <a:ln/>
+        </p:spPr>
+        <p:txBody>
+          <a:bodyPr wrap="square" lIns="0" tIns="0" rIns="0" bIns="0" rtlCol="0" anchor="ctr"/>
+          <a:lstStyle/>
+          <a:p>
+            <a:pPr algn="ctr" indent="0" marL="0">
+              <a:buNone/>
+            </a:pPr>
+            <a:r>
+              <a:rPr lang="en-US" sz="900" b="1" dirty="0">
+                <a:solidFill>
+                  <a:srgbClr val="9D174D"/>
+                </a:solidFill>
+                <a:latin typeface="Trebuchet MS" pitchFamily="34" charset="0"/>
+                <a:ea typeface="Trebuchet MS" pitchFamily="34" charset="-122"/>
+                <a:cs typeface="Trebuchet MS" pitchFamily="34" charset="-120"/>
+              </a:rPr>
+              <a:t>n</a:t>
             </a:r>
             <a:endParaRPr lang="en-US" sz="900" dirty="0"/>
           </a:p>
@@ -34653,7 +34527,7 @@
                 <a:ea typeface="Trebuchet MS" pitchFamily="34" charset="-122"/>
                 <a:cs typeface="Trebuchet MS" pitchFamily="34" charset="-120"/>
               </a:rPr>
-              <a:t>ex-</a:t>
+              <a:t>inter-</a:t>
             </a:r>
             <a:endParaRPr lang="en-US" sz="1300" dirty="0"/>
           </a:p>
@@ -34806,7 +34680,7 @@
                 <a:ea typeface="Trebuchet MS" pitchFamily="34" charset="-122"/>
                 <a:cs typeface="Trebuchet MS" pitchFamily="34" charset="-120"/>
               </a:rPr>
-              <a:t>inter-</a:t>
+              <a:t>trans-</a:t>
             </a:r>
             <a:endParaRPr lang="en-US" sz="1300" dirty="0"/>
           </a:p>
@@ -34959,7 +34833,7 @@
                 <a:ea typeface="Trebuchet MS" pitchFamily="34" charset="-122"/>
                 <a:cs typeface="Trebuchet MS" pitchFamily="34" charset="-120"/>
               </a:rPr>
-              <a:t>trans-</a:t>
+              <a:t>over-</a:t>
             </a:r>
             <a:endParaRPr lang="en-US" sz="1300" dirty="0"/>
           </a:p>
@@ -35112,7 +34986,7 @@
                 <a:ea typeface="Trebuchet MS" pitchFamily="34" charset="-122"/>
                 <a:cs typeface="Trebuchet MS" pitchFamily="34" charset="-120"/>
               </a:rPr>
-              <a:t>over-</a:t>
+              <a:t>ex-</a:t>
             </a:r>
             <a:endParaRPr lang="en-US" sz="1300" dirty="0"/>
           </a:p>
@@ -35201,7 +35075,7 @@
                 <a:ea typeface="Trebuchet MS" pitchFamily="34" charset="-122"/>
                 <a:cs typeface="Trebuchet MS" pitchFamily="34" charset="-120"/>
               </a:rPr>
-              <a:t>-ly</a:t>
+              <a:t>-ment</a:t>
             </a:r>
             <a:endParaRPr lang="en-US" sz="1300" dirty="0"/>
           </a:p>
@@ -35504,7 +35378,7 @@
                 <a:ea typeface="Trebuchet MS" pitchFamily="34" charset="-122"/>
                 <a:cs typeface="Trebuchet MS" pitchFamily="34" charset="-120"/>
               </a:rPr>
-              <a:t>interact</a:t>
+              <a:t>active</a:t>
             </a:r>
             <a:endParaRPr lang="en-US" sz="1200" dirty="0"/>
           </a:p>
@@ -35570,7 +35444,7 @@
                 <a:ea typeface="Trebuchet MS" pitchFamily="34" charset="-122"/>
                 <a:cs typeface="Trebuchet MS" pitchFamily="34" charset="-120"/>
               </a:rPr>
-              <a:t>active</a:t>
+              <a:t>interact</a:t>
             </a:r>
             <a:endParaRPr lang="en-US" sz="1200" dirty="0"/>
           </a:p>
@@ -35702,7 +35576,7 @@
                 <a:ea typeface="Trebuchet MS" pitchFamily="34" charset="-122"/>
                 <a:cs typeface="Trebuchet MS" pitchFamily="34" charset="-120"/>
               </a:rPr>
-              <a:t>exactly</a:t>
+              <a:t>transaction</a:t>
             </a:r>
             <a:endParaRPr lang="en-US" sz="1200" dirty="0"/>
           </a:p>
@@ -35768,7 +35642,7 @@
                 <a:ea typeface="Trebuchet MS" pitchFamily="34" charset="-122"/>
                 <a:cs typeface="Trebuchet MS" pitchFamily="34" charset="-120"/>
               </a:rPr>
-              <a:t>transaction</a:t>
+              <a:t>extract</a:t>
             </a:r>
             <a:endParaRPr lang="en-US" sz="1200" dirty="0"/>
           </a:p>
@@ -36956,7 +36830,7 @@
                 <a:ea typeface="Calibri" pitchFamily="34" charset="-122"/>
                 <a:cs typeface="Calibri" pitchFamily="34" charset="-120"/>
               </a:rPr>
-              <a:t>1.  The root 'act' comes from a Latin word meaning to do or perform.</a:t>
+              <a:t>1.  The root 'act' can be found in the word 'transaction'.</a:t>
             </a:r>
             <a:endParaRPr lang="en-US" sz="1300" dirty="0"/>
           </a:p>
@@ -37095,7 +36969,7 @@
                 <a:ea typeface="Calibri" pitchFamily="34" charset="-122"/>
                 <a:cs typeface="Calibri" pitchFamily="34" charset="-120"/>
               </a:rPr>
-              <a:t>2.  The word 'actor' means someone who watches a play.</a:t>
+              <a:t>2.  The prefix 're' in 'react' means again or back.</a:t>
             </a:r>
             <a:endParaRPr lang="en-US" sz="1300" dirty="0"/>
           </a:p>
@@ -37118,11 +36992,11 @@
             </a:avLst>
           </a:prstGeom>
           <a:solidFill>
-            <a:srgbClr val="FEE2E2"/>
-          </a:solidFill>
-          <a:ln w="12700">
-            <a:solidFill>
-              <a:srgbClr val="DC2626"/>
+            <a:srgbClr val="DCFCE7"/>
+          </a:solidFill>
+          <a:ln w="12700">
+            <a:solidFill>
+              <a:srgbClr val="16A34A"/>
             </a:solidFill>
             <a:prstDash val="solid"/>
           </a:ln>
@@ -37155,13 +37029,13 @@
             <a:r>
               <a:rPr lang="en-US" sz="1100" b="1" dirty="0">
                 <a:solidFill>
-                  <a:srgbClr val="DC2626"/>
+                  <a:srgbClr val="16A34A"/>
                 </a:solidFill>
                 <a:latin typeface="Trebuchet MS" pitchFamily="34" charset="0"/>
                 <a:ea typeface="Trebuchet MS" pitchFamily="34" charset="-122"/>
                 <a:cs typeface="Trebuchet MS" pitchFamily="34" charset="-120"/>
               </a:rPr>
-              <a:t>FALSE</a:t>
+              <a:t>TRUE</a:t>
             </a:r>
             <a:endParaRPr lang="en-US" sz="1100" dirty="0"/>
           </a:p>
@@ -37234,7 +37108,7 @@
                 <a:ea typeface="Calibri" pitchFamily="34" charset="-122"/>
                 <a:cs typeface="Calibri" pitchFamily="34" charset="-120"/>
               </a:rPr>
-              <a:t>3.  The word 'react' contains the prefix 're-' meaning again or back.</a:t>
+              <a:t>3.  The word 'active' means someone who does nothing all day.</a:t>
             </a:r>
             <a:endParaRPr lang="en-US" sz="1300" dirty="0"/>
           </a:p>
@@ -37257,11 +37131,11 @@
             </a:avLst>
           </a:prstGeom>
           <a:solidFill>
-            <a:srgbClr val="DCFCE7"/>
-          </a:solidFill>
-          <a:ln w="12700">
-            <a:solidFill>
-              <a:srgbClr val="16A34A"/>
+            <a:srgbClr val="FEE2E2"/>
+          </a:solidFill>
+          <a:ln w="12700">
+            <a:solidFill>
+              <a:srgbClr val="DC2626"/>
             </a:solidFill>
             <a:prstDash val="solid"/>
           </a:ln>
@@ -37294,13 +37168,13 @@
             <a:r>
               <a:rPr lang="en-US" sz="1100" b="1" dirty="0">
                 <a:solidFill>
-                  <a:srgbClr val="16A34A"/>
+                  <a:srgbClr val="DC2626"/>
                 </a:solidFill>
                 <a:latin typeface="Trebuchet MS" pitchFamily="34" charset="0"/>
                 <a:ea typeface="Trebuchet MS" pitchFamily="34" charset="-122"/>
                 <a:cs typeface="Trebuchet MS" pitchFamily="34" charset="-120"/>
               </a:rPr>
-              <a:t>TRUE</a:t>
+              <a:t>FALSE</a:t>
             </a:r>
             <a:endParaRPr lang="en-US" sz="1100" dirty="0"/>
           </a:p>
@@ -37373,7 +37247,7 @@
                 <a:ea typeface="Calibri" pitchFamily="34" charset="-122"/>
                 <a:cs typeface="Calibri" pitchFamily="34" charset="-120"/>
               </a:rPr>
-              <a:t>4.  The word 'active' describes someone who moves around and does things.</a:t>
+              <a:t>4.  The word 'actor' does not contain the root 'act'.</a:t>
             </a:r>
             <a:endParaRPr lang="en-US" sz="1300" dirty="0"/>
           </a:p>
@@ -37396,11 +37270,11 @@
             </a:avLst>
           </a:prstGeom>
           <a:solidFill>
-            <a:srgbClr val="DCFCE7"/>
-          </a:solidFill>
-          <a:ln w="12700">
-            <a:solidFill>
-              <a:srgbClr val="16A34A"/>
+            <a:srgbClr val="FEE2E2"/>
+          </a:solidFill>
+          <a:ln w="12700">
+            <a:solidFill>
+              <a:srgbClr val="DC2626"/>
             </a:solidFill>
             <a:prstDash val="solid"/>
           </a:ln>
@@ -37433,13 +37307,13 @@
             <a:r>
               <a:rPr lang="en-US" sz="1100" b="1" dirty="0">
                 <a:solidFill>
-                  <a:srgbClr val="16A34A"/>
+                  <a:srgbClr val="DC2626"/>
                 </a:solidFill>
                 <a:latin typeface="Trebuchet MS" pitchFamily="34" charset="0"/>
                 <a:ea typeface="Trebuchet MS" pitchFamily="34" charset="-122"/>
                 <a:cs typeface="Trebuchet MS" pitchFamily="34" charset="-120"/>
               </a:rPr>
-              <a:t>TRUE</a:t>
+              <a:t>FALSE</a:t>
             </a:r>
             <a:endParaRPr lang="en-US" sz="1100" dirty="0"/>
           </a:p>
@@ -37512,7 +37386,7 @@
                 <a:ea typeface="Calibri" pitchFamily="34" charset="-122"/>
                 <a:cs typeface="Calibri" pitchFamily="34" charset="-120"/>
               </a:rPr>
-              <a:t>5.  The root 'act' comes from a Greek word meaning to speak.</a:t>
+              <a:t>5.  The root 'act' comes from a Latin word meaning to do or perform.</a:t>
             </a:r>
             <a:endParaRPr lang="en-US" sz="1300" dirty="0"/>
           </a:p>
@@ -37535,11 +37409,11 @@
             </a:avLst>
           </a:prstGeom>
           <a:solidFill>
-            <a:srgbClr val="FEE2E2"/>
-          </a:solidFill>
-          <a:ln w="12700">
-            <a:solidFill>
-              <a:srgbClr val="DC2626"/>
+            <a:srgbClr val="DCFCE7"/>
+          </a:solidFill>
+          <a:ln w="12700">
+            <a:solidFill>
+              <a:srgbClr val="16A34A"/>
             </a:solidFill>
             <a:prstDash val="solid"/>
           </a:ln>
@@ -37572,13 +37446,13 @@
             <a:r>
               <a:rPr lang="en-US" sz="1100" b="1" dirty="0">
                 <a:solidFill>
-                  <a:srgbClr val="DC2626"/>
+                  <a:srgbClr val="16A34A"/>
                 </a:solidFill>
                 <a:latin typeface="Trebuchet MS" pitchFamily="34" charset="0"/>
                 <a:ea typeface="Trebuchet MS" pitchFamily="34" charset="-122"/>
                 <a:cs typeface="Trebuchet MS" pitchFamily="34" charset="-120"/>
               </a:rPr>
-              <a:t>FALSE</a:t>
+              <a:t>TRUE</a:t>
             </a:r>
             <a:endParaRPr lang="en-US" sz="1100" dirty="0"/>
           </a:p>
@@ -38046,7 +37920,7 @@
                 <a:ea typeface="Calibri" pitchFamily="34" charset="-122"/>
                 <a:cs typeface="Calibri" pitchFamily="34" charset="-120"/>
               </a:rPr>
-              <a:t>Origin: Latin: agere</a:t>
+              <a:t>Origin: Latin: agere/actum</a:t>
             </a:r>
             <a:endParaRPr lang="en-US" sz="1100" dirty="0"/>
           </a:p>
@@ -38349,7 +38223,7 @@
                 <a:ea typeface="Trebuchet MS" pitchFamily="34" charset="-122"/>
                 <a:cs typeface="Trebuchet MS" pitchFamily="34" charset="-120"/>
               </a:rPr>
-              <a:t>interact</a:t>
+              <a:t>active</a:t>
             </a:r>
             <a:endParaRPr lang="en-US" sz="1300" dirty="0"/>
           </a:p>
@@ -38415,7 +38289,7 @@
                 <a:ea typeface="Trebuchet MS" pitchFamily="34" charset="-122"/>
                 <a:cs typeface="Trebuchet MS" pitchFamily="34" charset="-120"/>
               </a:rPr>
-              <a:t>active</a:t>
+              <a:t>interact</a:t>
             </a:r>
             <a:endParaRPr lang="en-US" sz="1300" dirty="0"/>
           </a:p>
@@ -38547,7 +38421,7 @@
                 <a:ea typeface="Trebuchet MS" pitchFamily="34" charset="-122"/>
                 <a:cs typeface="Trebuchet MS" pitchFamily="34" charset="-120"/>
               </a:rPr>
-              <a:t>exactly</a:t>
+              <a:t>transaction</a:t>
             </a:r>
             <a:endParaRPr lang="en-US" sz="1300" dirty="0"/>
           </a:p>
@@ -39332,7 +39206,7 @@
                 <a:ea typeface="Trebuchet MS" pitchFamily="34" charset="-122"/>
                 <a:cs typeface="Trebuchet MS" pitchFamily="34" charset="-120"/>
               </a:rPr>
-              <a:t>ex-</a:t>
+              <a:t>inter-</a:t>
             </a:r>
             <a:endParaRPr lang="en-US" sz="1300" dirty="0"/>
           </a:p>
@@ -39485,7 +39359,7 @@
                 <a:ea typeface="Trebuchet MS" pitchFamily="34" charset="-122"/>
                 <a:cs typeface="Trebuchet MS" pitchFamily="34" charset="-120"/>
               </a:rPr>
-              <a:t>inter-</a:t>
+              <a:t>trans-</a:t>
             </a:r>
             <a:endParaRPr lang="en-US" sz="1300" dirty="0"/>
           </a:p>
@@ -39638,7 +39512,7 @@
                 <a:ea typeface="Trebuchet MS" pitchFamily="34" charset="-122"/>
                 <a:cs typeface="Trebuchet MS" pitchFamily="34" charset="-120"/>
               </a:rPr>
-              <a:t>trans-</a:t>
+              <a:t>over-</a:t>
             </a:r>
             <a:endParaRPr lang="en-US" sz="1300" dirty="0"/>
           </a:p>
@@ -39791,7 +39665,7 @@
                 <a:ea typeface="Trebuchet MS" pitchFamily="34" charset="-122"/>
                 <a:cs typeface="Trebuchet MS" pitchFamily="34" charset="-120"/>
               </a:rPr>
-              <a:t>over-</a:t>
+              <a:t>ex-</a:t>
             </a:r>
             <a:endParaRPr lang="en-US" sz="1300" dirty="0"/>
           </a:p>
@@ -39880,7 +39754,7 @@
                 <a:ea typeface="Trebuchet MS" pitchFamily="34" charset="-122"/>
                 <a:cs typeface="Trebuchet MS" pitchFamily="34" charset="-120"/>
               </a:rPr>
-              <a:t>-ly</a:t>
+              <a:t>-ment</a:t>
             </a:r>
             <a:endParaRPr lang="en-US" sz="1300" dirty="0"/>
           </a:p>
@@ -40791,7 +40665,7 @@
                 <a:ea typeface="Calibri" pitchFamily="34" charset="-122"/>
                 <a:cs typeface="Calibri" pitchFamily="34" charset="-120"/>
               </a:rPr>
-              <a:t>Moving around a lot and doing plenty of things.</a:t>
+              <a:t>To communicate and do things together with other people.</a:t>
             </a:r>
             <a:endParaRPr lang="en-US" sz="1200" dirty="0"/>
           </a:p>
@@ -40930,7 +40804,7 @@
                 <a:ea typeface="Calibri" pitchFamily="34" charset="-122"/>
                 <a:cs typeface="Calibri" pitchFamily="34" charset="-120"/>
               </a:rPr>
-              <a:t>To communicate and do things together with others.</a:t>
+              <a:t>Being busy, moving around, and doing lots of things.</a:t>
             </a:r>
             <a:endParaRPr lang="en-US" sz="1200" dirty="0"/>
           </a:p>
@@ -41069,7 +40943,7 @@
                 <a:ea typeface="Calibri" pitchFamily="34" charset="-122"/>
                 <a:cs typeface="Calibri" pitchFamily="34" charset="-120"/>
               </a:rPr>
-              <a:t>Something that is real and truly exists.</a:t>
+              <a:t>Something that is real and true, not imagined or pretend.</a:t>
             </a:r>
             <a:endParaRPr lang="en-US" sz="1200" dirty="0"/>
           </a:p>
@@ -41142,7 +41016,7 @@
                 <a:ea typeface="Trebuchet MS" pitchFamily="34" charset="-122"/>
                 <a:cs typeface="Trebuchet MS" pitchFamily="34" charset="-120"/>
               </a:rPr>
-              <a:t>interact</a:t>
+              <a:t>active</a:t>
             </a:r>
             <a:endParaRPr lang="en-US" sz="1200" dirty="0"/>
           </a:p>
@@ -41208,7 +41082,7 @@
                 <a:ea typeface="Calibri" pitchFamily="34" charset="-122"/>
                 <a:cs typeface="Calibri" pitchFamily="34" charset="-120"/>
               </a:rPr>
-              <a:t>To do something in response to what has happened.</a:t>
+              <a:t>To respond or do something because of what someone else did.</a:t>
             </a:r>
             <a:endParaRPr lang="en-US" sz="1200" dirty="0"/>
           </a:p>
@@ -41281,7 +41155,7 @@
                 <a:ea typeface="Trebuchet MS" pitchFamily="34" charset="-122"/>
                 <a:cs typeface="Trebuchet MS" pitchFamily="34" charset="-120"/>
               </a:rPr>
-              <a:t>active</a:t>
+              <a:t>interact</a:t>
             </a:r>
             <a:endParaRPr lang="en-US" sz="1200" dirty="0"/>
           </a:p>
@@ -41347,7 +41221,7 @@
                 <a:ea typeface="Calibri" pitchFamily="34" charset="-122"/>
                 <a:cs typeface="Calibri" pitchFamily="34" charset="-120"/>
               </a:rPr>
-              <a:t>Completely correct, with no mistakes at all.</a:t>
+              <a:t>When something is bought or sold, like paying for something at a shop.</a:t>
             </a:r>
             <a:endParaRPr lang="en-US" sz="1200" dirty="0"/>
           </a:p>
@@ -41486,7 +41360,7 @@
                 <a:ea typeface="Calibri" pitchFamily="34" charset="-122"/>
                 <a:cs typeface="Calibri" pitchFamily="34" charset="-120"/>
               </a:rPr>
-              <a:t>Something you do or perform; a deed or movement.</a:t>
+              <a:t>The process of doing something or making something happen.</a:t>
             </a:r>
             <a:endParaRPr lang="en-US" sz="1200" dirty="0"/>
           </a:p>
@@ -41559,7 +41433,7 @@
                 <a:ea typeface="Trebuchet MS" pitchFamily="34" charset="-122"/>
                 <a:cs typeface="Trebuchet MS" pitchFamily="34" charset="-120"/>
               </a:rPr>
-              <a:t>exactly</a:t>
+              <a:t>transaction</a:t>
             </a:r>
             <a:endParaRPr lang="en-US" sz="1200" dirty="0"/>
           </a:p>
@@ -41625,7 +41499,7 @@
                 <a:ea typeface="Calibri" pitchFamily="34" charset="-122"/>
                 <a:cs typeface="Calibri" pitchFamily="34" charset="-120"/>
               </a:rPr>
-              <a:t>A person who performs in plays, films or TV shows.</a:t>
+              <a:t>A person who performs in plays, movies, or television shows.</a:t>
             </a:r>
             <a:endParaRPr lang="en-US" sz="1200" dirty="0"/>
           </a:p>
@@ -42120,7 +41994,7 @@
                 <a:ea typeface="Calibri" pitchFamily="34" charset="-122"/>
                 <a:cs typeface="Calibri" pitchFamily="34" charset="-120"/>
               </a:rPr>
-              <a:t>The firefighter's quick action saved the family from the burning building.</a:t>
+              <a:t>The principal praised the student for her kind action in helping a younger child who had fallen over.</a:t>
             </a:r>
             <a:endParaRPr lang="en-US" sz="1500" dirty="0"/>
           </a:p>
@@ -42284,7 +42158,7 @@
                 <a:ea typeface="Calibri" pitchFamily="34" charset="-122"/>
                 <a:cs typeface="Calibri" pitchFamily="34" charset="-120"/>
               </a:rPr>
-              <a:t>The actor rehearsed her lines every night before the big school play.</a:t>
+              <a:t>During the science experiment, the students watched the chemical react with the water and bubble up quickly.</a:t>
             </a:r>
             <a:endParaRPr lang="en-US" sz="1500" dirty="0"/>
           </a:p>
@@ -42448,7 +42322,7 @@
                 <a:ea typeface="Calibri" pitchFamily="34" charset="-122"/>
                 <a:cs typeface="Calibri" pitchFamily="34" charset="-120"/>
               </a:rPr>
-              <a:t>When the teacher gave the signal, everyone had to react as quickly as possible.</a:t>
+              <a:t>The drama teacher encouraged every child to interact with their partner when practising the short play.</a:t>
             </a:r>
             <a:endParaRPr lang="en-US" sz="1500" dirty="0"/>
           </a:p>
